--- a/Trainings/Generative AI.pptx
+++ b/Trainings/Generative AI.pptx
@@ -22,31 +22,50 @@
     <p:sldId id="302" r:id="rId16"/>
     <p:sldId id="303" r:id="rId17"/>
     <p:sldId id="304" r:id="rId18"/>
-    <p:sldId id="305" r:id="rId19"/>
-    <p:sldId id="263" r:id="rId20"/>
-    <p:sldId id="264" r:id="rId21"/>
-    <p:sldId id="265" r:id="rId22"/>
-    <p:sldId id="266" r:id="rId23"/>
-    <p:sldId id="276" r:id="rId24"/>
-    <p:sldId id="277" r:id="rId25"/>
-    <p:sldId id="278" r:id="rId26"/>
-    <p:sldId id="279" r:id="rId27"/>
-    <p:sldId id="280" r:id="rId28"/>
-    <p:sldId id="281" r:id="rId29"/>
-    <p:sldId id="282" r:id="rId30"/>
-    <p:sldId id="283" r:id="rId31"/>
-    <p:sldId id="284" r:id="rId32"/>
-    <p:sldId id="285" r:id="rId33"/>
-    <p:sldId id="286" r:id="rId34"/>
-    <p:sldId id="287" r:id="rId35"/>
-    <p:sldId id="288" r:id="rId36"/>
-    <p:sldId id="289" r:id="rId37"/>
-    <p:sldId id="290" r:id="rId38"/>
-    <p:sldId id="291" r:id="rId39"/>
-    <p:sldId id="292" r:id="rId40"/>
-    <p:sldId id="293" r:id="rId41"/>
-    <p:sldId id="294" r:id="rId42"/>
-    <p:sldId id="295" r:id="rId43"/>
+    <p:sldId id="306" r:id="rId19"/>
+    <p:sldId id="307" r:id="rId20"/>
+    <p:sldId id="308" r:id="rId21"/>
+    <p:sldId id="309" r:id="rId22"/>
+    <p:sldId id="311" r:id="rId23"/>
+    <p:sldId id="310" r:id="rId24"/>
+    <p:sldId id="305" r:id="rId25"/>
+    <p:sldId id="312" r:id="rId26"/>
+    <p:sldId id="313" r:id="rId27"/>
+    <p:sldId id="314" r:id="rId28"/>
+    <p:sldId id="315" r:id="rId29"/>
+    <p:sldId id="316" r:id="rId30"/>
+    <p:sldId id="317" r:id="rId31"/>
+    <p:sldId id="318" r:id="rId32"/>
+    <p:sldId id="319" r:id="rId33"/>
+    <p:sldId id="320" r:id="rId34"/>
+    <p:sldId id="321" r:id="rId35"/>
+    <p:sldId id="322" r:id="rId36"/>
+    <p:sldId id="323" r:id="rId37"/>
+    <p:sldId id="324" r:id="rId38"/>
+    <p:sldId id="263" r:id="rId39"/>
+    <p:sldId id="264" r:id="rId40"/>
+    <p:sldId id="265" r:id="rId41"/>
+    <p:sldId id="266" r:id="rId42"/>
+    <p:sldId id="276" r:id="rId43"/>
+    <p:sldId id="277" r:id="rId44"/>
+    <p:sldId id="278" r:id="rId45"/>
+    <p:sldId id="279" r:id="rId46"/>
+    <p:sldId id="280" r:id="rId47"/>
+    <p:sldId id="281" r:id="rId48"/>
+    <p:sldId id="282" r:id="rId49"/>
+    <p:sldId id="283" r:id="rId50"/>
+    <p:sldId id="284" r:id="rId51"/>
+    <p:sldId id="285" r:id="rId52"/>
+    <p:sldId id="286" r:id="rId53"/>
+    <p:sldId id="287" r:id="rId54"/>
+    <p:sldId id="288" r:id="rId55"/>
+    <p:sldId id="289" r:id="rId56"/>
+    <p:sldId id="290" r:id="rId57"/>
+    <p:sldId id="291" r:id="rId58"/>
+    <p:sldId id="292" r:id="rId59"/>
+    <p:sldId id="293" r:id="rId60"/>
+    <p:sldId id="294" r:id="rId61"/>
+    <p:sldId id="295" r:id="rId62"/>
   </p:sldIdLst>
   <p:sldSz cx="9144000" cy="6858000" type="screen4x3"/>
   <p:notesSz cx="6858000" cy="9144000"/>
@@ -1771,7 +1790,7 @@
           <a:p>
             <a:fld id="{5BCAD085-E8A6-8845-BD4E-CB4CCA059FC4}" type="datetimeFigureOut">
               <a:rPr lang="en-US" smtClean="0"/>
-              <a:t>12/8/2025</a:t>
+              <a:t>12/13/2025</a:t>
             </a:fld>
             <a:endParaRPr lang="en-US"/>
           </a:p>
@@ -1939,7 +1958,7 @@
           <a:p>
             <a:fld id="{5BCAD085-E8A6-8845-BD4E-CB4CCA059FC4}" type="datetimeFigureOut">
               <a:rPr lang="en-US" smtClean="0"/>
-              <a:t>12/8/2025</a:t>
+              <a:t>12/13/2025</a:t>
             </a:fld>
             <a:endParaRPr lang="en-US"/>
           </a:p>
@@ -2117,7 +2136,7 @@
           <a:p>
             <a:fld id="{5BCAD085-E8A6-8845-BD4E-CB4CCA059FC4}" type="datetimeFigureOut">
               <a:rPr lang="en-US" smtClean="0"/>
-              <a:t>12/8/2025</a:t>
+              <a:t>12/13/2025</a:t>
             </a:fld>
             <a:endParaRPr lang="en-US"/>
           </a:p>
@@ -2285,7 +2304,7 @@
           <a:p>
             <a:fld id="{5BCAD085-E8A6-8845-BD4E-CB4CCA059FC4}" type="datetimeFigureOut">
               <a:rPr lang="en-US" smtClean="0"/>
-              <a:t>12/8/2025</a:t>
+              <a:t>12/13/2025</a:t>
             </a:fld>
             <a:endParaRPr lang="en-US"/>
           </a:p>
@@ -2560,7 +2579,7 @@
           <a:p>
             <a:fld id="{5BCAD085-E8A6-8845-BD4E-CB4CCA059FC4}" type="datetimeFigureOut">
               <a:rPr lang="en-US" smtClean="0"/>
-              <a:t>12/8/2025</a:t>
+              <a:t>12/13/2025</a:t>
             </a:fld>
             <a:endParaRPr lang="en-US"/>
           </a:p>
@@ -2845,7 +2864,7 @@
           <a:p>
             <a:fld id="{5BCAD085-E8A6-8845-BD4E-CB4CCA059FC4}" type="datetimeFigureOut">
               <a:rPr lang="en-US" smtClean="0"/>
-              <a:t>12/8/2025</a:t>
+              <a:t>12/13/2025</a:t>
             </a:fld>
             <a:endParaRPr lang="en-US"/>
           </a:p>
@@ -3264,7 +3283,7 @@
           <a:p>
             <a:fld id="{5BCAD085-E8A6-8845-BD4E-CB4CCA059FC4}" type="datetimeFigureOut">
               <a:rPr lang="en-US" smtClean="0"/>
-              <a:t>12/8/2025</a:t>
+              <a:t>12/13/2025</a:t>
             </a:fld>
             <a:endParaRPr lang="en-US"/>
           </a:p>
@@ -3381,7 +3400,7 @@
           <a:p>
             <a:fld id="{5BCAD085-E8A6-8845-BD4E-CB4CCA059FC4}" type="datetimeFigureOut">
               <a:rPr lang="en-US" smtClean="0"/>
-              <a:t>12/8/2025</a:t>
+              <a:t>12/13/2025</a:t>
             </a:fld>
             <a:endParaRPr lang="en-US"/>
           </a:p>
@@ -3476,7 +3495,7 @@
           <a:p>
             <a:fld id="{5BCAD085-E8A6-8845-BD4E-CB4CCA059FC4}" type="datetimeFigureOut">
               <a:rPr lang="en-US" smtClean="0"/>
-              <a:t>12/8/2025</a:t>
+              <a:t>12/13/2025</a:t>
             </a:fld>
             <a:endParaRPr lang="en-US"/>
           </a:p>
@@ -3751,7 +3770,7 @@
           <a:p>
             <a:fld id="{5BCAD085-E8A6-8845-BD4E-CB4CCA059FC4}" type="datetimeFigureOut">
               <a:rPr lang="en-US" smtClean="0"/>
-              <a:t>12/8/2025</a:t>
+              <a:t>12/13/2025</a:t>
             </a:fld>
             <a:endParaRPr lang="en-US"/>
           </a:p>
@@ -4003,7 +4022,7 @@
           <a:p>
             <a:fld id="{5BCAD085-E8A6-8845-BD4E-CB4CCA059FC4}" type="datetimeFigureOut">
               <a:rPr lang="en-US" smtClean="0"/>
-              <a:t>12/8/2025</a:t>
+              <a:t>12/13/2025</a:t>
             </a:fld>
             <a:endParaRPr lang="en-US"/>
           </a:p>
@@ -4214,7 +4233,7 @@
           <a:p>
             <a:fld id="{5BCAD085-E8A6-8845-BD4E-CB4CCA059FC4}" type="datetimeFigureOut">
               <a:rPr lang="en-US" smtClean="0"/>
-              <a:t>12/8/2025</a:t>
+              <a:t>12/13/2025</a:t>
             </a:fld>
             <a:endParaRPr lang="en-US"/>
           </a:p>
@@ -6953,6 +6972,341 @@
           </a:prstGeom>
         </p:spPr>
       </p:pic>
+      <p:sp>
+        <p:nvSpPr>
+          <p:cNvPr id="2" name="TextBox 1">
+            <a:extLst>
+              <a:ext uri="{FF2B5EF4-FFF2-40B4-BE49-F238E27FC236}">
+                <a16:creationId xmlns:a16="http://schemas.microsoft.com/office/drawing/2014/main" id="{8D8FB203-ED09-DA1E-15F0-ED46A2B9FF04}"/>
+              </a:ext>
+            </a:extLst>
+          </p:cNvPr>
+          <p:cNvSpPr txBox="1"/>
+          <p:nvPr/>
+        </p:nvSpPr>
+        <p:spPr>
+          <a:xfrm>
+            <a:off x="1654786" y="451319"/>
+            <a:ext cx="5978817" cy="584775"/>
+          </a:xfrm>
+          <a:prstGeom prst="rect">
+            <a:avLst/>
+          </a:prstGeom>
+          <a:noFill/>
+        </p:spPr>
+        <p:txBody>
+          <a:bodyPr wrap="none" rtlCol="0">
+            <a:spAutoFit/>
+          </a:bodyPr>
+          <a:lstStyle/>
+          <a:p>
+            <a:pPr algn="ctr"/>
+            <a:r>
+              <a:rPr lang="en-US" sz="3200" dirty="0"/>
+              <a:t>LLM Deployment &amp; API Integration</a:t>
+            </a:r>
+          </a:p>
+        </p:txBody>
+      </p:sp>
+      <p:sp>
+        <p:nvSpPr>
+          <p:cNvPr id="3" name="TextBox 2">
+            <a:extLst>
+              <a:ext uri="{FF2B5EF4-FFF2-40B4-BE49-F238E27FC236}">
+                <a16:creationId xmlns:a16="http://schemas.microsoft.com/office/drawing/2014/main" id="{50F33FDB-E2EE-EE3D-F08A-5A4A6155C5DF}"/>
+              </a:ext>
+            </a:extLst>
+          </p:cNvPr>
+          <p:cNvSpPr txBox="1"/>
+          <p:nvPr/>
+        </p:nvSpPr>
+        <p:spPr>
+          <a:xfrm>
+            <a:off x="140338" y="1103961"/>
+            <a:ext cx="8830559" cy="7294305"/>
+          </a:xfrm>
+          <a:prstGeom prst="rect">
+            <a:avLst/>
+          </a:prstGeom>
+          <a:noFill/>
+        </p:spPr>
+        <p:txBody>
+          <a:bodyPr wrap="none" rtlCol="0">
+            <a:spAutoFit/>
+          </a:bodyPr>
+          <a:lstStyle/>
+          <a:p>
+            <a:r>
+              <a:rPr lang="en-US" b="1" dirty="0"/>
+              <a:t>⭐ What </a:t>
+            </a:r>
+            <a:r>
+              <a:rPr lang="en-US" b="1" dirty="0" err="1"/>
+              <a:t>Ollama</a:t>
+            </a:r>
+            <a:r>
+              <a:rPr lang="en-US" b="1" dirty="0"/>
+              <a:t> Actually Is</a:t>
+            </a:r>
+          </a:p>
+          <a:p>
+            <a:r>
+              <a:rPr lang="en-US" dirty="0" err="1"/>
+              <a:t>Ollama</a:t>
+            </a:r>
+            <a:r>
+              <a:rPr lang="en-US" dirty="0"/>
+              <a:t> is a </a:t>
+            </a:r>
+            <a:r>
+              <a:rPr lang="en-US" b="1" dirty="0"/>
+              <a:t>tool that lets you run large language models (LLMs) locally on your laptop/PC</a:t>
+            </a:r>
+            <a:br>
+              <a:rPr lang="en-US" dirty="0"/>
+            </a:br>
+            <a:r>
+              <a:rPr lang="en-US" dirty="0"/>
+              <a:t>Think of it like: </a:t>
+            </a:r>
+            <a:r>
+              <a:rPr lang="en-US" i="1" dirty="0"/>
+              <a:t>“ChatGPT-style models, but running on </a:t>
+            </a:r>
+            <a:r>
+              <a:rPr lang="en-US" b="1" i="1" dirty="0"/>
+              <a:t>your</a:t>
+            </a:r>
+            <a:r>
+              <a:rPr lang="en-US" i="1" dirty="0"/>
+              <a:t> machine instead of in the cloud.”</a:t>
+            </a:r>
+            <a:endParaRPr lang="en-US" dirty="0"/>
+          </a:p>
+          <a:p>
+            <a:r>
+              <a:rPr lang="en-US" dirty="0"/>
+              <a:t>It bundles everything you need:</a:t>
+            </a:r>
+          </a:p>
+          <a:p>
+            <a:pPr marL="285750" indent="-285750">
+              <a:buFont typeface="Arial" panose="020B0604020202020204" pitchFamily="34" charset="0"/>
+              <a:buChar char="•"/>
+            </a:pPr>
+            <a:r>
+              <a:rPr lang="en-US" dirty="0"/>
+              <a:t>Model downloading</a:t>
+            </a:r>
+          </a:p>
+          <a:p>
+            <a:pPr marL="285750" indent="-285750">
+              <a:buFont typeface="Arial" panose="020B0604020202020204" pitchFamily="34" charset="0"/>
+              <a:buChar char="•"/>
+            </a:pPr>
+            <a:r>
+              <a:rPr lang="en-US" dirty="0"/>
+              <a:t>Model serving</a:t>
+            </a:r>
+          </a:p>
+          <a:p>
+            <a:pPr marL="285750" indent="-285750">
+              <a:buFont typeface="Arial" panose="020B0604020202020204" pitchFamily="34" charset="0"/>
+              <a:buChar char="•"/>
+            </a:pPr>
+            <a:r>
+              <a:rPr lang="en-US" dirty="0"/>
+              <a:t>A simple CLI</a:t>
+            </a:r>
+          </a:p>
+          <a:p>
+            <a:pPr marL="285750" indent="-285750">
+              <a:buFont typeface="Arial" panose="020B0604020202020204" pitchFamily="34" charset="0"/>
+              <a:buChar char="•"/>
+            </a:pPr>
+            <a:r>
+              <a:rPr lang="en-US" dirty="0"/>
+              <a:t>A lightweight server API</a:t>
+            </a:r>
+          </a:p>
+          <a:p>
+            <a:r>
+              <a:rPr lang="en-US" dirty="0"/>
+              <a:t>Basically, it’s like </a:t>
+            </a:r>
+            <a:r>
+              <a:rPr lang="en-US" b="1" dirty="0"/>
+              <a:t>Docker for LLMs</a:t>
+            </a:r>
+            <a:r>
+              <a:rPr lang="en-US" dirty="0"/>
+              <a:t>, but way simpler.</a:t>
+            </a:r>
+          </a:p>
+          <a:p>
+            <a:r>
+              <a:rPr lang="en-US" dirty="0">
+                <a:hlinkClick r:id="rId4"/>
+              </a:rPr>
+              <a:t>https://ollama.com/</a:t>
+            </a:r>
+            <a:endParaRPr lang="en-US" dirty="0"/>
+          </a:p>
+          <a:p>
+            <a:endParaRPr lang="en-US" dirty="0"/>
+          </a:p>
+          <a:p>
+            <a:r>
+              <a:rPr lang="en-US" b="1" dirty="0" err="1"/>
+              <a:t>Ollama</a:t>
+            </a:r>
+            <a:r>
+              <a:rPr lang="en-US" b="1" dirty="0"/>
+              <a:t> Setup:</a:t>
+            </a:r>
+          </a:p>
+          <a:p>
+            <a:r>
+              <a:rPr lang="en-US" dirty="0"/>
+              <a:t>docker pull </a:t>
+            </a:r>
+            <a:r>
+              <a:rPr lang="en-US" dirty="0" err="1"/>
+              <a:t>ollama</a:t>
+            </a:r>
+            <a:r>
+              <a:rPr lang="en-US" dirty="0"/>
+              <a:t>/</a:t>
+            </a:r>
+            <a:r>
+              <a:rPr lang="en-US" dirty="0" err="1"/>
+              <a:t>ollama</a:t>
+            </a:r>
+            <a:endParaRPr lang="en-US" dirty="0"/>
+          </a:p>
+          <a:p>
+            <a:r>
+              <a:rPr lang="fi-FI" dirty="0"/>
+              <a:t>docker run -d \</a:t>
+            </a:r>
+          </a:p>
+          <a:p>
+            <a:r>
+              <a:rPr lang="fi-FI" dirty="0"/>
+              <a:t>  --name ollama \</a:t>
+            </a:r>
+          </a:p>
+          <a:p>
+            <a:r>
+              <a:rPr lang="fi-FI" dirty="0"/>
+              <a:t>  -p 11434:11434 \</a:t>
+            </a:r>
+          </a:p>
+          <a:p>
+            <a:r>
+              <a:rPr lang="fi-FI" dirty="0"/>
+              <a:t>  -v ollama:/root/.ollama \</a:t>
+            </a:r>
+          </a:p>
+          <a:p>
+            <a:r>
+              <a:rPr lang="fi-FI" dirty="0"/>
+              <a:t>  ollama/ollama</a:t>
+            </a:r>
+          </a:p>
+          <a:p>
+            <a:r>
+              <a:rPr lang="en-US" dirty="0"/>
+              <a:t>👉 http://localhost:11434</a:t>
+            </a:r>
+            <a:endParaRPr lang="fi-FI" dirty="0"/>
+          </a:p>
+          <a:p>
+            <a:r>
+              <a:rPr lang="fi-FI" sz="1600" dirty="0"/>
+              <a:t>docker run -d --name ollama -p 11434:11434 -v ollama:/root/.ollama ollama/ollama</a:t>
+            </a:r>
+          </a:p>
+          <a:p>
+            <a:endParaRPr lang="fi-FI" dirty="0"/>
+          </a:p>
+          <a:p>
+            <a:endParaRPr lang="fi-FI" dirty="0"/>
+          </a:p>
+          <a:p>
+            <a:endParaRPr lang="en-US" dirty="0"/>
+          </a:p>
+          <a:p>
+            <a:endParaRPr lang="en-US" b="1" dirty="0"/>
+          </a:p>
+          <a:p>
+            <a:endParaRPr lang="en-US" b="1" dirty="0"/>
+          </a:p>
+          <a:p>
+            <a:endParaRPr lang="en-US" dirty="0"/>
+          </a:p>
+        </p:txBody>
+      </p:sp>
+      <p:pic>
+        <p:nvPicPr>
+          <p:cNvPr id="6" name="Picture 5" descr="A screenshot of a computer">
+            <a:extLst>
+              <a:ext uri="{FF2B5EF4-FFF2-40B4-BE49-F238E27FC236}">
+                <a16:creationId xmlns:a16="http://schemas.microsoft.com/office/drawing/2014/main" id="{18CA94AF-85A8-3F53-3B2E-DF3B47FC3230}"/>
+              </a:ext>
+            </a:extLst>
+          </p:cNvPr>
+          <p:cNvPicPr>
+            <a:picLocks noChangeAspect="1"/>
+          </p:cNvPicPr>
+          <p:nvPr/>
+        </p:nvPicPr>
+        <p:blipFill>
+          <a:blip r:embed="rId5"/>
+          <a:stretch>
+            <a:fillRect/>
+          </a:stretch>
+        </p:blipFill>
+        <p:spPr>
+          <a:xfrm>
+            <a:off x="2830653" y="4179183"/>
+            <a:ext cx="6058746" cy="2019582"/>
+          </a:xfrm>
+          <a:prstGeom prst="rect">
+            <a:avLst/>
+          </a:prstGeom>
+        </p:spPr>
+      </p:pic>
+      <p:pic>
+        <p:nvPicPr>
+          <p:cNvPr id="9" name="Picture 8" descr="A diagram of machine learning">
+            <a:extLst>
+              <a:ext uri="{FF2B5EF4-FFF2-40B4-BE49-F238E27FC236}">
+                <a16:creationId xmlns:a16="http://schemas.microsoft.com/office/drawing/2014/main" id="{2DFE9EF5-A4A7-DA12-E078-D194D33B04A5}"/>
+              </a:ext>
+            </a:extLst>
+          </p:cNvPr>
+          <p:cNvPicPr>
+            <a:picLocks noChangeAspect="1"/>
+          </p:cNvPicPr>
+          <p:nvPr/>
+        </p:nvPicPr>
+        <p:blipFill>
+          <a:blip r:embed="rId6"/>
+          <a:stretch>
+            <a:fillRect/>
+          </a:stretch>
+        </p:blipFill>
+        <p:spPr>
+          <a:xfrm>
+            <a:off x="6000486" y="2073032"/>
+            <a:ext cx="2373293" cy="2018620"/>
+          </a:xfrm>
+          <a:prstGeom prst="rect">
+            <a:avLst/>
+          </a:prstGeom>
+        </p:spPr>
+      </p:pic>
     </p:spTree>
     <p:extLst>
       <p:ext uri="{BB962C8B-B14F-4D97-AF65-F5344CB8AC3E}">
@@ -7049,6 +7403,367 @@
           </a:prstGeom>
         </p:spPr>
       </p:pic>
+      <p:sp>
+        <p:nvSpPr>
+          <p:cNvPr id="2" name="TextBox 1">
+            <a:extLst>
+              <a:ext uri="{FF2B5EF4-FFF2-40B4-BE49-F238E27FC236}">
+                <a16:creationId xmlns:a16="http://schemas.microsoft.com/office/drawing/2014/main" id="{D7E1302A-25F7-5356-F088-0C34F5BE06C4}"/>
+              </a:ext>
+            </a:extLst>
+          </p:cNvPr>
+          <p:cNvSpPr txBox="1"/>
+          <p:nvPr/>
+        </p:nvSpPr>
+        <p:spPr>
+          <a:xfrm>
+            <a:off x="1654786" y="451319"/>
+            <a:ext cx="5978817" cy="584775"/>
+          </a:xfrm>
+          <a:prstGeom prst="rect">
+            <a:avLst/>
+          </a:prstGeom>
+          <a:noFill/>
+        </p:spPr>
+        <p:txBody>
+          <a:bodyPr wrap="none" rtlCol="0">
+            <a:spAutoFit/>
+          </a:bodyPr>
+          <a:lstStyle/>
+          <a:p>
+            <a:pPr algn="ctr"/>
+            <a:r>
+              <a:rPr lang="en-US" sz="3200" dirty="0"/>
+              <a:t>LLM Deployment &amp; API Integration</a:t>
+            </a:r>
+          </a:p>
+        </p:txBody>
+      </p:sp>
+      <p:sp>
+        <p:nvSpPr>
+          <p:cNvPr id="3" name="TextBox 2">
+            <a:extLst>
+              <a:ext uri="{FF2B5EF4-FFF2-40B4-BE49-F238E27FC236}">
+                <a16:creationId xmlns:a16="http://schemas.microsoft.com/office/drawing/2014/main" id="{FCB8126F-CBF9-45F9-5B80-AF5DE4B7E837}"/>
+              </a:ext>
+            </a:extLst>
+          </p:cNvPr>
+          <p:cNvSpPr txBox="1"/>
+          <p:nvPr/>
+        </p:nvSpPr>
+        <p:spPr>
+          <a:xfrm>
+            <a:off x="235974" y="1081551"/>
+            <a:ext cx="8672052" cy="6186309"/>
+          </a:xfrm>
+          <a:prstGeom prst="rect">
+            <a:avLst/>
+          </a:prstGeom>
+          <a:noFill/>
+        </p:spPr>
+        <p:txBody>
+          <a:bodyPr wrap="square" rtlCol="0">
+            <a:spAutoFit/>
+          </a:bodyPr>
+          <a:lstStyle/>
+          <a:p>
+            <a:r>
+              <a:rPr lang="en-US" b="1" dirty="0"/>
+              <a:t>⭐ What </a:t>
+            </a:r>
+            <a:r>
+              <a:rPr lang="en-US" b="1" dirty="0" err="1"/>
+              <a:t>OpenWebUI</a:t>
+            </a:r>
+            <a:r>
+              <a:rPr lang="en-US" b="1" dirty="0"/>
+              <a:t> Actually Is</a:t>
+            </a:r>
+          </a:p>
+          <a:p>
+            <a:r>
+              <a:rPr lang="en-US" b="1" dirty="0" err="1"/>
+              <a:t>OpenWebUI</a:t>
+            </a:r>
+            <a:r>
+              <a:rPr lang="en-US" dirty="0"/>
+              <a:t> is an </a:t>
+            </a:r>
+            <a:r>
+              <a:rPr lang="en-US" b="1" dirty="0"/>
+              <a:t>open-source web interface</a:t>
+            </a:r>
+            <a:r>
+              <a:rPr lang="en-US" dirty="0"/>
+              <a:t> that lets you chat with </a:t>
+            </a:r>
+            <a:r>
+              <a:rPr lang="en-US" b="1" dirty="0"/>
+              <a:t>local AI models</a:t>
+            </a:r>
+            <a:r>
+              <a:rPr lang="en-US" dirty="0"/>
+              <a:t> </a:t>
+            </a:r>
+          </a:p>
+          <a:p>
+            <a:r>
+              <a:rPr lang="en-US" dirty="0"/>
+              <a:t>(like Llama, Mistral, Gemma, Qwen, etc.) in a super clean ChatGPT-style UI.</a:t>
+            </a:r>
+            <a:endParaRPr lang="en-US" b="1" dirty="0"/>
+          </a:p>
+          <a:p>
+            <a:r>
+              <a:rPr lang="en-US" b="1" dirty="0"/>
+              <a:t>Run below commands</a:t>
+            </a:r>
+          </a:p>
+          <a:p>
+            <a:pPr marL="285750" indent="-285750">
+              <a:buFont typeface="Arial" panose="020B0604020202020204" pitchFamily="34" charset="0"/>
+              <a:buChar char="•"/>
+            </a:pPr>
+            <a:r>
+              <a:rPr lang="en-US" dirty="0"/>
+              <a:t>docker exec -it </a:t>
+            </a:r>
+            <a:r>
+              <a:rPr lang="en-US" dirty="0" err="1"/>
+              <a:t>ollama</a:t>
+            </a:r>
+            <a:r>
+              <a:rPr lang="en-US" dirty="0"/>
+              <a:t> </a:t>
+            </a:r>
+            <a:r>
+              <a:rPr lang="en-US" dirty="0" err="1"/>
+              <a:t>ollama</a:t>
+            </a:r>
+            <a:r>
+              <a:rPr lang="en-US" dirty="0"/>
+              <a:t> pull llama3 </a:t>
+            </a:r>
+            <a:r>
+              <a:rPr lang="en-US" sz="1400" dirty="0"/>
+              <a:t># downloads the Llama-3 model into the </a:t>
+            </a:r>
+            <a:r>
+              <a:rPr lang="en-US" sz="1400" dirty="0" err="1"/>
+              <a:t>Ollama</a:t>
+            </a:r>
+            <a:r>
+              <a:rPr lang="en-US" sz="1400" dirty="0"/>
+              <a:t> container</a:t>
+            </a:r>
+          </a:p>
+          <a:p>
+            <a:pPr marL="285750" indent="-285750">
+              <a:buFont typeface="Arial" panose="020B0604020202020204" pitchFamily="34" charset="0"/>
+              <a:buChar char="•"/>
+            </a:pPr>
+            <a:r>
+              <a:rPr lang="en-US" dirty="0"/>
+              <a:t>docker run -d -p 3000:8080 -v </a:t>
+            </a:r>
+            <a:r>
+              <a:rPr lang="en-US" dirty="0" err="1"/>
+              <a:t>openwebui</a:t>
+            </a:r>
+            <a:r>
+              <a:rPr lang="en-US" dirty="0"/>
+              <a:t>:/app/backend/data --name </a:t>
+            </a:r>
+            <a:r>
+              <a:rPr lang="en-US" dirty="0" err="1"/>
+              <a:t>openwebui</a:t>
+            </a:r>
+            <a:r>
+              <a:rPr lang="en-US" dirty="0"/>
+              <a:t> ghcr.io/open-</a:t>
+            </a:r>
+            <a:r>
+              <a:rPr lang="en-US" dirty="0" err="1"/>
+              <a:t>webui</a:t>
+            </a:r>
+            <a:r>
+              <a:rPr lang="en-US" dirty="0"/>
+              <a:t>/</a:t>
+            </a:r>
+            <a:r>
+              <a:rPr lang="en-US" dirty="0" err="1"/>
+              <a:t>open-webui:main</a:t>
+            </a:r>
+            <a:endParaRPr lang="en-US" dirty="0"/>
+          </a:p>
+          <a:p>
+            <a:r>
+              <a:rPr lang="en-US" b="1" dirty="0">
+                <a:hlinkClick r:id="rId4"/>
+              </a:rPr>
+              <a:t>http://localhost:3000/</a:t>
+            </a:r>
+            <a:endParaRPr lang="en-US" b="1" dirty="0"/>
+          </a:p>
+          <a:p>
+            <a:r>
+              <a:rPr lang="en-US" b="1" dirty="0"/>
+              <a:t>Pull Model from </a:t>
+            </a:r>
+            <a:r>
+              <a:rPr lang="en-US" b="1" dirty="0" err="1"/>
+              <a:t>Ollama</a:t>
+            </a:r>
+            <a:r>
+              <a:rPr lang="en-US" b="1" dirty="0"/>
+              <a:t>:</a:t>
+            </a:r>
+          </a:p>
+          <a:p>
+            <a:pPr marL="285750" indent="-285750">
+              <a:buFont typeface="Arial" panose="020B0604020202020204" pitchFamily="34" charset="0"/>
+              <a:buChar char="•"/>
+            </a:pPr>
+            <a:r>
+              <a:rPr lang="en-US" dirty="0"/>
+              <a:t>Click download ⬇️</a:t>
+            </a:r>
+          </a:p>
+          <a:p>
+            <a:pPr marL="285750" indent="-285750">
+              <a:buFont typeface="Arial" panose="020B0604020202020204" pitchFamily="34" charset="0"/>
+              <a:buChar char="•"/>
+            </a:pPr>
+            <a:r>
+              <a:rPr lang="en-US" dirty="0"/>
+              <a:t>Enter model tag: gemma:2b</a:t>
+            </a:r>
+          </a:p>
+          <a:p>
+            <a:pPr marL="285750" indent="-285750">
+              <a:buFont typeface="Arial" panose="020B0604020202020204" pitchFamily="34" charset="0"/>
+              <a:buChar char="•"/>
+            </a:pPr>
+            <a:r>
+              <a:rPr lang="en-US" dirty="0"/>
+              <a:t>From Select Model dropdown you can select it</a:t>
+            </a:r>
+          </a:p>
+          <a:p>
+            <a:endParaRPr lang="en-US" dirty="0"/>
+          </a:p>
+          <a:p>
+            <a:r>
+              <a:rPr lang="en-US" b="1" dirty="0" err="1"/>
+              <a:t>FastAPI</a:t>
+            </a:r>
+            <a:r>
+              <a:rPr lang="en-US" b="1" dirty="0"/>
+              <a:t>:</a:t>
+            </a:r>
+          </a:p>
+          <a:p>
+            <a:r>
+              <a:rPr lang="en-US" b="1" dirty="0"/>
+              <a:t>🚀 What </a:t>
+            </a:r>
+            <a:r>
+              <a:rPr lang="en-US" b="1" dirty="0" err="1"/>
+              <a:t>FastAPI</a:t>
+            </a:r>
+            <a:r>
+              <a:rPr lang="en-US" b="1" dirty="0"/>
+              <a:t> Actually Is</a:t>
+            </a:r>
+          </a:p>
+          <a:p>
+            <a:r>
+              <a:rPr lang="en-US" dirty="0" err="1"/>
+              <a:t>FastAPI</a:t>
+            </a:r>
+            <a:r>
+              <a:rPr lang="en-US" dirty="0"/>
+              <a:t> is a </a:t>
+            </a:r>
+            <a:r>
+              <a:rPr lang="en-US" b="1" dirty="0"/>
+              <a:t>modern, high-speed web framework</a:t>
+            </a:r>
+            <a:r>
+              <a:rPr lang="en-US" dirty="0"/>
+              <a:t> for building APIs with Python.</a:t>
+            </a:r>
+          </a:p>
+          <a:p>
+            <a:pPr marL="285750" indent="-285750">
+              <a:buFont typeface="Arial" panose="020B0604020202020204" pitchFamily="34" charset="0"/>
+              <a:buChar char="•"/>
+            </a:pPr>
+            <a:r>
+              <a:rPr lang="en-US" dirty="0"/>
+              <a:t>pip install "</a:t>
+            </a:r>
+            <a:r>
+              <a:rPr lang="en-US" dirty="0" err="1"/>
+              <a:t>fastapi</a:t>
+            </a:r>
+            <a:r>
+              <a:rPr lang="en-US" dirty="0"/>
+              <a:t>[standard]“</a:t>
+            </a:r>
+          </a:p>
+          <a:p>
+            <a:pPr marL="285750" indent="-285750">
+              <a:buFont typeface="Arial" panose="020B0604020202020204" pitchFamily="34" charset="0"/>
+              <a:buChar char="•"/>
+            </a:pPr>
+            <a:r>
+              <a:rPr lang="en-US" dirty="0"/>
+              <a:t>pip install </a:t>
+            </a:r>
+            <a:r>
+              <a:rPr lang="en-US" dirty="0" err="1"/>
+              <a:t>ollama</a:t>
+            </a:r>
+            <a:endParaRPr lang="en-US" dirty="0"/>
+          </a:p>
+          <a:p>
+            <a:pPr marL="285750" indent="-285750">
+              <a:buFont typeface="Arial" panose="020B0604020202020204" pitchFamily="34" charset="0"/>
+              <a:buChar char="•"/>
+            </a:pPr>
+            <a:r>
+              <a:rPr lang="en-US" dirty="0"/>
+              <a:t>To run the app: </a:t>
+            </a:r>
+            <a:r>
+              <a:rPr lang="en-US" dirty="0" err="1"/>
+              <a:t>fastapi</a:t>
+            </a:r>
+            <a:r>
+              <a:rPr lang="en-US" dirty="0"/>
+              <a:t> dev server.py</a:t>
+            </a:r>
+          </a:p>
+          <a:p>
+            <a:r>
+              <a:rPr lang="en-US" b="1" dirty="0"/>
+              <a:t>Code: </a:t>
+            </a:r>
+            <a:r>
+              <a:rPr lang="en-US" b="1" dirty="0" err="1"/>
+              <a:t>ollama_fastapi</a:t>
+            </a:r>
+            <a:endParaRPr lang="en-US" b="1" dirty="0"/>
+          </a:p>
+          <a:p>
+            <a:endParaRPr lang="en-US" dirty="0"/>
+          </a:p>
+          <a:p>
+            <a:endParaRPr lang="en-US" dirty="0"/>
+          </a:p>
+        </p:txBody>
+      </p:sp>
     </p:spTree>
     <p:extLst>
       <p:ext uri="{BB962C8B-B14F-4D97-AF65-F5344CB8AC3E}">
@@ -7070,7 +7785,7 @@
         <p:cNvPr id="1" name="">
           <a:extLst>
             <a:ext uri="{FF2B5EF4-FFF2-40B4-BE49-F238E27FC236}">
-              <a16:creationId xmlns:a16="http://schemas.microsoft.com/office/drawing/2014/main" id="{24901F32-3FF6-7D16-6DD1-4A68D4E0EEB0}"/>
+              <a16:creationId xmlns:a16="http://schemas.microsoft.com/office/drawing/2014/main" id="{1E62C0A1-BC01-1115-E941-5DF733238406}"/>
             </a:ext>
           </a:extLst>
         </p:cNvPr>
@@ -7090,7 +7805,7 @@
           <p:cNvPr id="4" name="Picture 3" descr="450808d6-f018-4170-8863-633347777b52.png">
             <a:extLst>
               <a:ext uri="{FF2B5EF4-FFF2-40B4-BE49-F238E27FC236}">
-                <a16:creationId xmlns:a16="http://schemas.microsoft.com/office/drawing/2014/main" id="{875AAB9E-A056-01FE-2C11-F044B16368F3}"/>
+                <a16:creationId xmlns:a16="http://schemas.microsoft.com/office/drawing/2014/main" id="{E37E4F55-D95A-7D1C-331D-36D49BB03A4B}"/>
               </a:ext>
             </a:extLst>
           </p:cNvPr>
@@ -7120,7 +7835,7 @@
           <p:cNvPr id="8" name="Picture 7">
             <a:extLst>
               <a:ext uri="{FF2B5EF4-FFF2-40B4-BE49-F238E27FC236}">
-                <a16:creationId xmlns:a16="http://schemas.microsoft.com/office/drawing/2014/main" id="{8A8CD53B-D5A6-2AC9-1B3E-AF3AB2707B9D}"/>
+                <a16:creationId xmlns:a16="http://schemas.microsoft.com/office/drawing/2014/main" id="{2488A900-E194-F8C9-5C2C-A7EEDB2605D4}"/>
               </a:ext>
             </a:extLst>
           </p:cNvPr>
@@ -7145,10 +7860,226 @@
           </a:prstGeom>
         </p:spPr>
       </p:pic>
+      <p:sp>
+        <p:nvSpPr>
+          <p:cNvPr id="2" name="TextBox 1">
+            <a:extLst>
+              <a:ext uri="{FF2B5EF4-FFF2-40B4-BE49-F238E27FC236}">
+                <a16:creationId xmlns:a16="http://schemas.microsoft.com/office/drawing/2014/main" id="{1C2FBE1C-F1A0-AD06-5F5A-57F4C533D914}"/>
+              </a:ext>
+            </a:extLst>
+          </p:cNvPr>
+          <p:cNvSpPr txBox="1"/>
+          <p:nvPr/>
+        </p:nvSpPr>
+        <p:spPr>
+          <a:xfrm>
+            <a:off x="2369377" y="451319"/>
+            <a:ext cx="4549643" cy="584775"/>
+          </a:xfrm>
+          <a:prstGeom prst="rect">
+            <a:avLst/>
+          </a:prstGeom>
+          <a:noFill/>
+        </p:spPr>
+        <p:txBody>
+          <a:bodyPr wrap="none" rtlCol="0">
+            <a:spAutoFit/>
+          </a:bodyPr>
+          <a:lstStyle/>
+          <a:p>
+            <a:pPr algn="ctr"/>
+            <a:r>
+              <a:rPr lang="en-US" sz="3200" dirty="0"/>
+              <a:t>LLM via Hugging Face Hub</a:t>
+            </a:r>
+          </a:p>
+        </p:txBody>
+      </p:sp>
+      <p:sp>
+        <p:nvSpPr>
+          <p:cNvPr id="3" name="TextBox 2">
+            <a:extLst>
+              <a:ext uri="{FF2B5EF4-FFF2-40B4-BE49-F238E27FC236}">
+                <a16:creationId xmlns:a16="http://schemas.microsoft.com/office/drawing/2014/main" id="{1AF80705-71A3-9BB2-2A96-41A3B28165CC}"/>
+              </a:ext>
+            </a:extLst>
+          </p:cNvPr>
+          <p:cNvSpPr txBox="1"/>
+          <p:nvPr/>
+        </p:nvSpPr>
+        <p:spPr>
+          <a:xfrm>
+            <a:off x="462116" y="1130716"/>
+            <a:ext cx="8219768" cy="5078313"/>
+          </a:xfrm>
+          <a:prstGeom prst="rect">
+            <a:avLst/>
+          </a:prstGeom>
+          <a:noFill/>
+        </p:spPr>
+        <p:txBody>
+          <a:bodyPr wrap="square" rtlCol="0">
+            <a:spAutoFit/>
+          </a:bodyPr>
+          <a:lstStyle/>
+          <a:p>
+            <a:r>
+              <a:rPr lang="en-US" dirty="0"/>
+              <a:t>Hugging Face is basically the </a:t>
+            </a:r>
+            <a:r>
+              <a:rPr lang="en-US" b="1" dirty="0"/>
+              <a:t>biggest platform for sharing AI models</a:t>
+            </a:r>
+            <a:r>
+              <a:rPr lang="en-US" dirty="0"/>
+              <a:t>, datasets, and tools used in machine learning 🤖✨. It lets developers download, train, fine-tune, and deploy models easily — kind of like a </a:t>
+            </a:r>
+            <a:r>
+              <a:rPr lang="en-US" b="1" dirty="0"/>
+              <a:t>GitHub for AI</a:t>
+            </a:r>
+            <a:r>
+              <a:rPr lang="en-US" dirty="0"/>
+              <a:t>. Super popular for NLP, LLMs, and everything transformer-related. </a:t>
+            </a:r>
+            <a:r>
+              <a:rPr lang="en-US" dirty="0">
+                <a:hlinkClick r:id="rId4"/>
+              </a:rPr>
+              <a:t>https://huggingface.co/</a:t>
+            </a:r>
+            <a:endParaRPr lang="en-US" dirty="0"/>
+          </a:p>
+          <a:p>
+            <a:endParaRPr lang="en-US" dirty="0"/>
+          </a:p>
+          <a:p>
+            <a:pPr marL="285750" indent="-285750">
+              <a:buFont typeface="Arial" panose="020B0604020202020204" pitchFamily="34" charset="0"/>
+              <a:buChar char="•"/>
+            </a:pPr>
+            <a:r>
+              <a:rPr lang="en-US" dirty="0"/>
+              <a:t>pip install --upgrade transformers datasets </a:t>
+            </a:r>
+            <a:r>
+              <a:rPr lang="en-US" dirty="0" err="1"/>
+              <a:t>huggingface_hub</a:t>
+            </a:r>
+            <a:r>
+              <a:rPr lang="en-US" dirty="0"/>
+              <a:t> </a:t>
+            </a:r>
+            <a:r>
+              <a:rPr lang="en-US" dirty="0" err="1"/>
+              <a:t>fsspec</a:t>
+            </a:r>
+            <a:r>
+              <a:rPr lang="en-US" dirty="0"/>
+              <a:t> </a:t>
+            </a:r>
+            <a:r>
+              <a:rPr lang="en-US" dirty="0" err="1"/>
+              <a:t>huggingface_hub</a:t>
+            </a:r>
+            <a:r>
+              <a:rPr lang="en-US" dirty="0"/>
+              <a:t>[cli]</a:t>
+            </a:r>
+          </a:p>
+          <a:p>
+            <a:pPr marL="285750" indent="-285750">
+              <a:buFont typeface="Arial" panose="020B0604020202020204" pitchFamily="34" charset="0"/>
+              <a:buChar char="•"/>
+            </a:pPr>
+            <a:r>
+              <a:rPr lang="en-US" dirty="0" err="1"/>
+              <a:t>huggingface</a:t>
+            </a:r>
+            <a:r>
+              <a:rPr lang="en-US" dirty="0"/>
+              <a:t>-cli login</a:t>
+            </a:r>
+          </a:p>
+          <a:p>
+            <a:pPr marL="285750" indent="-285750">
+              <a:buFont typeface="Arial" panose="020B0604020202020204" pitchFamily="34" charset="0"/>
+              <a:buChar char="•"/>
+            </a:pPr>
+            <a:r>
+              <a:rPr lang="en-US" dirty="0"/>
+              <a:t>Go to you HF account -&gt; Access Token</a:t>
+            </a:r>
+          </a:p>
+          <a:p>
+            <a:pPr marL="285750" indent="-285750">
+              <a:buFont typeface="Arial" panose="020B0604020202020204" pitchFamily="34" charset="0"/>
+              <a:buChar char="•"/>
+            </a:pPr>
+            <a:r>
+              <a:rPr lang="en-US" dirty="0"/>
+              <a:t>pip install transformers</a:t>
+            </a:r>
+          </a:p>
+          <a:p>
+            <a:pPr marL="285750" indent="-285750">
+              <a:buFont typeface="Arial" panose="020B0604020202020204" pitchFamily="34" charset="0"/>
+              <a:buChar char="•"/>
+            </a:pPr>
+            <a:r>
+              <a:rPr lang="en-US" dirty="0"/>
+              <a:t>pip install torch</a:t>
+            </a:r>
+          </a:p>
+          <a:p>
+            <a:pPr marL="285750" indent="-285750">
+              <a:buFont typeface="Arial" panose="020B0604020202020204" pitchFamily="34" charset="0"/>
+              <a:buChar char="•"/>
+            </a:pPr>
+            <a:endParaRPr lang="en-US" dirty="0"/>
+          </a:p>
+          <a:p>
+            <a:r>
+              <a:rPr lang="en-US" b="1" dirty="0"/>
+              <a:t>Code: </a:t>
+            </a:r>
+            <a:r>
+              <a:rPr lang="en-US" b="1" dirty="0" err="1"/>
+              <a:t>hf_basics</a:t>
+            </a:r>
+            <a:endParaRPr lang="en-US" b="1" dirty="0"/>
+          </a:p>
+          <a:p>
+            <a:pPr marL="285750" indent="-285750">
+              <a:buFont typeface="Arial" panose="020B0604020202020204" pitchFamily="34" charset="0"/>
+              <a:buChar char="•"/>
+            </a:pPr>
+            <a:endParaRPr lang="en-US" dirty="0"/>
+          </a:p>
+          <a:p>
+            <a:pPr marL="285750" indent="-285750">
+              <a:buFont typeface="Arial" panose="020B0604020202020204" pitchFamily="34" charset="0"/>
+              <a:buChar char="•"/>
+            </a:pPr>
+            <a:endParaRPr lang="en-US" dirty="0"/>
+          </a:p>
+          <a:p>
+            <a:endParaRPr lang="en-US" dirty="0"/>
+          </a:p>
+          <a:p>
+            <a:endParaRPr lang="en-US" dirty="0"/>
+          </a:p>
+          <a:p>
+            <a:endParaRPr lang="en-US" dirty="0"/>
+          </a:p>
+        </p:txBody>
+      </p:sp>
     </p:spTree>
     <p:extLst>
       <p:ext uri="{BB962C8B-B14F-4D97-AF65-F5344CB8AC3E}">
-        <p14:creationId xmlns:p14="http://schemas.microsoft.com/office/powerpoint/2010/main" val="79130882"/>
+        <p14:creationId xmlns:p14="http://schemas.microsoft.com/office/powerpoint/2010/main" val="1536515429"/>
       </p:ext>
     </p:extLst>
   </p:cSld>
@@ -7166,7 +8097,7 @@
         <p:cNvPr id="1" name="">
           <a:extLst>
             <a:ext uri="{FF2B5EF4-FFF2-40B4-BE49-F238E27FC236}">
-              <a16:creationId xmlns:a16="http://schemas.microsoft.com/office/drawing/2014/main" id="{918A4BAA-1C5A-CAA9-C9FC-DD7D6D1B885F}"/>
+              <a16:creationId xmlns:a16="http://schemas.microsoft.com/office/drawing/2014/main" id="{67B6CDD4-C2BC-B466-811F-0DD8D18D9E46}"/>
             </a:ext>
           </a:extLst>
         </p:cNvPr>
@@ -7186,7 +8117,7 @@
           <p:cNvPr id="4" name="Picture 3" descr="450808d6-f018-4170-8863-633347777b52.png">
             <a:extLst>
               <a:ext uri="{FF2B5EF4-FFF2-40B4-BE49-F238E27FC236}">
-                <a16:creationId xmlns:a16="http://schemas.microsoft.com/office/drawing/2014/main" id="{D9A4198F-9067-591F-AAA0-7048EDC76384}"/>
+                <a16:creationId xmlns:a16="http://schemas.microsoft.com/office/drawing/2014/main" id="{D3A81097-96C3-660D-AEF3-5DC66E9AF83A}"/>
               </a:ext>
             </a:extLst>
           </p:cNvPr>
@@ -7216,7 +8147,7 @@
           <p:cNvPr id="8" name="Picture 7">
             <a:extLst>
               <a:ext uri="{FF2B5EF4-FFF2-40B4-BE49-F238E27FC236}">
-                <a16:creationId xmlns:a16="http://schemas.microsoft.com/office/drawing/2014/main" id="{DDCF901E-F4C3-1D57-7D18-A750A8FE62D9}"/>
+                <a16:creationId xmlns:a16="http://schemas.microsoft.com/office/drawing/2014/main" id="{B7637C0A-F574-527E-3A6C-ABDA8DF6EAFB}"/>
               </a:ext>
             </a:extLst>
           </p:cNvPr>
@@ -7241,42 +8172,12 @@
           </a:prstGeom>
         </p:spPr>
       </p:pic>
-      <p:pic>
-        <p:nvPicPr>
-          <p:cNvPr id="3" name="Picture 2">
-            <a:extLst>
-              <a:ext uri="{FF2B5EF4-FFF2-40B4-BE49-F238E27FC236}">
-                <a16:creationId xmlns:a16="http://schemas.microsoft.com/office/drawing/2014/main" id="{BF5854C7-0689-E5F0-456E-83BEBD14360D}"/>
-              </a:ext>
-            </a:extLst>
-          </p:cNvPr>
-          <p:cNvPicPr>
-            <a:picLocks noChangeAspect="1"/>
-          </p:cNvPicPr>
-          <p:nvPr/>
-        </p:nvPicPr>
-        <p:blipFill>
-          <a:blip r:embed="rId4"/>
-          <a:stretch>
-            <a:fillRect/>
-          </a:stretch>
-        </p:blipFill>
-        <p:spPr>
-          <a:xfrm>
-            <a:off x="2186808" y="898446"/>
-            <a:ext cx="4415932" cy="5959554"/>
-          </a:xfrm>
-          <a:prstGeom prst="rect">
-            <a:avLst/>
-          </a:prstGeom>
-        </p:spPr>
-      </p:pic>
       <p:sp>
         <p:nvSpPr>
-          <p:cNvPr id="5" name="TextBox 4">
-            <a:extLst>
-              <a:ext uri="{FF2B5EF4-FFF2-40B4-BE49-F238E27FC236}">
-                <a16:creationId xmlns:a16="http://schemas.microsoft.com/office/drawing/2014/main" id="{63439A7D-F546-5FAA-5A69-35192F6BACB1}"/>
+          <p:cNvPr id="2" name="TextBox 1">
+            <a:extLst>
+              <a:ext uri="{FF2B5EF4-FFF2-40B4-BE49-F238E27FC236}">
+                <a16:creationId xmlns:a16="http://schemas.microsoft.com/office/drawing/2014/main" id="{87058AE1-7C5A-2369-FA0D-75D2EE4424AA}"/>
               </a:ext>
             </a:extLst>
           </p:cNvPr>
@@ -7285,8 +8186,8 @@
         </p:nvSpPr>
         <p:spPr>
           <a:xfrm>
-            <a:off x="2178462" y="137652"/>
-            <a:ext cx="4432625" cy="584775"/>
+            <a:off x="2572959" y="451319"/>
+            <a:ext cx="4142481" cy="584775"/>
           </a:xfrm>
           <a:prstGeom prst="rect">
             <a:avLst/>
@@ -7302,15 +8203,181 @@
             <a:pPr algn="ctr"/>
             <a:r>
               <a:rPr lang="en-US" sz="3200" dirty="0"/>
-              <a:t>Transformer Architecture</a:t>
-            </a:r>
+              <a:t>Agentic AI &amp; Workflows</a:t>
+            </a:r>
+          </a:p>
+        </p:txBody>
+      </p:sp>
+      <p:sp>
+        <p:nvSpPr>
+          <p:cNvPr id="3" name="TextBox 2">
+            <a:extLst>
+              <a:ext uri="{FF2B5EF4-FFF2-40B4-BE49-F238E27FC236}">
+                <a16:creationId xmlns:a16="http://schemas.microsoft.com/office/drawing/2014/main" id="{122FC20F-88DF-E829-31A1-52E8D982E5D0}"/>
+              </a:ext>
+            </a:extLst>
+          </p:cNvPr>
+          <p:cNvSpPr txBox="1"/>
+          <p:nvPr/>
+        </p:nvSpPr>
+        <p:spPr>
+          <a:xfrm>
+            <a:off x="889820" y="1288026"/>
+            <a:ext cx="7364361" cy="4247317"/>
+          </a:xfrm>
+          <a:prstGeom prst="rect">
+            <a:avLst/>
+          </a:prstGeom>
+          <a:noFill/>
+        </p:spPr>
+        <p:txBody>
+          <a:bodyPr wrap="square" rtlCol="0">
+            <a:spAutoFit/>
+          </a:bodyPr>
+          <a:lstStyle/>
+          <a:p>
+            <a:r>
+              <a:rPr lang="en-US" b="1" dirty="0"/>
+              <a:t>🧠 What </a:t>
+            </a:r>
+            <a:r>
+              <a:rPr lang="en-US" b="1" i="1" dirty="0"/>
+              <a:t>is</a:t>
+            </a:r>
+            <a:r>
+              <a:rPr lang="en-US" b="1" dirty="0"/>
+              <a:t> Agentic AI?</a:t>
+            </a:r>
+          </a:p>
+          <a:p>
+            <a:r>
+              <a:rPr lang="en-US" dirty="0"/>
+              <a:t>Agentic AI is basically the glow-up version of traditional AI. Instead of just answering questions or generating text when you ask, an </a:t>
+            </a:r>
+            <a:r>
+              <a:rPr lang="en-US" b="1" dirty="0"/>
+              <a:t>agentic AI actually takes initiative</a:t>
+            </a:r>
+            <a:r>
+              <a:rPr lang="en-US" dirty="0"/>
+              <a:t>. </a:t>
+            </a:r>
+          </a:p>
+          <a:p>
+            <a:r>
+              <a:rPr lang="en-US" dirty="0"/>
+              <a:t>It can:</a:t>
+            </a:r>
+          </a:p>
+          <a:p>
+            <a:pPr marL="285750" indent="-285750">
+              <a:buFont typeface="Arial" panose="020B0604020202020204" pitchFamily="34" charset="0"/>
+              <a:buChar char="•"/>
+            </a:pPr>
+            <a:r>
+              <a:rPr lang="en-US" dirty="0"/>
+              <a:t>Understand your goal</a:t>
+            </a:r>
+          </a:p>
+          <a:p>
+            <a:pPr marL="285750" indent="-285750">
+              <a:buFont typeface="Arial" panose="020B0604020202020204" pitchFamily="34" charset="0"/>
+              <a:buChar char="•"/>
+            </a:pPr>
+            <a:r>
+              <a:rPr lang="en-US" dirty="0"/>
+              <a:t>Make a plan</a:t>
+            </a:r>
+          </a:p>
+          <a:p>
+            <a:pPr marL="285750" indent="-285750">
+              <a:buFont typeface="Arial" panose="020B0604020202020204" pitchFamily="34" charset="0"/>
+              <a:buChar char="•"/>
+            </a:pPr>
+            <a:r>
+              <a:rPr lang="en-US" dirty="0"/>
+              <a:t>Take multiple steps</a:t>
+            </a:r>
+          </a:p>
+          <a:p>
+            <a:pPr marL="285750" indent="-285750">
+              <a:buFont typeface="Arial" panose="020B0604020202020204" pitchFamily="34" charset="0"/>
+              <a:buChar char="•"/>
+            </a:pPr>
+            <a:r>
+              <a:rPr lang="en-US" dirty="0"/>
+              <a:t>Use tools, APIs, or other software</a:t>
+            </a:r>
+          </a:p>
+          <a:p>
+            <a:pPr marL="285750" indent="-285750">
+              <a:buFont typeface="Arial" panose="020B0604020202020204" pitchFamily="34" charset="0"/>
+              <a:buChar char="•"/>
+            </a:pPr>
+            <a:r>
+              <a:rPr lang="en-US" dirty="0"/>
+              <a:t>Evaluate its own output</a:t>
+            </a:r>
+          </a:p>
+          <a:p>
+            <a:pPr marL="285750" indent="-285750">
+              <a:buFont typeface="Arial" panose="020B0604020202020204" pitchFamily="34" charset="0"/>
+              <a:buChar char="•"/>
+            </a:pPr>
+            <a:r>
+              <a:rPr lang="en-US" dirty="0"/>
+              <a:t>Retry or correct itself</a:t>
+            </a:r>
+          </a:p>
+          <a:p>
+            <a:pPr marL="285750" indent="-285750">
+              <a:buFont typeface="Arial" panose="020B0604020202020204" pitchFamily="34" charset="0"/>
+              <a:buChar char="•"/>
+            </a:pPr>
+            <a:endParaRPr lang="en-US" dirty="0"/>
+          </a:p>
+          <a:p>
+            <a:pPr marL="285750" indent="-285750">
+              <a:buFont typeface="Arial" panose="020B0604020202020204" pitchFamily="34" charset="0"/>
+              <a:buChar char="•"/>
+            </a:pPr>
+            <a:r>
+              <a:rPr lang="en-US" b="1" dirty="0"/>
+              <a:t>AI Agent = an AI that can </a:t>
+            </a:r>
+            <a:r>
+              <a:rPr lang="en-US" b="1" i="1" dirty="0"/>
+              <a:t>think, plan, and take actions</a:t>
+            </a:r>
+            <a:r>
+              <a:rPr lang="en-US" b="1" dirty="0"/>
+              <a:t> on its own.</a:t>
+            </a:r>
+            <a:br>
+              <a:rPr lang="en-US" dirty="0"/>
+            </a:br>
+            <a:r>
+              <a:rPr lang="en-US" dirty="0"/>
+              <a:t>Instead of just answering questions, it actually </a:t>
+            </a:r>
+            <a:r>
+              <a:rPr lang="en-US" b="1" dirty="0"/>
+              <a:t>does tasks</a:t>
+            </a:r>
+            <a:r>
+              <a:rPr lang="en-US" dirty="0"/>
+              <a:t> for you.</a:t>
+            </a:r>
+          </a:p>
+          <a:p>
+            <a:endParaRPr lang="en-US" dirty="0"/>
           </a:p>
         </p:txBody>
       </p:sp>
     </p:spTree>
     <p:extLst>
       <p:ext uri="{BB962C8B-B14F-4D97-AF65-F5344CB8AC3E}">
-        <p14:creationId xmlns:p14="http://schemas.microsoft.com/office/powerpoint/2010/main" val="1194120463"/>
+        <p14:creationId xmlns:p14="http://schemas.microsoft.com/office/powerpoint/2010/main" val="2561090994"/>
       </p:ext>
     </p:extLst>
   </p:cSld>
@@ -7594,7 +8661,7 @@
         <p:cNvPr id="1" name="">
           <a:extLst>
             <a:ext uri="{FF2B5EF4-FFF2-40B4-BE49-F238E27FC236}">
-              <a16:creationId xmlns:a16="http://schemas.microsoft.com/office/drawing/2014/main" id="{A46B21C2-430E-F3F7-4C93-EF0617BAB252}"/>
+              <a16:creationId xmlns:a16="http://schemas.microsoft.com/office/drawing/2014/main" id="{EC74ACD2-D9E7-14A9-BBA3-8BBF7D6BD60C}"/>
             </a:ext>
           </a:extLst>
         </p:cNvPr>
@@ -7614,7 +8681,7 @@
           <p:cNvPr id="4" name="Picture 3" descr="450808d6-f018-4170-8863-633347777b52.png">
             <a:extLst>
               <a:ext uri="{FF2B5EF4-FFF2-40B4-BE49-F238E27FC236}">
-                <a16:creationId xmlns:a16="http://schemas.microsoft.com/office/drawing/2014/main" id="{B8BB053A-C5CD-2147-8B1E-CC18BDCC764B}"/>
+                <a16:creationId xmlns:a16="http://schemas.microsoft.com/office/drawing/2014/main" id="{5B601946-2583-24E4-9355-2DD59DA2520C}"/>
               </a:ext>
             </a:extLst>
           </p:cNvPr>
@@ -7631,7 +8698,7 @@
         </p:blipFill>
         <p:spPr>
           <a:xfrm>
-            <a:off x="0" y="0"/>
+            <a:off x="0" y="58992"/>
             <a:ext cx="9144000" cy="6858000"/>
           </a:xfrm>
           <a:prstGeom prst="rect">
@@ -7644,7 +8711,7 @@
           <p:cNvPr id="8" name="Picture 7">
             <a:extLst>
               <a:ext uri="{FF2B5EF4-FFF2-40B4-BE49-F238E27FC236}">
-                <a16:creationId xmlns:a16="http://schemas.microsoft.com/office/drawing/2014/main" id="{F55C91A6-7004-3FA7-6C32-8FDE6E71FAF3}"/>
+                <a16:creationId xmlns:a16="http://schemas.microsoft.com/office/drawing/2014/main" id="{262E988D-BA42-FC28-0695-5B26319A6252}"/>
               </a:ext>
             </a:extLst>
           </p:cNvPr>
@@ -7671,10 +8738,10 @@
       </p:pic>
       <p:sp>
         <p:nvSpPr>
-          <p:cNvPr id="5" name="TextBox 4">
-            <a:extLst>
-              <a:ext uri="{FF2B5EF4-FFF2-40B4-BE49-F238E27FC236}">
-                <a16:creationId xmlns:a16="http://schemas.microsoft.com/office/drawing/2014/main" id="{E99D19FE-7462-2102-1261-3FBE15110EF6}"/>
+          <p:cNvPr id="2" name="TextBox 1">
+            <a:extLst>
+              <a:ext uri="{FF2B5EF4-FFF2-40B4-BE49-F238E27FC236}">
+                <a16:creationId xmlns:a16="http://schemas.microsoft.com/office/drawing/2014/main" id="{25D6386D-3C6D-E65A-273A-77DCFBFD4780}"/>
               </a:ext>
             </a:extLst>
           </p:cNvPr>
@@ -7683,178 +8750,8 @@
         </p:nvSpPr>
         <p:spPr>
           <a:xfrm>
-            <a:off x="1143000" y="1101370"/>
-            <a:ext cx="6858000" cy="4770537"/>
-          </a:xfrm>
-          <a:prstGeom prst="rect">
-            <a:avLst/>
-          </a:prstGeom>
-          <a:noFill/>
-        </p:spPr>
-        <p:txBody>
-          <a:bodyPr wrap="square">
-            <a:spAutoFit/>
-          </a:bodyPr>
-          <a:lstStyle/>
-          <a:p>
-            <a:endParaRPr lang="en-US" sz="1600" dirty="0"/>
-          </a:p>
-          <a:p>
-            <a:pPr>
-              <a:defRPr sz="2000"/>
-            </a:pPr>
-            <a:r>
-              <a:rPr lang="en-US" sz="1600" dirty="0"/>
-              <a:t>🔹 Transformers process the entire sentence at once, not word-by-word.</a:t>
-            </a:r>
-          </a:p>
-          <a:p>
-            <a:pPr>
-              <a:defRPr sz="2000"/>
-            </a:pPr>
-            <a:endParaRPr lang="en-US" sz="1600" dirty="0"/>
-          </a:p>
-          <a:p>
-            <a:pPr>
-              <a:defRPr sz="2000"/>
-            </a:pPr>
-            <a:r>
-              <a:rPr lang="en-US" sz="1600" dirty="0"/>
-              <a:t>👉 **Input Embedding**</a:t>
-            </a:r>
-          </a:p>
-          <a:p>
-            <a:pPr>
-              <a:defRPr sz="2000"/>
-            </a:pPr>
-            <a:r>
-              <a:rPr lang="en-US" sz="1600" dirty="0"/>
-              <a:t>   - Converts each word into a numeric vector (learned representation).</a:t>
-            </a:r>
-          </a:p>
-          <a:p>
-            <a:pPr>
-              <a:defRPr sz="2000"/>
-            </a:pPr>
-            <a:r>
-              <a:rPr lang="en-US" sz="1600" dirty="0"/>
-              <a:t>   - Helps the model understand meaning of words.</a:t>
-            </a:r>
-          </a:p>
-          <a:p>
-            <a:pPr>
-              <a:defRPr sz="2000"/>
-            </a:pPr>
-            <a:endParaRPr lang="en-US" sz="1600" dirty="0"/>
-          </a:p>
-          <a:p>
-            <a:pPr>
-              <a:defRPr sz="2000"/>
-            </a:pPr>
-            <a:r>
-              <a:rPr lang="en-US" sz="1600" dirty="0"/>
-              <a:t>👉 **Positional Encoding**</a:t>
-            </a:r>
-          </a:p>
-          <a:p>
-            <a:pPr>
-              <a:defRPr sz="2000"/>
-            </a:pPr>
-            <a:r>
-              <a:rPr lang="en-US" sz="1600" dirty="0"/>
-              <a:t>   - Adds order information so the model knows which word comes first.</a:t>
-            </a:r>
-          </a:p>
-          <a:p>
-            <a:pPr>
-              <a:defRPr sz="2000"/>
-            </a:pPr>
-            <a:endParaRPr lang="en-US" sz="1600" dirty="0"/>
-          </a:p>
-          <a:p>
-            <a:pPr>
-              <a:defRPr sz="2000"/>
-            </a:pPr>
-            <a:r>
-              <a:rPr lang="en-US" sz="1600" dirty="0"/>
-              <a:t>👉 **Encoder (repeated N times)**</a:t>
-            </a:r>
-          </a:p>
-          <a:p>
-            <a:pPr>
-              <a:defRPr sz="2000"/>
-            </a:pPr>
-            <a:r>
-              <a:rPr lang="en-US" sz="1600" dirty="0"/>
-              <a:t>   • **Self-Attention:** Every word looks at all other words.</a:t>
-            </a:r>
-          </a:p>
-          <a:p>
-            <a:pPr>
-              <a:defRPr sz="2000"/>
-            </a:pPr>
-            <a:r>
-              <a:rPr lang="en-US" sz="1600" dirty="0"/>
-              <a:t>       Example: In “She saw the dog with a telescope”,</a:t>
-            </a:r>
-          </a:p>
-          <a:p>
-            <a:pPr>
-              <a:defRPr sz="2000"/>
-            </a:pPr>
-            <a:r>
-              <a:rPr lang="en-US" sz="1600" dirty="0"/>
-              <a:t>       the model figures out which words relate to each other.</a:t>
-            </a:r>
-          </a:p>
-          <a:p>
-            <a:pPr>
-              <a:defRPr sz="2000"/>
-            </a:pPr>
-            <a:endParaRPr lang="en-US" sz="1600" dirty="0"/>
-          </a:p>
-          <a:p>
-            <a:pPr>
-              <a:defRPr sz="2000"/>
-            </a:pPr>
-            <a:r>
-              <a:rPr lang="en-US" sz="1600" dirty="0"/>
-              <a:t>   • **Feed Forward Network:** A small neural network that improves the representation.</a:t>
-            </a:r>
-          </a:p>
-          <a:p>
-            <a:pPr>
-              <a:defRPr sz="2000"/>
-            </a:pPr>
-            <a:endParaRPr lang="en-US" sz="1600" dirty="0"/>
-          </a:p>
-          <a:p>
-            <a:pPr>
-              <a:defRPr sz="2000"/>
-            </a:pPr>
-            <a:r>
-              <a:rPr lang="en-US" sz="1600" dirty="0"/>
-              <a:t>⭐ Output of Encoder = Deep understanding of the full input sentence.</a:t>
-            </a:r>
-          </a:p>
-        </p:txBody>
-      </p:sp>
-      <p:sp>
-        <p:nvSpPr>
-          <p:cNvPr id="6" name="TextBox 5">
-            <a:extLst>
-              <a:ext uri="{FF2B5EF4-FFF2-40B4-BE49-F238E27FC236}">
-                <a16:creationId xmlns:a16="http://schemas.microsoft.com/office/drawing/2014/main" id="{D3966DC8-D7DB-2D43-14CA-534C3C24EF5D}"/>
-              </a:ext>
-            </a:extLst>
-          </p:cNvPr>
-          <p:cNvSpPr txBox="1"/>
-          <p:nvPr/>
-        </p:nvSpPr>
-        <p:spPr>
-          <a:xfrm>
-            <a:off x="2178462" y="137652"/>
-            <a:ext cx="4432625" cy="584775"/>
+            <a:off x="3096338" y="284171"/>
+            <a:ext cx="3095720" cy="584775"/>
           </a:xfrm>
           <a:prstGeom prst="rect">
             <a:avLst/>
@@ -7870,15 +8767,227 @@
             <a:pPr algn="ctr"/>
             <a:r>
               <a:rPr lang="en-US" sz="3200" dirty="0"/>
-              <a:t>Transformer Architecture</a:t>
-            </a:r>
+              <a:t>RAG &amp; </a:t>
+            </a:r>
+            <a:r>
+              <a:rPr lang="en-US" sz="3200" dirty="0" err="1"/>
+              <a:t>LangChain</a:t>
+            </a:r>
+            <a:endParaRPr lang="en-US" sz="3200" dirty="0"/>
+          </a:p>
+        </p:txBody>
+      </p:sp>
+      <p:sp>
+        <p:nvSpPr>
+          <p:cNvPr id="3" name="TextBox 2">
+            <a:extLst>
+              <a:ext uri="{FF2B5EF4-FFF2-40B4-BE49-F238E27FC236}">
+                <a16:creationId xmlns:a16="http://schemas.microsoft.com/office/drawing/2014/main" id="{55334BEC-FDE8-2B93-A36E-4D768A6882DB}"/>
+              </a:ext>
+            </a:extLst>
+          </p:cNvPr>
+          <p:cNvSpPr txBox="1"/>
+          <p:nvPr/>
+        </p:nvSpPr>
+        <p:spPr>
+          <a:xfrm>
+            <a:off x="717755" y="825907"/>
+            <a:ext cx="7708490" cy="6740307"/>
+          </a:xfrm>
+          <a:prstGeom prst="rect">
+            <a:avLst/>
+          </a:prstGeom>
+          <a:noFill/>
+        </p:spPr>
+        <p:txBody>
+          <a:bodyPr wrap="square" rtlCol="0">
+            <a:spAutoFit/>
+          </a:bodyPr>
+          <a:lstStyle/>
+          <a:p>
+            <a:r>
+              <a:rPr lang="en-US" b="1" dirty="0"/>
+              <a:t>🔵 RAG (Retrieval-Augmented Generation)</a:t>
+            </a:r>
+          </a:p>
+          <a:p>
+            <a:r>
+              <a:rPr lang="en-US" dirty="0"/>
+              <a:t>A method where the AI </a:t>
+            </a:r>
+            <a:r>
+              <a:rPr lang="en-US" b="1" dirty="0"/>
+              <a:t>searches your documents</a:t>
+            </a:r>
+            <a:r>
+              <a:rPr lang="en-US" dirty="0"/>
+              <a:t> and uses that info to answer accurately.</a:t>
+            </a:r>
+          </a:p>
+          <a:p>
+            <a:r>
+              <a:rPr lang="en-US" dirty="0"/>
+              <a:t>👉 </a:t>
+            </a:r>
+            <a:r>
+              <a:rPr lang="en-US" i="1" dirty="0"/>
+              <a:t>“AI + your data = smarter answers.”</a:t>
+            </a:r>
+            <a:endParaRPr lang="en-US" dirty="0"/>
+          </a:p>
+          <a:p>
+            <a:r>
+              <a:rPr lang="en-US" b="1" dirty="0"/>
+              <a:t>🟣 </a:t>
+            </a:r>
+            <a:r>
+              <a:rPr lang="en-US" b="1" dirty="0" err="1"/>
+              <a:t>LangChain</a:t>
+            </a:r>
+            <a:endParaRPr lang="en-US" b="1" dirty="0"/>
+          </a:p>
+          <a:p>
+            <a:r>
+              <a:rPr lang="en-US" dirty="0"/>
+              <a:t>A framework that helps you </a:t>
+            </a:r>
+            <a:r>
+              <a:rPr lang="en-US" b="1" dirty="0"/>
+              <a:t>build AI apps</a:t>
+            </a:r>
+            <a:r>
+              <a:rPr lang="en-US" dirty="0"/>
+              <a:t> like RAG systems, agents, and chatbots easily.</a:t>
+            </a:r>
+          </a:p>
+          <a:p>
+            <a:r>
+              <a:rPr lang="en-US" dirty="0"/>
+              <a:t>👉 </a:t>
+            </a:r>
+            <a:r>
+              <a:rPr lang="en-US" i="1" dirty="0"/>
+              <a:t>“Tools for building LLM workflows.”</a:t>
+            </a:r>
+          </a:p>
+          <a:p>
+            <a:r>
+              <a:rPr lang="en-US" b="1" dirty="0"/>
+              <a:t>✅ Problem RAG Solves</a:t>
+            </a:r>
+          </a:p>
+          <a:p>
+            <a:r>
+              <a:rPr lang="en-US" dirty="0"/>
+              <a:t>LLMs don’t know your private/company data and often </a:t>
+            </a:r>
+            <a:r>
+              <a:rPr lang="en-US" b="1" dirty="0"/>
+              <a:t>hallucinate</a:t>
+            </a:r>
+            <a:r>
+              <a:rPr lang="en-US" dirty="0"/>
+              <a:t> when asked about things outside their training.</a:t>
+            </a:r>
+          </a:p>
+          <a:p>
+            <a:r>
+              <a:rPr lang="en-US" dirty="0"/>
+              <a:t>RAG fixes this by </a:t>
+            </a:r>
+            <a:r>
+              <a:rPr lang="en-US" b="1" dirty="0"/>
+              <a:t>retrieving the correct information from your documents</a:t>
+            </a:r>
+            <a:r>
+              <a:rPr lang="en-US" dirty="0"/>
+              <a:t> and giving it to the AI before it answers — making responses </a:t>
+            </a:r>
+            <a:r>
+              <a:rPr lang="en-US" b="1" dirty="0"/>
+              <a:t>accurate, up-to-date, and grounded in real facts</a:t>
+            </a:r>
+            <a:r>
+              <a:rPr lang="en-US" dirty="0"/>
+              <a:t>.</a:t>
+            </a:r>
+          </a:p>
+          <a:p>
+            <a:r>
+              <a:rPr lang="en-US" b="1" dirty="0"/>
+              <a:t>🔵 What is a RAG Pipeline?</a:t>
+            </a:r>
+          </a:p>
+          <a:p>
+            <a:r>
+              <a:rPr lang="en-US" dirty="0"/>
+              <a:t>A </a:t>
+            </a:r>
+            <a:r>
+              <a:rPr lang="en-US" b="1" dirty="0"/>
+              <a:t>RAG pipeline</a:t>
+            </a:r>
+            <a:r>
+              <a:rPr lang="en-US" dirty="0"/>
+              <a:t> is the step-by-step process where an AI:</a:t>
+            </a:r>
+          </a:p>
+          <a:p>
+            <a:r>
+              <a:rPr lang="en-US" b="1" dirty="0"/>
+              <a:t>Takes your question</a:t>
+            </a:r>
+            <a:endParaRPr lang="en-US" dirty="0"/>
+          </a:p>
+          <a:p>
+            <a:r>
+              <a:rPr lang="en-US" b="1" dirty="0"/>
+              <a:t>Searches</a:t>
+            </a:r>
+            <a:r>
+              <a:rPr lang="en-US" dirty="0"/>
+              <a:t> your documents (vector DB)</a:t>
+            </a:r>
+          </a:p>
+          <a:p>
+            <a:r>
+              <a:rPr lang="en-US" b="1" dirty="0"/>
+              <a:t>Retrieves</a:t>
+            </a:r>
+            <a:r>
+              <a:rPr lang="en-US" dirty="0"/>
+              <a:t> the most relevant chunks</a:t>
+            </a:r>
+          </a:p>
+          <a:p>
+            <a:r>
+              <a:rPr lang="en-US" b="1" dirty="0"/>
+              <a:t>Sends them to the LLM</a:t>
+            </a:r>
+            <a:endParaRPr lang="en-US" dirty="0"/>
+          </a:p>
+          <a:p>
+            <a:r>
+              <a:rPr lang="en-US" b="1" dirty="0"/>
+              <a:t>Generates an answer based on that retrieved info</a:t>
+            </a:r>
+            <a:endParaRPr lang="en-US" dirty="0"/>
+          </a:p>
+          <a:p>
+            <a:endParaRPr lang="en-US" dirty="0"/>
+          </a:p>
+          <a:p>
+            <a:endParaRPr lang="en-US" dirty="0"/>
+          </a:p>
+          <a:p>
+            <a:endParaRPr lang="en-US" dirty="0"/>
           </a:p>
         </p:txBody>
       </p:sp>
     </p:spTree>
     <p:extLst>
       <p:ext uri="{BB962C8B-B14F-4D97-AF65-F5344CB8AC3E}">
-        <p14:creationId xmlns:p14="http://schemas.microsoft.com/office/powerpoint/2010/main" val="2941902518"/>
+        <p14:creationId xmlns:p14="http://schemas.microsoft.com/office/powerpoint/2010/main" val="2811871711"/>
       </p:ext>
     </p:extLst>
   </p:cSld>
@@ -7896,7 +9005,7 @@
         <p:cNvPr id="1" name="">
           <a:extLst>
             <a:ext uri="{FF2B5EF4-FFF2-40B4-BE49-F238E27FC236}">
-              <a16:creationId xmlns:a16="http://schemas.microsoft.com/office/drawing/2014/main" id="{050174EB-C701-2807-CA17-EDB532FE2364}"/>
+              <a16:creationId xmlns:a16="http://schemas.microsoft.com/office/drawing/2014/main" id="{668E7E0E-815C-1370-4CCC-54AE356A5E3C}"/>
             </a:ext>
           </a:extLst>
         </p:cNvPr>
@@ -7916,7 +9025,7 @@
           <p:cNvPr id="4" name="Picture 3" descr="450808d6-f018-4170-8863-633347777b52.png">
             <a:extLst>
               <a:ext uri="{FF2B5EF4-FFF2-40B4-BE49-F238E27FC236}">
-                <a16:creationId xmlns:a16="http://schemas.microsoft.com/office/drawing/2014/main" id="{81DD0DCF-A7EB-4D00-1766-BAD18A7082B1}"/>
+                <a16:creationId xmlns:a16="http://schemas.microsoft.com/office/drawing/2014/main" id="{16F17A03-5D06-568D-8A78-1399D417A25A}"/>
               </a:ext>
             </a:extLst>
           </p:cNvPr>
@@ -7946,7 +9055,7 @@
           <p:cNvPr id="8" name="Picture 7">
             <a:extLst>
               <a:ext uri="{FF2B5EF4-FFF2-40B4-BE49-F238E27FC236}">
-                <a16:creationId xmlns:a16="http://schemas.microsoft.com/office/drawing/2014/main" id="{22877BF3-B2AB-BC1D-0D44-905DEEA2F5CB}"/>
+                <a16:creationId xmlns:a16="http://schemas.microsoft.com/office/drawing/2014/main" id="{DDCFE3F5-0C15-29D3-D458-4058ADAF2E8E}"/>
               </a:ext>
             </a:extLst>
           </p:cNvPr>
@@ -7971,72 +9080,12 @@
           </a:prstGeom>
         </p:spPr>
       </p:pic>
-      <p:pic>
-        <p:nvPicPr>
-          <p:cNvPr id="2" name="Picture 1" descr="450808d6-f018-4170-8863-633347777b52.png">
-            <a:extLst>
-              <a:ext uri="{FF2B5EF4-FFF2-40B4-BE49-F238E27FC236}">
-                <a16:creationId xmlns:a16="http://schemas.microsoft.com/office/drawing/2014/main" id="{5ACEC5FF-ADF4-E630-4A6A-6B7DC2D61791}"/>
-              </a:ext>
-            </a:extLst>
-          </p:cNvPr>
-          <p:cNvPicPr>
-            <a:picLocks noChangeAspect="1"/>
-          </p:cNvPicPr>
-          <p:nvPr/>
-        </p:nvPicPr>
-        <p:blipFill>
-          <a:blip r:embed="rId2"/>
-          <a:stretch>
-            <a:fillRect/>
-          </a:stretch>
-        </p:blipFill>
-        <p:spPr>
-          <a:xfrm>
-            <a:off x="0" y="0"/>
-            <a:ext cx="9144000" cy="6858000"/>
-          </a:xfrm>
-          <a:prstGeom prst="rect">
-            <a:avLst/>
-          </a:prstGeom>
-        </p:spPr>
-      </p:pic>
-      <p:pic>
-        <p:nvPicPr>
-          <p:cNvPr id="3" name="Picture 2">
-            <a:extLst>
-              <a:ext uri="{FF2B5EF4-FFF2-40B4-BE49-F238E27FC236}">
-                <a16:creationId xmlns:a16="http://schemas.microsoft.com/office/drawing/2014/main" id="{461603B3-98C1-7195-F843-BA59F7B697F2}"/>
-              </a:ext>
-            </a:extLst>
-          </p:cNvPr>
-          <p:cNvPicPr>
-            <a:picLocks noChangeAspect="1"/>
-          </p:cNvPicPr>
-          <p:nvPr/>
-        </p:nvPicPr>
-        <p:blipFill>
-          <a:blip r:embed="rId3"/>
-          <a:stretch>
-            <a:fillRect/>
-          </a:stretch>
-        </p:blipFill>
-        <p:spPr>
-          <a:xfrm>
-            <a:off x="7315200" y="6114831"/>
-            <a:ext cx="1708662" cy="632838"/>
-          </a:xfrm>
-          <a:prstGeom prst="rect">
-            <a:avLst/>
-          </a:prstGeom>
-        </p:spPr>
-      </p:pic>
       <p:sp>
         <p:nvSpPr>
-          <p:cNvPr id="5" name="TextBox 4">
-            <a:extLst>
-              <a:ext uri="{FF2B5EF4-FFF2-40B4-BE49-F238E27FC236}">
-                <a16:creationId xmlns:a16="http://schemas.microsoft.com/office/drawing/2014/main" id="{F1FEE482-FE79-534B-85A2-2291117DC5FE}"/>
+          <p:cNvPr id="2" name="TextBox 1">
+            <a:extLst>
+              <a:ext uri="{FF2B5EF4-FFF2-40B4-BE49-F238E27FC236}">
+                <a16:creationId xmlns:a16="http://schemas.microsoft.com/office/drawing/2014/main" id="{2FC71467-F419-92F3-8937-25BEA838EF90}"/>
               </a:ext>
             </a:extLst>
           </p:cNvPr>
@@ -8045,240 +9094,8 @@
         </p:nvSpPr>
         <p:spPr>
           <a:xfrm>
-            <a:off x="1143000" y="673104"/>
-            <a:ext cx="6858000" cy="6494085"/>
-          </a:xfrm>
-          <a:prstGeom prst="rect">
-            <a:avLst/>
-          </a:prstGeom>
-          <a:noFill/>
-        </p:spPr>
-        <p:txBody>
-          <a:bodyPr wrap="square">
-            <a:spAutoFit/>
-          </a:bodyPr>
-          <a:lstStyle/>
-          <a:p>
-            <a:endParaRPr lang="en-US" sz="1600" dirty="0"/>
-          </a:p>
-          <a:p>
-            <a:pPr>
-              <a:defRPr sz="2000"/>
-            </a:pPr>
-            <a:r>
-              <a:rPr lang="en-US" sz="1600" dirty="0"/>
-              <a:t>🔹 The Decoder generates the output sentence one word at a time.</a:t>
-            </a:r>
-          </a:p>
-          <a:p>
-            <a:pPr>
-              <a:defRPr sz="2000"/>
-            </a:pPr>
-            <a:endParaRPr lang="en-US" sz="1600" dirty="0"/>
-          </a:p>
-          <a:p>
-            <a:pPr>
-              <a:defRPr sz="2000"/>
-            </a:pPr>
-            <a:r>
-              <a:rPr lang="en-US" sz="1600" dirty="0"/>
-              <a:t>👉 **Shifted Output Input**</a:t>
-            </a:r>
-          </a:p>
-          <a:p>
-            <a:pPr>
-              <a:defRPr sz="2000"/>
-            </a:pPr>
-            <a:r>
-              <a:rPr lang="en-US" sz="1600" dirty="0"/>
-              <a:t>   - During training, the decoder sees previous words</a:t>
-            </a:r>
-          </a:p>
-          <a:p>
-            <a:pPr>
-              <a:defRPr sz="2000"/>
-            </a:pPr>
-            <a:r>
-              <a:rPr lang="en-US" sz="1600" dirty="0"/>
-              <a:t>     (shifted right) to predict the next one.</a:t>
-            </a:r>
-          </a:p>
-          <a:p>
-            <a:pPr>
-              <a:defRPr sz="2000"/>
-            </a:pPr>
-            <a:endParaRPr lang="en-US" sz="1600" dirty="0"/>
-          </a:p>
-          <a:p>
-            <a:pPr>
-              <a:defRPr sz="2000"/>
-            </a:pPr>
-            <a:r>
-              <a:rPr lang="en-US" sz="1600" dirty="0"/>
-              <a:t>👉 **Masked Self-Attention**</a:t>
-            </a:r>
-          </a:p>
-          <a:p>
-            <a:pPr>
-              <a:defRPr sz="2000"/>
-            </a:pPr>
-            <a:r>
-              <a:rPr lang="en-US" sz="1600" dirty="0"/>
-              <a:t>   - Prevents the decoder from seeing future words.</a:t>
-            </a:r>
-          </a:p>
-          <a:p>
-            <a:pPr>
-              <a:defRPr sz="2000"/>
-            </a:pPr>
-            <a:r>
-              <a:rPr lang="en-US" sz="1600" dirty="0"/>
-              <a:t>   - Ensures prediction happens step-by-step.</a:t>
-            </a:r>
-          </a:p>
-          <a:p>
-            <a:pPr>
-              <a:defRPr sz="2000"/>
-            </a:pPr>
-            <a:endParaRPr lang="en-US" sz="1600" dirty="0"/>
-          </a:p>
-          <a:p>
-            <a:pPr>
-              <a:defRPr sz="2000"/>
-            </a:pPr>
-            <a:r>
-              <a:rPr lang="en-US" sz="1600" dirty="0"/>
-              <a:t>👉 **Encoder–Decoder Attention**</a:t>
-            </a:r>
-          </a:p>
-          <a:p>
-            <a:pPr>
-              <a:defRPr sz="2000"/>
-            </a:pPr>
-            <a:r>
-              <a:rPr lang="en-US" sz="1600" dirty="0"/>
-              <a:t>   - Decoder looks back at the encoder’s understanding.</a:t>
-            </a:r>
-          </a:p>
-          <a:p>
-            <a:pPr>
-              <a:defRPr sz="2000"/>
-            </a:pPr>
-            <a:r>
-              <a:rPr lang="en-US" sz="1600" dirty="0"/>
-              <a:t>   - Example: When generating a translation, it attends to relevant</a:t>
-            </a:r>
-          </a:p>
-          <a:p>
-            <a:pPr>
-              <a:defRPr sz="2000"/>
-            </a:pPr>
-            <a:r>
-              <a:rPr lang="en-US" sz="1600" dirty="0"/>
-              <a:t>     parts of the input sentence.</a:t>
-            </a:r>
-          </a:p>
-          <a:p>
-            <a:pPr>
-              <a:defRPr sz="2000"/>
-            </a:pPr>
-            <a:endParaRPr lang="en-US" sz="1600" dirty="0"/>
-          </a:p>
-          <a:p>
-            <a:pPr>
-              <a:defRPr sz="2000"/>
-            </a:pPr>
-            <a:r>
-              <a:rPr lang="en-US" sz="1600" dirty="0"/>
-              <a:t>👉 **Feed Forward Network**</a:t>
-            </a:r>
-          </a:p>
-          <a:p>
-            <a:pPr>
-              <a:defRPr sz="2000"/>
-            </a:pPr>
-            <a:r>
-              <a:rPr lang="en-US" sz="1600" dirty="0"/>
-              <a:t>   - Adds more processing before final prediction.</a:t>
-            </a:r>
-          </a:p>
-          <a:p>
-            <a:pPr>
-              <a:defRPr sz="2000"/>
-            </a:pPr>
-            <a:endParaRPr lang="en-US" sz="1600" dirty="0"/>
-          </a:p>
-          <a:p>
-            <a:pPr>
-              <a:defRPr sz="2000"/>
-            </a:pPr>
-            <a:r>
-              <a:rPr lang="en-US" sz="1600" dirty="0"/>
-              <a:t>👉 **Linear + </a:t>
-            </a:r>
-            <a:r>
-              <a:rPr lang="en-US" sz="1600" dirty="0" err="1"/>
-              <a:t>Softmax</a:t>
-            </a:r>
-            <a:r>
-              <a:rPr lang="en-US" sz="1600" dirty="0"/>
-              <a:t>**</a:t>
-            </a:r>
-          </a:p>
-          <a:p>
-            <a:pPr>
-              <a:defRPr sz="2000"/>
-            </a:pPr>
-            <a:r>
-              <a:rPr lang="en-US" sz="1600" dirty="0"/>
-              <a:t>   - Converts the decoder output into word probabilities.</a:t>
-            </a:r>
-          </a:p>
-          <a:p>
-            <a:pPr>
-              <a:defRPr sz="2000"/>
-            </a:pPr>
-            <a:r>
-              <a:rPr lang="en-US" sz="1600" dirty="0"/>
-              <a:t>   - Highest probability word becomes the model’s next output.</a:t>
-            </a:r>
-          </a:p>
-          <a:p>
-            <a:pPr>
-              <a:defRPr sz="2000"/>
-            </a:pPr>
-            <a:endParaRPr lang="en-US" sz="1600" dirty="0"/>
-          </a:p>
-          <a:p>
-            <a:pPr>
-              <a:defRPr sz="2000"/>
-            </a:pPr>
-            <a:r>
-              <a:rPr lang="en-US" sz="1600" dirty="0"/>
-              <a:t>⭐ Summary: Decoder = step-by-step generation based on context + encoder info.</a:t>
-            </a:r>
-          </a:p>
-          <a:p>
-            <a:endParaRPr lang="en-US" sz="1600" dirty="0"/>
-          </a:p>
-        </p:txBody>
-      </p:sp>
-      <p:sp>
-        <p:nvSpPr>
-          <p:cNvPr id="6" name="TextBox 5">
-            <a:extLst>
-              <a:ext uri="{FF2B5EF4-FFF2-40B4-BE49-F238E27FC236}">
-                <a16:creationId xmlns:a16="http://schemas.microsoft.com/office/drawing/2014/main" id="{7B4696ED-5969-029A-C1E7-F54D9E99BA70}"/>
-              </a:ext>
-            </a:extLst>
-          </p:cNvPr>
-          <p:cNvSpPr txBox="1"/>
-          <p:nvPr/>
-        </p:nvSpPr>
-        <p:spPr>
-          <a:xfrm>
-            <a:off x="2178462" y="137652"/>
-            <a:ext cx="4432625" cy="584775"/>
+            <a:off x="1745013" y="274339"/>
+            <a:ext cx="5798382" cy="584775"/>
           </a:xfrm>
           <a:prstGeom prst="rect">
             <a:avLst/>
@@ -8294,15 +9111,212 @@
             <a:pPr algn="ctr"/>
             <a:r>
               <a:rPr lang="en-US" sz="3200" dirty="0"/>
-              <a:t>Transformer Architecture</a:t>
-            </a:r>
+              <a:t>RAG Pipeline Indexing &amp; Retrieval</a:t>
+            </a:r>
+          </a:p>
+        </p:txBody>
+      </p:sp>
+      <p:sp>
+        <p:nvSpPr>
+          <p:cNvPr id="3" name="TextBox 2">
+            <a:extLst>
+              <a:ext uri="{FF2B5EF4-FFF2-40B4-BE49-F238E27FC236}">
+                <a16:creationId xmlns:a16="http://schemas.microsoft.com/office/drawing/2014/main" id="{5272DC7E-6DB0-8F06-CCC8-EAE2CEC54021}"/>
+              </a:ext>
+            </a:extLst>
+          </p:cNvPr>
+          <p:cNvSpPr txBox="1"/>
+          <p:nvPr/>
+        </p:nvSpPr>
+        <p:spPr>
+          <a:xfrm>
+            <a:off x="602804" y="1071715"/>
+            <a:ext cx="7938392" cy="5355312"/>
+          </a:xfrm>
+          <a:prstGeom prst="rect">
+            <a:avLst/>
+          </a:prstGeom>
+          <a:noFill/>
+        </p:spPr>
+        <p:txBody>
+          <a:bodyPr wrap="none" rtlCol="0">
+            <a:spAutoFit/>
+          </a:bodyPr>
+          <a:lstStyle/>
+          <a:p>
+            <a:r>
+              <a:rPr lang="en-US" b="1" dirty="0"/>
+              <a:t>🔵 1. Indexing (Preparing your documents)</a:t>
+            </a:r>
+          </a:p>
+          <a:p>
+            <a:r>
+              <a:rPr lang="en-US" dirty="0"/>
+              <a:t>This is where you turn raw documents into something the AI can search.</a:t>
+            </a:r>
+          </a:p>
+          <a:p>
+            <a:r>
+              <a:rPr lang="en-US" dirty="0"/>
+              <a:t>Steps:</a:t>
+            </a:r>
+          </a:p>
+          <a:p>
+            <a:r>
+              <a:rPr lang="en-US" b="1" dirty="0"/>
+              <a:t>Load docs</a:t>
+            </a:r>
+            <a:r>
+              <a:rPr lang="en-US" dirty="0"/>
+              <a:t> (PDFs, text, emails, website pages, etc.)</a:t>
+            </a:r>
+          </a:p>
+          <a:p>
+            <a:r>
+              <a:rPr lang="en-US" b="1" dirty="0"/>
+              <a:t>Chunk them</a:t>
+            </a:r>
+            <a:r>
+              <a:rPr lang="en-US" dirty="0"/>
+              <a:t> into small pieces</a:t>
+            </a:r>
+          </a:p>
+          <a:p>
+            <a:r>
+              <a:rPr lang="en-US" b="1" dirty="0"/>
+              <a:t>Embed each chunk</a:t>
+            </a:r>
+            <a:r>
+              <a:rPr lang="en-US" dirty="0"/>
+              <a:t> using an embedding model (convert text → vectors)</a:t>
+            </a:r>
+          </a:p>
+          <a:p>
+            <a:r>
+              <a:rPr lang="en-US" b="1" dirty="0"/>
+              <a:t>Store the vectors</a:t>
+            </a:r>
+            <a:r>
+              <a:rPr lang="en-US" dirty="0"/>
+              <a:t> in a </a:t>
+            </a:r>
+            <a:r>
+              <a:rPr lang="en-US" b="1" dirty="0"/>
+              <a:t>vector database</a:t>
+            </a:r>
+            <a:r>
+              <a:rPr lang="en-US" dirty="0"/>
+              <a:t> (like FAISS, Pinecone, Chroma)</a:t>
+            </a:r>
+          </a:p>
+          <a:p>
+            <a:r>
+              <a:rPr lang="en-US" dirty="0"/>
+              <a:t>👉 </a:t>
+            </a:r>
+            <a:r>
+              <a:rPr lang="en-US" b="1" dirty="0"/>
+              <a:t>Goal of indexing:</a:t>
+            </a:r>
+            <a:br>
+              <a:rPr lang="en-US" dirty="0"/>
+            </a:br>
+            <a:r>
+              <a:rPr lang="en-US" dirty="0"/>
+              <a:t>Make your data </a:t>
+            </a:r>
+            <a:r>
+              <a:rPr lang="en-US" i="1" dirty="0"/>
+              <a:t>searchable</a:t>
+            </a:r>
+            <a:r>
+              <a:rPr lang="en-US" dirty="0"/>
+              <a:t> using semantic meaning, not exact keywords.</a:t>
+            </a:r>
+          </a:p>
+          <a:p>
+            <a:endParaRPr lang="en-US" dirty="0"/>
+          </a:p>
+          <a:p>
+            <a:r>
+              <a:rPr lang="en-US" b="1" dirty="0"/>
+              <a:t>🟣 2. Retrieval (Finding the right info)</a:t>
+            </a:r>
+          </a:p>
+          <a:p>
+            <a:r>
+              <a:rPr lang="en-US" dirty="0"/>
+              <a:t>When a user asks a question:</a:t>
+            </a:r>
+          </a:p>
+          <a:p>
+            <a:r>
+              <a:rPr lang="en-US" dirty="0"/>
+              <a:t>Convert the question into an </a:t>
+            </a:r>
+            <a:r>
+              <a:rPr lang="en-US" b="1" dirty="0"/>
+              <a:t>embedding</a:t>
+            </a:r>
+            <a:endParaRPr lang="en-US" dirty="0"/>
+          </a:p>
+          <a:p>
+            <a:r>
+              <a:rPr lang="en-US" dirty="0"/>
+              <a:t>Search the vector DB for the </a:t>
+            </a:r>
+            <a:r>
+              <a:rPr lang="en-US" b="1" dirty="0"/>
+              <a:t>closest matching chunks</a:t>
+            </a:r>
+            <a:endParaRPr lang="en-US" dirty="0"/>
+          </a:p>
+          <a:p>
+            <a:r>
+              <a:rPr lang="en-US" dirty="0"/>
+              <a:t>Retrieve top results (e.g., top 3–5 chunks)</a:t>
+            </a:r>
+          </a:p>
+          <a:p>
+            <a:r>
+              <a:rPr lang="en-US" dirty="0"/>
+              <a:t>Send these chunks to the LLM as context</a:t>
+            </a:r>
+          </a:p>
+          <a:p>
+            <a:r>
+              <a:rPr lang="en-US" dirty="0"/>
+              <a:t>👉 </a:t>
+            </a:r>
+            <a:r>
+              <a:rPr lang="en-US" b="1" dirty="0"/>
+              <a:t>Goal of retrieval:</a:t>
+            </a:r>
+            <a:br>
+              <a:rPr lang="en-US" dirty="0"/>
+            </a:br>
+            <a:r>
+              <a:rPr lang="en-US" dirty="0"/>
+              <a:t>Give the AI only the </a:t>
+            </a:r>
+            <a:r>
+              <a:rPr lang="en-US" b="1" dirty="0"/>
+              <a:t>most relevant pieces of your data</a:t>
+            </a:r>
+            <a:r>
+              <a:rPr lang="en-US" dirty="0"/>
+              <a:t> so it can answer accurately.</a:t>
+            </a:r>
+          </a:p>
+          <a:p>
+            <a:endParaRPr lang="en-US" dirty="0"/>
           </a:p>
         </p:txBody>
       </p:sp>
     </p:spTree>
     <p:extLst>
       <p:ext uri="{BB962C8B-B14F-4D97-AF65-F5344CB8AC3E}">
-        <p14:creationId xmlns:p14="http://schemas.microsoft.com/office/powerpoint/2010/main" val="3758762786"/>
+        <p14:creationId xmlns:p14="http://schemas.microsoft.com/office/powerpoint/2010/main" val="3745000820"/>
       </p:ext>
     </p:extLst>
   </p:cSld>
@@ -8320,7 +9334,7 @@
         <p:cNvPr id="1" name="">
           <a:extLst>
             <a:ext uri="{FF2B5EF4-FFF2-40B4-BE49-F238E27FC236}">
-              <a16:creationId xmlns:a16="http://schemas.microsoft.com/office/drawing/2014/main" id="{EA885016-6409-6E13-EECB-523A030EAA15}"/>
+              <a16:creationId xmlns:a16="http://schemas.microsoft.com/office/drawing/2014/main" id="{B18319CA-DEC8-337B-A8E0-F2385C9659DE}"/>
             </a:ext>
           </a:extLst>
         </p:cNvPr>
@@ -8340,7 +9354,7 @@
           <p:cNvPr id="4" name="Picture 3" descr="450808d6-f018-4170-8863-633347777b52.png">
             <a:extLst>
               <a:ext uri="{FF2B5EF4-FFF2-40B4-BE49-F238E27FC236}">
-                <a16:creationId xmlns:a16="http://schemas.microsoft.com/office/drawing/2014/main" id="{09930E3B-ED7D-BEE7-DF64-ADB2C58C647C}"/>
+                <a16:creationId xmlns:a16="http://schemas.microsoft.com/office/drawing/2014/main" id="{786235D1-24BA-30E8-A1E9-34D1D9FE3DD3}"/>
               </a:ext>
             </a:extLst>
           </p:cNvPr>
@@ -8370,7 +9384,7 @@
           <p:cNvPr id="8" name="Picture 7">
             <a:extLst>
               <a:ext uri="{FF2B5EF4-FFF2-40B4-BE49-F238E27FC236}">
-                <a16:creationId xmlns:a16="http://schemas.microsoft.com/office/drawing/2014/main" id="{63B6DEDB-3FA0-DF6E-F29F-03B189BD8590}"/>
+                <a16:creationId xmlns:a16="http://schemas.microsoft.com/office/drawing/2014/main" id="{F13231F5-9BA0-2786-5020-DDAC236CAA01}"/>
               </a:ext>
             </a:extLst>
           </p:cNvPr>
@@ -8395,42 +9409,12 @@
           </a:prstGeom>
         </p:spPr>
       </p:pic>
-      <p:pic>
-        <p:nvPicPr>
-          <p:cNvPr id="3" name="Picture 2">
-            <a:extLst>
-              <a:ext uri="{FF2B5EF4-FFF2-40B4-BE49-F238E27FC236}">
-                <a16:creationId xmlns:a16="http://schemas.microsoft.com/office/drawing/2014/main" id="{20103F2E-800E-4964-29D5-F2ECC1036289}"/>
-              </a:ext>
-            </a:extLst>
-          </p:cNvPr>
-          <p:cNvPicPr>
-            <a:picLocks noChangeAspect="1"/>
-          </p:cNvPicPr>
-          <p:nvPr/>
-        </p:nvPicPr>
-        <p:blipFill>
-          <a:blip r:embed="rId3"/>
-          <a:stretch>
-            <a:fillRect/>
-          </a:stretch>
-        </p:blipFill>
-        <p:spPr>
-          <a:xfrm>
-            <a:off x="7315200" y="6114831"/>
-            <a:ext cx="1708662" cy="632838"/>
-          </a:xfrm>
-          <a:prstGeom prst="rect">
-            <a:avLst/>
-          </a:prstGeom>
-        </p:spPr>
-      </p:pic>
       <p:sp>
         <p:nvSpPr>
-          <p:cNvPr id="14" name="TextBox 13">
-            <a:extLst>
-              <a:ext uri="{FF2B5EF4-FFF2-40B4-BE49-F238E27FC236}">
-                <a16:creationId xmlns:a16="http://schemas.microsoft.com/office/drawing/2014/main" id="{06D3906A-CE00-000A-FFE1-C22DC4DF3428}"/>
+          <p:cNvPr id="7" name="TextBox 6">
+            <a:extLst>
+              <a:ext uri="{FF2B5EF4-FFF2-40B4-BE49-F238E27FC236}">
+                <a16:creationId xmlns:a16="http://schemas.microsoft.com/office/drawing/2014/main" id="{426AD473-31BB-0EAD-8BCC-C7B51D2206A1}"/>
               </a:ext>
             </a:extLst>
           </p:cNvPr>
@@ -8439,240 +9423,8 @@
         </p:nvSpPr>
         <p:spPr>
           <a:xfrm>
-            <a:off x="1295400" y="675029"/>
-            <a:ext cx="6858000" cy="6494085"/>
-          </a:xfrm>
-          <a:prstGeom prst="rect">
-            <a:avLst/>
-          </a:prstGeom>
-          <a:noFill/>
-        </p:spPr>
-        <p:txBody>
-          <a:bodyPr wrap="square">
-            <a:spAutoFit/>
-          </a:bodyPr>
-          <a:lstStyle/>
-          <a:p>
-            <a:endParaRPr lang="en-US" sz="1600" dirty="0"/>
-          </a:p>
-          <a:p>
-            <a:pPr>
-              <a:defRPr sz="2000"/>
-            </a:pPr>
-            <a:r>
-              <a:rPr lang="en-US" sz="1600" dirty="0"/>
-              <a:t>🔹 The Decoder generates the output sentence one word at a time.</a:t>
-            </a:r>
-          </a:p>
-          <a:p>
-            <a:pPr>
-              <a:defRPr sz="2000"/>
-            </a:pPr>
-            <a:endParaRPr lang="en-US" sz="1600" dirty="0"/>
-          </a:p>
-          <a:p>
-            <a:pPr>
-              <a:defRPr sz="2000"/>
-            </a:pPr>
-            <a:r>
-              <a:rPr lang="en-US" sz="1600" dirty="0"/>
-              <a:t>👉 **Shifted Output Input**</a:t>
-            </a:r>
-          </a:p>
-          <a:p>
-            <a:pPr>
-              <a:defRPr sz="2000"/>
-            </a:pPr>
-            <a:r>
-              <a:rPr lang="en-US" sz="1600" dirty="0"/>
-              <a:t>   - During training, the decoder sees previous words</a:t>
-            </a:r>
-          </a:p>
-          <a:p>
-            <a:pPr>
-              <a:defRPr sz="2000"/>
-            </a:pPr>
-            <a:r>
-              <a:rPr lang="en-US" sz="1600" dirty="0"/>
-              <a:t>     (shifted right) to predict the next one.</a:t>
-            </a:r>
-          </a:p>
-          <a:p>
-            <a:pPr>
-              <a:defRPr sz="2000"/>
-            </a:pPr>
-            <a:endParaRPr lang="en-US" sz="1600" dirty="0"/>
-          </a:p>
-          <a:p>
-            <a:pPr>
-              <a:defRPr sz="2000"/>
-            </a:pPr>
-            <a:r>
-              <a:rPr lang="en-US" sz="1600" dirty="0"/>
-              <a:t>👉 **Masked Self-Attention**</a:t>
-            </a:r>
-          </a:p>
-          <a:p>
-            <a:pPr>
-              <a:defRPr sz="2000"/>
-            </a:pPr>
-            <a:r>
-              <a:rPr lang="en-US" sz="1600" dirty="0"/>
-              <a:t>   - Prevents the decoder from seeing future words.</a:t>
-            </a:r>
-          </a:p>
-          <a:p>
-            <a:pPr>
-              <a:defRPr sz="2000"/>
-            </a:pPr>
-            <a:r>
-              <a:rPr lang="en-US" sz="1600" dirty="0"/>
-              <a:t>   - Ensures prediction happens step-by-step.</a:t>
-            </a:r>
-          </a:p>
-          <a:p>
-            <a:pPr>
-              <a:defRPr sz="2000"/>
-            </a:pPr>
-            <a:endParaRPr lang="en-US" sz="1600" dirty="0"/>
-          </a:p>
-          <a:p>
-            <a:pPr>
-              <a:defRPr sz="2000"/>
-            </a:pPr>
-            <a:r>
-              <a:rPr lang="en-US" sz="1600" dirty="0"/>
-              <a:t>👉 **Encoder–Decoder Attention**</a:t>
-            </a:r>
-          </a:p>
-          <a:p>
-            <a:pPr>
-              <a:defRPr sz="2000"/>
-            </a:pPr>
-            <a:r>
-              <a:rPr lang="en-US" sz="1600" dirty="0"/>
-              <a:t>   - Decoder looks back at the encoder’s understanding.</a:t>
-            </a:r>
-          </a:p>
-          <a:p>
-            <a:pPr>
-              <a:defRPr sz="2000"/>
-            </a:pPr>
-            <a:r>
-              <a:rPr lang="en-US" sz="1600" dirty="0"/>
-              <a:t>   - Example: When generating a translation, it attends to relevant</a:t>
-            </a:r>
-          </a:p>
-          <a:p>
-            <a:pPr>
-              <a:defRPr sz="2000"/>
-            </a:pPr>
-            <a:r>
-              <a:rPr lang="en-US" sz="1600" dirty="0"/>
-              <a:t>     parts of the input sentence.</a:t>
-            </a:r>
-          </a:p>
-          <a:p>
-            <a:pPr>
-              <a:defRPr sz="2000"/>
-            </a:pPr>
-            <a:endParaRPr lang="en-US" sz="1600" dirty="0"/>
-          </a:p>
-          <a:p>
-            <a:pPr>
-              <a:defRPr sz="2000"/>
-            </a:pPr>
-            <a:r>
-              <a:rPr lang="en-US" sz="1600" dirty="0"/>
-              <a:t>👉 **Feed Forward Network**</a:t>
-            </a:r>
-          </a:p>
-          <a:p>
-            <a:pPr>
-              <a:defRPr sz="2000"/>
-            </a:pPr>
-            <a:r>
-              <a:rPr lang="en-US" sz="1600" dirty="0"/>
-              <a:t>   - Adds more processing before final prediction.</a:t>
-            </a:r>
-          </a:p>
-          <a:p>
-            <a:pPr>
-              <a:defRPr sz="2000"/>
-            </a:pPr>
-            <a:endParaRPr lang="en-US" sz="1600" dirty="0"/>
-          </a:p>
-          <a:p>
-            <a:pPr>
-              <a:defRPr sz="2000"/>
-            </a:pPr>
-            <a:r>
-              <a:rPr lang="en-US" sz="1600" dirty="0"/>
-              <a:t>👉 **Linear + </a:t>
-            </a:r>
-            <a:r>
-              <a:rPr lang="en-US" sz="1600" dirty="0" err="1"/>
-              <a:t>Softmax</a:t>
-            </a:r>
-            <a:r>
-              <a:rPr lang="en-US" sz="1600" dirty="0"/>
-              <a:t>**</a:t>
-            </a:r>
-          </a:p>
-          <a:p>
-            <a:pPr>
-              <a:defRPr sz="2000"/>
-            </a:pPr>
-            <a:r>
-              <a:rPr lang="en-US" sz="1600" dirty="0"/>
-              <a:t>   - Converts the decoder output into word probabilities.</a:t>
-            </a:r>
-          </a:p>
-          <a:p>
-            <a:pPr>
-              <a:defRPr sz="2000"/>
-            </a:pPr>
-            <a:r>
-              <a:rPr lang="en-US" sz="1600" dirty="0"/>
-              <a:t>   - Highest probability word becomes the model’s next output.</a:t>
-            </a:r>
-          </a:p>
-          <a:p>
-            <a:pPr>
-              <a:defRPr sz="2000"/>
-            </a:pPr>
-            <a:endParaRPr lang="en-US" sz="1600" dirty="0"/>
-          </a:p>
-          <a:p>
-            <a:pPr>
-              <a:defRPr sz="2000"/>
-            </a:pPr>
-            <a:r>
-              <a:rPr lang="en-US" sz="1600" dirty="0"/>
-              <a:t>⭐ Summary: Decoder = step-by-step generation based on context + encoder info.</a:t>
-            </a:r>
-          </a:p>
-          <a:p>
-            <a:endParaRPr lang="en-US" sz="1600" dirty="0"/>
-          </a:p>
-        </p:txBody>
-      </p:sp>
-      <p:sp>
-        <p:nvSpPr>
-          <p:cNvPr id="15" name="TextBox 14">
-            <a:extLst>
-              <a:ext uri="{FF2B5EF4-FFF2-40B4-BE49-F238E27FC236}">
-                <a16:creationId xmlns:a16="http://schemas.microsoft.com/office/drawing/2014/main" id="{17B4C7AB-C5A4-8DDE-5A00-E86A8F1D29D3}"/>
-              </a:ext>
-            </a:extLst>
-          </p:cNvPr>
-          <p:cNvSpPr txBox="1"/>
-          <p:nvPr/>
-        </p:nvSpPr>
-        <p:spPr>
-          <a:xfrm>
-            <a:off x="2330862" y="290052"/>
-            <a:ext cx="4432625" cy="584775"/>
+            <a:off x="1745013" y="284171"/>
+            <a:ext cx="5798382" cy="584775"/>
           </a:xfrm>
           <a:prstGeom prst="rect">
             <a:avLst/>
@@ -8688,15 +9440,155 @@
             <a:pPr algn="ctr"/>
             <a:r>
               <a:rPr lang="en-US" sz="3200" dirty="0"/>
-              <a:t>Transformer Architecture</a:t>
+              <a:t>RAG Pipeline Indexing &amp; Retrieval</a:t>
             </a:r>
           </a:p>
         </p:txBody>
       </p:sp>
+      <p:sp>
+        <p:nvSpPr>
+          <p:cNvPr id="9" name="TextBox 8">
+            <a:extLst>
+              <a:ext uri="{FF2B5EF4-FFF2-40B4-BE49-F238E27FC236}">
+                <a16:creationId xmlns:a16="http://schemas.microsoft.com/office/drawing/2014/main" id="{95623D72-467A-0389-DE93-56174BCC0181}"/>
+              </a:ext>
+            </a:extLst>
+          </p:cNvPr>
+          <p:cNvSpPr txBox="1"/>
+          <p:nvPr/>
+        </p:nvSpPr>
+        <p:spPr>
+          <a:xfrm>
+            <a:off x="5161936" y="4465992"/>
+            <a:ext cx="913070" cy="369332"/>
+          </a:xfrm>
+          <a:prstGeom prst="rect">
+            <a:avLst/>
+          </a:prstGeom>
+          <a:noFill/>
+        </p:spPr>
+        <p:txBody>
+          <a:bodyPr wrap="none" rtlCol="0">
+            <a:spAutoFit/>
+          </a:bodyPr>
+          <a:lstStyle/>
+          <a:p>
+            <a:r>
+              <a:rPr lang="en-US" dirty="0"/>
+              <a:t>Context</a:t>
+            </a:r>
+          </a:p>
+        </p:txBody>
+      </p:sp>
+      <p:sp>
+        <p:nvSpPr>
+          <p:cNvPr id="10" name="TextBox 9">
+            <a:extLst>
+              <a:ext uri="{FF2B5EF4-FFF2-40B4-BE49-F238E27FC236}">
+                <a16:creationId xmlns:a16="http://schemas.microsoft.com/office/drawing/2014/main" id="{F42AEABA-C7C3-52D1-B574-E8541DCB3DCB}"/>
+              </a:ext>
+            </a:extLst>
+          </p:cNvPr>
+          <p:cNvSpPr txBox="1"/>
+          <p:nvPr/>
+        </p:nvSpPr>
+        <p:spPr>
+          <a:xfrm>
+            <a:off x="5211096" y="5198495"/>
+            <a:ext cx="761747" cy="369332"/>
+          </a:xfrm>
+          <a:prstGeom prst="rect">
+            <a:avLst/>
+          </a:prstGeom>
+          <a:noFill/>
+        </p:spPr>
+        <p:txBody>
+          <a:bodyPr wrap="none" rtlCol="0">
+            <a:spAutoFit/>
+          </a:bodyPr>
+          <a:lstStyle/>
+          <a:p>
+            <a:r>
+              <a:rPr lang="en-US" dirty="0"/>
+              <a:t>Query</a:t>
+            </a:r>
+          </a:p>
+        </p:txBody>
+      </p:sp>
+      <p:pic>
+        <p:nvPicPr>
+          <p:cNvPr id="12" name="Picture 11" descr="A diagram of a data flow">
+            <a:extLst>
+              <a:ext uri="{FF2B5EF4-FFF2-40B4-BE49-F238E27FC236}">
+                <a16:creationId xmlns:a16="http://schemas.microsoft.com/office/drawing/2014/main" id="{B359B617-0450-8A03-1F70-1E831F40EB6E}"/>
+              </a:ext>
+            </a:extLst>
+          </p:cNvPr>
+          <p:cNvPicPr>
+            <a:picLocks noChangeAspect="1"/>
+          </p:cNvPicPr>
+          <p:nvPr/>
+        </p:nvPicPr>
+        <p:blipFill>
+          <a:blip r:embed="rId4"/>
+          <a:stretch>
+            <a:fillRect/>
+          </a:stretch>
+        </p:blipFill>
+        <p:spPr>
+          <a:xfrm>
+            <a:off x="220769" y="903290"/>
+            <a:ext cx="8702462" cy="5101210"/>
+          </a:xfrm>
+          <a:prstGeom prst="rect">
+            <a:avLst/>
+          </a:prstGeom>
+        </p:spPr>
+      </p:pic>
+      <p:cxnSp>
+        <p:nvCxnSpPr>
+          <p:cNvPr id="14" name="Straight Arrow Connector 13">
+            <a:extLst>
+              <a:ext uri="{FF2B5EF4-FFF2-40B4-BE49-F238E27FC236}">
+                <a16:creationId xmlns:a16="http://schemas.microsoft.com/office/drawing/2014/main" id="{FCCD1B63-4817-17AA-3EC3-8EDCE8C1C579}"/>
+              </a:ext>
+            </a:extLst>
+          </p:cNvPr>
+          <p:cNvCxnSpPr/>
+          <p:nvPr/>
+        </p:nvCxnSpPr>
+        <p:spPr>
+          <a:xfrm>
+            <a:off x="8110539" y="1887794"/>
+            <a:ext cx="0" cy="1258529"/>
+          </a:xfrm>
+          <a:prstGeom prst="straightConnector1">
+            <a:avLst/>
+          </a:prstGeom>
+          <a:ln>
+            <a:prstDash val="dash"/>
+            <a:tailEnd type="triangle"/>
+          </a:ln>
+        </p:spPr>
+        <p:style>
+          <a:lnRef idx="2">
+            <a:schemeClr val="accent1"/>
+          </a:lnRef>
+          <a:fillRef idx="0">
+            <a:schemeClr val="accent1"/>
+          </a:fillRef>
+          <a:effectRef idx="1">
+            <a:schemeClr val="accent1"/>
+          </a:effectRef>
+          <a:fontRef idx="minor">
+            <a:schemeClr val="tx1"/>
+          </a:fontRef>
+        </p:style>
+      </p:cxnSp>
     </p:spTree>
     <p:extLst>
       <p:ext uri="{BB962C8B-B14F-4D97-AF65-F5344CB8AC3E}">
-        <p14:creationId xmlns:p14="http://schemas.microsoft.com/office/powerpoint/2010/main" val="3495389773"/>
+        <p14:creationId xmlns:p14="http://schemas.microsoft.com/office/powerpoint/2010/main" val="3874222550"/>
       </p:ext>
     </p:extLst>
   </p:cSld>
@@ -8714,7 +9606,7 @@
         <p:cNvPr id="1" name="">
           <a:extLst>
             <a:ext uri="{FF2B5EF4-FFF2-40B4-BE49-F238E27FC236}">
-              <a16:creationId xmlns:a16="http://schemas.microsoft.com/office/drawing/2014/main" id="{AFCA15F1-D29E-941C-B56D-FC3E5217A939}"/>
+              <a16:creationId xmlns:a16="http://schemas.microsoft.com/office/drawing/2014/main" id="{AF7DE54F-EF70-AC91-C71C-B344BE728BC7}"/>
             </a:ext>
           </a:extLst>
         </p:cNvPr>
@@ -8734,7 +9626,7 @@
           <p:cNvPr id="4" name="Picture 3" descr="450808d6-f018-4170-8863-633347777b52.png">
             <a:extLst>
               <a:ext uri="{FF2B5EF4-FFF2-40B4-BE49-F238E27FC236}">
-                <a16:creationId xmlns:a16="http://schemas.microsoft.com/office/drawing/2014/main" id="{58EE5AB5-ABDB-5D30-65FA-3014375CF0BA}"/>
+                <a16:creationId xmlns:a16="http://schemas.microsoft.com/office/drawing/2014/main" id="{192F1998-EEE5-3D75-BA7C-97371862FC5F}"/>
               </a:ext>
             </a:extLst>
           </p:cNvPr>
@@ -8764,7 +9656,7 @@
           <p:cNvPr id="8" name="Picture 7">
             <a:extLst>
               <a:ext uri="{FF2B5EF4-FFF2-40B4-BE49-F238E27FC236}">
-                <a16:creationId xmlns:a16="http://schemas.microsoft.com/office/drawing/2014/main" id="{177639E6-4088-00E4-87A3-19259A3E7160}"/>
+                <a16:creationId xmlns:a16="http://schemas.microsoft.com/office/drawing/2014/main" id="{7A96F550-8BAA-7B11-D22E-27DBF71BE55A}"/>
               </a:ext>
             </a:extLst>
           </p:cNvPr>
@@ -8789,10 +9681,219 @@
           </a:prstGeom>
         </p:spPr>
       </p:pic>
+      <p:sp>
+        <p:nvSpPr>
+          <p:cNvPr id="2" name="TextBox 1">
+            <a:extLst>
+              <a:ext uri="{FF2B5EF4-FFF2-40B4-BE49-F238E27FC236}">
+                <a16:creationId xmlns:a16="http://schemas.microsoft.com/office/drawing/2014/main" id="{644E0865-929C-A6B8-C947-CB0B7A596B1F}"/>
+              </a:ext>
+            </a:extLst>
+          </p:cNvPr>
+          <p:cNvSpPr txBox="1"/>
+          <p:nvPr/>
+        </p:nvSpPr>
+        <p:spPr>
+          <a:xfrm>
+            <a:off x="1616775" y="274339"/>
+            <a:ext cx="6054864" cy="584775"/>
+          </a:xfrm>
+          <a:prstGeom prst="rect">
+            <a:avLst/>
+          </a:prstGeom>
+          <a:noFill/>
+        </p:spPr>
+        <p:txBody>
+          <a:bodyPr wrap="none" rtlCol="0">
+            <a:spAutoFit/>
+          </a:bodyPr>
+          <a:lstStyle/>
+          <a:p>
+            <a:pPr algn="ctr"/>
+            <a:r>
+              <a:rPr lang="en-US" sz="3200" dirty="0"/>
+              <a:t>Local Vector DB &amp; </a:t>
+            </a:r>
+            <a:r>
+              <a:rPr lang="en-US" sz="3200" dirty="0" err="1"/>
+              <a:t>LangChain</a:t>
+            </a:r>
+            <a:r>
+              <a:rPr lang="en-US" sz="3200" dirty="0"/>
+              <a:t> Setup</a:t>
+            </a:r>
+          </a:p>
+        </p:txBody>
+      </p:sp>
+      <p:sp>
+        <p:nvSpPr>
+          <p:cNvPr id="3" name="TextBox 2">
+            <a:extLst>
+              <a:ext uri="{FF2B5EF4-FFF2-40B4-BE49-F238E27FC236}">
+                <a16:creationId xmlns:a16="http://schemas.microsoft.com/office/drawing/2014/main" id="{A584A2D5-2748-92E7-A6DF-0BE5BD36F0FC}"/>
+              </a:ext>
+            </a:extLst>
+          </p:cNvPr>
+          <p:cNvSpPr txBox="1"/>
+          <p:nvPr/>
+        </p:nvSpPr>
+        <p:spPr>
+          <a:xfrm>
+            <a:off x="993058" y="1366684"/>
+            <a:ext cx="4156715" cy="3139321"/>
+          </a:xfrm>
+          <a:prstGeom prst="rect">
+            <a:avLst/>
+          </a:prstGeom>
+          <a:noFill/>
+        </p:spPr>
+        <p:txBody>
+          <a:bodyPr wrap="none" rtlCol="0">
+            <a:spAutoFit/>
+          </a:bodyPr>
+          <a:lstStyle/>
+          <a:p>
+            <a:r>
+              <a:rPr lang="en-US" b="1" dirty="0" err="1"/>
+              <a:t>Qdrant</a:t>
+            </a:r>
+            <a:r>
+              <a:rPr lang="en-US" b="1" dirty="0"/>
+              <a:t> DB setup with Docker:</a:t>
+            </a:r>
+          </a:p>
+          <a:p>
+            <a:r>
+              <a:rPr lang="en-US" dirty="0"/>
+              <a:t>docker compose up -d</a:t>
+            </a:r>
+          </a:p>
+          <a:p>
+            <a:endParaRPr lang="en-US" dirty="0"/>
+          </a:p>
+          <a:p>
+            <a:r>
+              <a:rPr lang="en-US" b="1" dirty="0"/>
+              <a:t>Indexing with </a:t>
+            </a:r>
+            <a:r>
+              <a:rPr lang="en-US" b="1" dirty="0" err="1"/>
+              <a:t>LangChain</a:t>
+            </a:r>
+            <a:r>
+              <a:rPr lang="en-US" b="1" dirty="0"/>
+              <a:t> Doc Loaders:</a:t>
+            </a:r>
+          </a:p>
+          <a:p>
+            <a:r>
+              <a:rPr lang="en-US" dirty="0"/>
+              <a:t>pip install -</a:t>
+            </a:r>
+            <a:r>
+              <a:rPr lang="en-US" dirty="0" err="1"/>
+              <a:t>qU</a:t>
+            </a:r>
+            <a:r>
+              <a:rPr lang="en-US" dirty="0"/>
+              <a:t> </a:t>
+            </a:r>
+            <a:r>
+              <a:rPr lang="en-US" dirty="0" err="1"/>
+              <a:t>langchain</a:t>
+            </a:r>
+            <a:r>
+              <a:rPr lang="en-US" dirty="0"/>
+              <a:t>-community </a:t>
+            </a:r>
+            <a:r>
+              <a:rPr lang="en-US" dirty="0" err="1"/>
+              <a:t>pypdf</a:t>
+            </a:r>
+            <a:endParaRPr lang="en-US" dirty="0"/>
+          </a:p>
+          <a:p>
+            <a:r>
+              <a:rPr lang="en-US" dirty="0"/>
+              <a:t>pip install -U </a:t>
+            </a:r>
+            <a:r>
+              <a:rPr lang="en-US" dirty="0" err="1"/>
+              <a:t>langchain</a:t>
+            </a:r>
+            <a:r>
+              <a:rPr lang="en-US" dirty="0"/>
+              <a:t>-text-splitters</a:t>
+            </a:r>
+          </a:p>
+          <a:p>
+            <a:r>
+              <a:rPr lang="en-US" dirty="0"/>
+              <a:t>pip install -</a:t>
+            </a:r>
+            <a:r>
+              <a:rPr lang="en-US" dirty="0" err="1"/>
+              <a:t>qU</a:t>
+            </a:r>
+            <a:r>
+              <a:rPr lang="en-US" dirty="0"/>
+              <a:t> </a:t>
+            </a:r>
+            <a:r>
+              <a:rPr lang="en-US" dirty="0" err="1"/>
+              <a:t>langchain-openai</a:t>
+            </a:r>
+            <a:endParaRPr lang="en-US" dirty="0"/>
+          </a:p>
+          <a:p>
+            <a:r>
+              <a:rPr lang="en-US" dirty="0"/>
+              <a:t>pip install -</a:t>
+            </a:r>
+            <a:r>
+              <a:rPr lang="en-US" dirty="0" err="1"/>
+              <a:t>qU</a:t>
+            </a:r>
+            <a:r>
+              <a:rPr lang="en-US" dirty="0"/>
+              <a:t> </a:t>
+            </a:r>
+            <a:r>
+              <a:rPr lang="en-US" dirty="0" err="1"/>
+              <a:t>langchain-qdrant</a:t>
+            </a:r>
+            <a:endParaRPr lang="en-US" dirty="0"/>
+          </a:p>
+          <a:p>
+            <a:endParaRPr lang="en-US" dirty="0"/>
+          </a:p>
+          <a:p>
+            <a:r>
+              <a:rPr lang="en-US" b="1" dirty="0"/>
+              <a:t>Retrieval:</a:t>
+            </a:r>
+          </a:p>
+          <a:p>
+            <a:r>
+              <a:rPr lang="en-US" b="1" dirty="0"/>
+              <a:t>Code</a:t>
+            </a:r>
+            <a:r>
+              <a:rPr lang="en-US" b="1"/>
+              <a:t>: rag</a:t>
+            </a:r>
+            <a:r>
+              <a:rPr lang="en-US"/>
+              <a:t> </a:t>
+            </a:r>
+            <a:endParaRPr lang="en-US" dirty="0"/>
+          </a:p>
+        </p:txBody>
+      </p:sp>
     </p:spTree>
     <p:extLst>
       <p:ext uri="{BB962C8B-B14F-4D97-AF65-F5344CB8AC3E}">
-        <p14:creationId xmlns:p14="http://schemas.microsoft.com/office/powerpoint/2010/main" val="947805118"/>
+        <p14:creationId xmlns:p14="http://schemas.microsoft.com/office/powerpoint/2010/main" val="78431455"/>
       </p:ext>
     </p:extLst>
   </p:cSld>
@@ -8810,7 +9911,7 @@
         <p:cNvPr id="1" name="">
           <a:extLst>
             <a:ext uri="{FF2B5EF4-FFF2-40B4-BE49-F238E27FC236}">
-              <a16:creationId xmlns:a16="http://schemas.microsoft.com/office/drawing/2014/main" id="{5C021597-35A1-0257-CFC6-9C1BFF6BBE98}"/>
+              <a16:creationId xmlns:a16="http://schemas.microsoft.com/office/drawing/2014/main" id="{24901F32-3FF6-7D16-6DD1-4A68D4E0EEB0}"/>
             </a:ext>
           </a:extLst>
         </p:cNvPr>
@@ -8830,7 +9931,7 @@
           <p:cNvPr id="4" name="Picture 3" descr="450808d6-f018-4170-8863-633347777b52.png">
             <a:extLst>
               <a:ext uri="{FF2B5EF4-FFF2-40B4-BE49-F238E27FC236}">
-                <a16:creationId xmlns:a16="http://schemas.microsoft.com/office/drawing/2014/main" id="{D7698F4F-7C6B-F599-449B-15F0A2AE2CC6}"/>
+                <a16:creationId xmlns:a16="http://schemas.microsoft.com/office/drawing/2014/main" id="{875AAB9E-A056-01FE-2C11-F044B16368F3}"/>
               </a:ext>
             </a:extLst>
           </p:cNvPr>
@@ -8860,7 +9961,7 @@
           <p:cNvPr id="8" name="Picture 7">
             <a:extLst>
               <a:ext uri="{FF2B5EF4-FFF2-40B4-BE49-F238E27FC236}">
-                <a16:creationId xmlns:a16="http://schemas.microsoft.com/office/drawing/2014/main" id="{BABD7E1F-8D61-5DCE-603D-E1627CA3BE0D}"/>
+                <a16:creationId xmlns:a16="http://schemas.microsoft.com/office/drawing/2014/main" id="{8A8CD53B-D5A6-2AC9-1B3E-AF3AB2707B9D}"/>
               </a:ext>
             </a:extLst>
           </p:cNvPr>
@@ -8885,10 +9986,46 @@
           </a:prstGeom>
         </p:spPr>
       </p:pic>
+      <p:sp>
+        <p:nvSpPr>
+          <p:cNvPr id="2" name="TextBox 1">
+            <a:extLst>
+              <a:ext uri="{FF2B5EF4-FFF2-40B4-BE49-F238E27FC236}">
+                <a16:creationId xmlns:a16="http://schemas.microsoft.com/office/drawing/2014/main" id="{F64F9C37-12FE-9CA6-BB0F-4423002C9332}"/>
+              </a:ext>
+            </a:extLst>
+          </p:cNvPr>
+          <p:cNvSpPr txBox="1"/>
+          <p:nvPr/>
+        </p:nvSpPr>
+        <p:spPr>
+          <a:xfrm>
+            <a:off x="3019206" y="274339"/>
+            <a:ext cx="3249992" cy="584775"/>
+          </a:xfrm>
+          <a:prstGeom prst="rect">
+            <a:avLst/>
+          </a:prstGeom>
+          <a:noFill/>
+        </p:spPr>
+        <p:txBody>
+          <a:bodyPr wrap="none" rtlCol="0">
+            <a:spAutoFit/>
+          </a:bodyPr>
+          <a:lstStyle/>
+          <a:p>
+            <a:pPr algn="ctr"/>
+            <a:r>
+              <a:rPr lang="en-US" sz="3200" dirty="0"/>
+              <a:t>Sync vs Async RAG</a:t>
+            </a:r>
+          </a:p>
+        </p:txBody>
+      </p:sp>
     </p:spTree>
     <p:extLst>
       <p:ext uri="{BB962C8B-B14F-4D97-AF65-F5344CB8AC3E}">
-        <p14:creationId xmlns:p14="http://schemas.microsoft.com/office/powerpoint/2010/main" val="397282995"/>
+        <p14:creationId xmlns:p14="http://schemas.microsoft.com/office/powerpoint/2010/main" val="79130882"/>
       </p:ext>
     </p:extLst>
   </p:cSld>
@@ -8906,7 +10043,7 @@
         <p:cNvPr id="1" name="">
           <a:extLst>
             <a:ext uri="{FF2B5EF4-FFF2-40B4-BE49-F238E27FC236}">
-              <a16:creationId xmlns:a16="http://schemas.microsoft.com/office/drawing/2014/main" id="{5E9360C9-E8B7-E1B7-45C2-4DDBE07D0DBE}"/>
+              <a16:creationId xmlns:a16="http://schemas.microsoft.com/office/drawing/2014/main" id="{C6C45F8F-7731-1ED9-C86D-1AC8818B8388}"/>
             </a:ext>
           </a:extLst>
         </p:cNvPr>
@@ -8926,7 +10063,7 @@
           <p:cNvPr id="4" name="Picture 3" descr="450808d6-f018-4170-8863-633347777b52.png">
             <a:extLst>
               <a:ext uri="{FF2B5EF4-FFF2-40B4-BE49-F238E27FC236}">
-                <a16:creationId xmlns:a16="http://schemas.microsoft.com/office/drawing/2014/main" id="{C57C3DB7-A80C-202F-ABE1-B08FCDE81B44}"/>
+                <a16:creationId xmlns:a16="http://schemas.microsoft.com/office/drawing/2014/main" id="{889DF1E5-77FD-628A-E826-9381E11B6AC9}"/>
               </a:ext>
             </a:extLst>
           </p:cNvPr>
@@ -8956,7 +10093,7 @@
           <p:cNvPr id="8" name="Picture 7">
             <a:extLst>
               <a:ext uri="{FF2B5EF4-FFF2-40B4-BE49-F238E27FC236}">
-                <a16:creationId xmlns:a16="http://schemas.microsoft.com/office/drawing/2014/main" id="{8C52ABAD-A9E5-7BB2-A013-D5A2C6CEE136}"/>
+                <a16:creationId xmlns:a16="http://schemas.microsoft.com/office/drawing/2014/main" id="{DBAA998F-D7DD-EABE-1F5B-BDD7531113B7}"/>
               </a:ext>
             </a:extLst>
           </p:cNvPr>
@@ -8984,7 +10121,7 @@
     </p:spTree>
     <p:extLst>
       <p:ext uri="{BB962C8B-B14F-4D97-AF65-F5344CB8AC3E}">
-        <p14:creationId xmlns:p14="http://schemas.microsoft.com/office/powerpoint/2010/main" val="2953360885"/>
+        <p14:creationId xmlns:p14="http://schemas.microsoft.com/office/powerpoint/2010/main" val="1406258607"/>
       </p:ext>
     </p:extLst>
   </p:cSld>
@@ -9002,7 +10139,7 @@
         <p:cNvPr id="1" name="">
           <a:extLst>
             <a:ext uri="{FF2B5EF4-FFF2-40B4-BE49-F238E27FC236}">
-              <a16:creationId xmlns:a16="http://schemas.microsoft.com/office/drawing/2014/main" id="{4BF04B8A-C07E-CEB4-A1F0-D87BE9C5C5DA}"/>
+              <a16:creationId xmlns:a16="http://schemas.microsoft.com/office/drawing/2014/main" id="{9F8F6305-32EF-A197-390E-60A866DBEA81}"/>
             </a:ext>
           </a:extLst>
         </p:cNvPr>
@@ -9022,7 +10159,7 @@
           <p:cNvPr id="4" name="Picture 3" descr="450808d6-f018-4170-8863-633347777b52.png">
             <a:extLst>
               <a:ext uri="{FF2B5EF4-FFF2-40B4-BE49-F238E27FC236}">
-                <a16:creationId xmlns:a16="http://schemas.microsoft.com/office/drawing/2014/main" id="{047B16AF-5CDE-D550-AC30-E09C213D9894}"/>
+                <a16:creationId xmlns:a16="http://schemas.microsoft.com/office/drawing/2014/main" id="{6F8631E4-14EF-F69A-F635-8C7F5A7CC6F5}"/>
               </a:ext>
             </a:extLst>
           </p:cNvPr>
@@ -9052,7 +10189,7 @@
           <p:cNvPr id="8" name="Picture 7">
             <a:extLst>
               <a:ext uri="{FF2B5EF4-FFF2-40B4-BE49-F238E27FC236}">
-                <a16:creationId xmlns:a16="http://schemas.microsoft.com/office/drawing/2014/main" id="{F94EAA33-02CB-B9D3-DAFD-282190BC75E3}"/>
+                <a16:creationId xmlns:a16="http://schemas.microsoft.com/office/drawing/2014/main" id="{723AE5D9-26CE-EB2A-A0D5-8620DFB60EFE}"/>
               </a:ext>
             </a:extLst>
           </p:cNvPr>
@@ -9080,7 +10217,7 @@
     </p:spTree>
     <p:extLst>
       <p:ext uri="{BB962C8B-B14F-4D97-AF65-F5344CB8AC3E}">
-        <p14:creationId xmlns:p14="http://schemas.microsoft.com/office/powerpoint/2010/main" val="2774134213"/>
+        <p14:creationId xmlns:p14="http://schemas.microsoft.com/office/powerpoint/2010/main" val="602856098"/>
       </p:ext>
     </p:extLst>
   </p:cSld>
@@ -9098,7 +10235,7 @@
         <p:cNvPr id="1" name="">
           <a:extLst>
             <a:ext uri="{FF2B5EF4-FFF2-40B4-BE49-F238E27FC236}">
-              <a16:creationId xmlns:a16="http://schemas.microsoft.com/office/drawing/2014/main" id="{97B90563-95FA-E1C1-1EAB-7195321FF4BD}"/>
+              <a16:creationId xmlns:a16="http://schemas.microsoft.com/office/drawing/2014/main" id="{2F56CD11-CE37-C138-9327-D5CE62D10F5F}"/>
             </a:ext>
           </a:extLst>
         </p:cNvPr>
@@ -9118,7 +10255,7 @@
           <p:cNvPr id="4" name="Picture 3" descr="450808d6-f018-4170-8863-633347777b52.png">
             <a:extLst>
               <a:ext uri="{FF2B5EF4-FFF2-40B4-BE49-F238E27FC236}">
-                <a16:creationId xmlns:a16="http://schemas.microsoft.com/office/drawing/2014/main" id="{969C93C3-112E-1100-7E5A-D8EBA4C2FCAE}"/>
+                <a16:creationId xmlns:a16="http://schemas.microsoft.com/office/drawing/2014/main" id="{1A86787A-53B7-4199-DB71-9B7872B757E1}"/>
               </a:ext>
             </a:extLst>
           </p:cNvPr>
@@ -9148,7 +10285,7 @@
           <p:cNvPr id="8" name="Picture 7">
             <a:extLst>
               <a:ext uri="{FF2B5EF4-FFF2-40B4-BE49-F238E27FC236}">
-                <a16:creationId xmlns:a16="http://schemas.microsoft.com/office/drawing/2014/main" id="{B18DE8EB-797A-38CC-2FC0-4DA5B1C4E5C7}"/>
+                <a16:creationId xmlns:a16="http://schemas.microsoft.com/office/drawing/2014/main" id="{42AA69B8-6EBC-E3D7-A582-062B64834483}"/>
               </a:ext>
             </a:extLst>
           </p:cNvPr>
@@ -9176,7 +10313,7 @@
     </p:spTree>
     <p:extLst>
       <p:ext uri="{BB962C8B-B14F-4D97-AF65-F5344CB8AC3E}">
-        <p14:creationId xmlns:p14="http://schemas.microsoft.com/office/powerpoint/2010/main" val="3194000773"/>
+        <p14:creationId xmlns:p14="http://schemas.microsoft.com/office/powerpoint/2010/main" val="3992454187"/>
       </p:ext>
     </p:extLst>
   </p:cSld>
@@ -9194,7 +10331,7 @@
         <p:cNvPr id="1" name="">
           <a:extLst>
             <a:ext uri="{FF2B5EF4-FFF2-40B4-BE49-F238E27FC236}">
-              <a16:creationId xmlns:a16="http://schemas.microsoft.com/office/drawing/2014/main" id="{1EC70FE5-8681-346F-FE1D-E2ABEE0988AC}"/>
+              <a16:creationId xmlns:a16="http://schemas.microsoft.com/office/drawing/2014/main" id="{994C6178-6B8D-2673-84AC-6A5A59EA9D63}"/>
             </a:ext>
           </a:extLst>
         </p:cNvPr>
@@ -9214,7 +10351,7 @@
           <p:cNvPr id="4" name="Picture 3" descr="450808d6-f018-4170-8863-633347777b52.png">
             <a:extLst>
               <a:ext uri="{FF2B5EF4-FFF2-40B4-BE49-F238E27FC236}">
-                <a16:creationId xmlns:a16="http://schemas.microsoft.com/office/drawing/2014/main" id="{6CB5B619-C391-0A01-5E90-525AAEF3CF05}"/>
+                <a16:creationId xmlns:a16="http://schemas.microsoft.com/office/drawing/2014/main" id="{FDEA5E74-434F-AB66-D6A1-8EBD13FD1C11}"/>
               </a:ext>
             </a:extLst>
           </p:cNvPr>
@@ -9244,7 +10381,7 @@
           <p:cNvPr id="8" name="Picture 7">
             <a:extLst>
               <a:ext uri="{FF2B5EF4-FFF2-40B4-BE49-F238E27FC236}">
-                <a16:creationId xmlns:a16="http://schemas.microsoft.com/office/drawing/2014/main" id="{BEC731C2-CFCE-8342-A470-946656DF8322}"/>
+                <a16:creationId xmlns:a16="http://schemas.microsoft.com/office/drawing/2014/main" id="{6F2D56A5-59C3-CFC8-EF28-3F5526E98533}"/>
               </a:ext>
             </a:extLst>
           </p:cNvPr>
@@ -9272,7 +10409,7 @@
     </p:spTree>
     <p:extLst>
       <p:ext uri="{BB962C8B-B14F-4D97-AF65-F5344CB8AC3E}">
-        <p14:creationId xmlns:p14="http://schemas.microsoft.com/office/powerpoint/2010/main" val="1180437438"/>
+        <p14:creationId xmlns:p14="http://schemas.microsoft.com/office/powerpoint/2010/main" val="755513560"/>
       </p:ext>
     </p:extLst>
   </p:cSld>
@@ -9290,7 +10427,7 @@
         <p:cNvPr id="1" name="">
           <a:extLst>
             <a:ext uri="{FF2B5EF4-FFF2-40B4-BE49-F238E27FC236}">
-              <a16:creationId xmlns:a16="http://schemas.microsoft.com/office/drawing/2014/main" id="{68D3D082-4C22-36AD-C81B-FF6E9CFB0E5C}"/>
+              <a16:creationId xmlns:a16="http://schemas.microsoft.com/office/drawing/2014/main" id="{C3270EF3-6FBE-DC07-0777-FC589C288F51}"/>
             </a:ext>
           </a:extLst>
         </p:cNvPr>
@@ -9310,7 +10447,7 @@
           <p:cNvPr id="4" name="Picture 3" descr="450808d6-f018-4170-8863-633347777b52.png">
             <a:extLst>
               <a:ext uri="{FF2B5EF4-FFF2-40B4-BE49-F238E27FC236}">
-                <a16:creationId xmlns:a16="http://schemas.microsoft.com/office/drawing/2014/main" id="{DB2BCE8C-8FDE-3C16-F1F3-A57F55BD13F5}"/>
+                <a16:creationId xmlns:a16="http://schemas.microsoft.com/office/drawing/2014/main" id="{06D58806-6FC3-B667-A287-C177CD0CAB9B}"/>
               </a:ext>
             </a:extLst>
           </p:cNvPr>
@@ -9340,7 +10477,7 @@
           <p:cNvPr id="8" name="Picture 7">
             <a:extLst>
               <a:ext uri="{FF2B5EF4-FFF2-40B4-BE49-F238E27FC236}">
-                <a16:creationId xmlns:a16="http://schemas.microsoft.com/office/drawing/2014/main" id="{BB9DC80B-E652-D9E5-98C5-7A65FF68D1B4}"/>
+                <a16:creationId xmlns:a16="http://schemas.microsoft.com/office/drawing/2014/main" id="{318760C8-03E1-BE67-4BF4-522CC0EDC668}"/>
               </a:ext>
             </a:extLst>
           </p:cNvPr>
@@ -9368,7 +10505,7 @@
     </p:spTree>
     <p:extLst>
       <p:ext uri="{BB962C8B-B14F-4D97-AF65-F5344CB8AC3E}">
-        <p14:creationId xmlns:p14="http://schemas.microsoft.com/office/powerpoint/2010/main" val="993950643"/>
+        <p14:creationId xmlns:p14="http://schemas.microsoft.com/office/powerpoint/2010/main" val="986083063"/>
       </p:ext>
     </p:extLst>
   </p:cSld>
@@ -9548,7 +10685,7 @@
         <p:cNvPr id="1" name="">
           <a:extLst>
             <a:ext uri="{FF2B5EF4-FFF2-40B4-BE49-F238E27FC236}">
-              <a16:creationId xmlns:a16="http://schemas.microsoft.com/office/drawing/2014/main" id="{C5ACF2E6-5D3F-157B-0F25-DDC586A545FE}"/>
+              <a16:creationId xmlns:a16="http://schemas.microsoft.com/office/drawing/2014/main" id="{12BF72C0-8062-8E16-F304-31FC7347AF4E}"/>
             </a:ext>
           </a:extLst>
         </p:cNvPr>
@@ -9568,7 +10705,7 @@
           <p:cNvPr id="4" name="Picture 3" descr="450808d6-f018-4170-8863-633347777b52.png">
             <a:extLst>
               <a:ext uri="{FF2B5EF4-FFF2-40B4-BE49-F238E27FC236}">
-                <a16:creationId xmlns:a16="http://schemas.microsoft.com/office/drawing/2014/main" id="{71EF7DD6-BB2A-FEA8-E60D-C284EE5FA0AA}"/>
+                <a16:creationId xmlns:a16="http://schemas.microsoft.com/office/drawing/2014/main" id="{E8BEC687-C6BE-5EEF-9491-7E9ACB7780FF}"/>
               </a:ext>
             </a:extLst>
           </p:cNvPr>
@@ -9598,7 +10735,7 @@
           <p:cNvPr id="8" name="Picture 7">
             <a:extLst>
               <a:ext uri="{FF2B5EF4-FFF2-40B4-BE49-F238E27FC236}">
-                <a16:creationId xmlns:a16="http://schemas.microsoft.com/office/drawing/2014/main" id="{BE3A7CB8-364A-A67D-B6D2-6AA6DA5B2674}"/>
+                <a16:creationId xmlns:a16="http://schemas.microsoft.com/office/drawing/2014/main" id="{99260B16-6561-E857-3461-00370B60C417}"/>
               </a:ext>
             </a:extLst>
           </p:cNvPr>
@@ -9626,7 +10763,7 @@
     </p:spTree>
     <p:extLst>
       <p:ext uri="{BB962C8B-B14F-4D97-AF65-F5344CB8AC3E}">
-        <p14:creationId xmlns:p14="http://schemas.microsoft.com/office/powerpoint/2010/main" val="707937953"/>
+        <p14:creationId xmlns:p14="http://schemas.microsoft.com/office/powerpoint/2010/main" val="2481835297"/>
       </p:ext>
     </p:extLst>
   </p:cSld>
@@ -9644,7 +10781,7 @@
         <p:cNvPr id="1" name="">
           <a:extLst>
             <a:ext uri="{FF2B5EF4-FFF2-40B4-BE49-F238E27FC236}">
-              <a16:creationId xmlns:a16="http://schemas.microsoft.com/office/drawing/2014/main" id="{65FB0A00-203A-252F-AAE0-49F80983E14D}"/>
+              <a16:creationId xmlns:a16="http://schemas.microsoft.com/office/drawing/2014/main" id="{9D3E4B09-0857-2CF0-19BE-2A920215E935}"/>
             </a:ext>
           </a:extLst>
         </p:cNvPr>
@@ -9664,7 +10801,7 @@
           <p:cNvPr id="4" name="Picture 3" descr="450808d6-f018-4170-8863-633347777b52.png">
             <a:extLst>
               <a:ext uri="{FF2B5EF4-FFF2-40B4-BE49-F238E27FC236}">
-                <a16:creationId xmlns:a16="http://schemas.microsoft.com/office/drawing/2014/main" id="{73A52282-AB82-1220-4E40-34AABEF3B65A}"/>
+                <a16:creationId xmlns:a16="http://schemas.microsoft.com/office/drawing/2014/main" id="{82213DA8-BE7C-C370-6C23-34476EA8A636}"/>
               </a:ext>
             </a:extLst>
           </p:cNvPr>
@@ -9694,7 +10831,7 @@
           <p:cNvPr id="8" name="Picture 7">
             <a:extLst>
               <a:ext uri="{FF2B5EF4-FFF2-40B4-BE49-F238E27FC236}">
-                <a16:creationId xmlns:a16="http://schemas.microsoft.com/office/drawing/2014/main" id="{02270587-6E00-CD77-87A1-D3D42A45E5B4}"/>
+                <a16:creationId xmlns:a16="http://schemas.microsoft.com/office/drawing/2014/main" id="{CEAA0D7F-519C-84F9-4C36-1E0C552DE344}"/>
               </a:ext>
             </a:extLst>
           </p:cNvPr>
@@ -9722,7 +10859,7 @@
     </p:spTree>
     <p:extLst>
       <p:ext uri="{BB962C8B-B14F-4D97-AF65-F5344CB8AC3E}">
-        <p14:creationId xmlns:p14="http://schemas.microsoft.com/office/powerpoint/2010/main" val="4031818786"/>
+        <p14:creationId xmlns:p14="http://schemas.microsoft.com/office/powerpoint/2010/main" val="3188386146"/>
       </p:ext>
     </p:extLst>
   </p:cSld>
@@ -9740,7 +10877,7 @@
         <p:cNvPr id="1" name="">
           <a:extLst>
             <a:ext uri="{FF2B5EF4-FFF2-40B4-BE49-F238E27FC236}">
-              <a16:creationId xmlns:a16="http://schemas.microsoft.com/office/drawing/2014/main" id="{604AE0A1-5587-0A33-5378-295247206EEF}"/>
+              <a16:creationId xmlns:a16="http://schemas.microsoft.com/office/drawing/2014/main" id="{8E861366-5A7B-75AD-F66B-2560796ABFBC}"/>
             </a:ext>
           </a:extLst>
         </p:cNvPr>
@@ -9760,7 +10897,7 @@
           <p:cNvPr id="4" name="Picture 3" descr="450808d6-f018-4170-8863-633347777b52.png">
             <a:extLst>
               <a:ext uri="{FF2B5EF4-FFF2-40B4-BE49-F238E27FC236}">
-                <a16:creationId xmlns:a16="http://schemas.microsoft.com/office/drawing/2014/main" id="{D623CB44-8E67-5885-93EA-B852CE584F79}"/>
+                <a16:creationId xmlns:a16="http://schemas.microsoft.com/office/drawing/2014/main" id="{1AF9CAAB-230F-9DA7-4419-37B6A17E73B1}"/>
               </a:ext>
             </a:extLst>
           </p:cNvPr>
@@ -9790,7 +10927,7 @@
           <p:cNvPr id="8" name="Picture 7">
             <a:extLst>
               <a:ext uri="{FF2B5EF4-FFF2-40B4-BE49-F238E27FC236}">
-                <a16:creationId xmlns:a16="http://schemas.microsoft.com/office/drawing/2014/main" id="{4BB50A19-A115-992A-7BEF-865ED1A575DA}"/>
+                <a16:creationId xmlns:a16="http://schemas.microsoft.com/office/drawing/2014/main" id="{B7FD6E4F-F623-948E-1DAD-AFF7A61736D2}"/>
               </a:ext>
             </a:extLst>
           </p:cNvPr>
@@ -9818,7 +10955,7 @@
     </p:spTree>
     <p:extLst>
       <p:ext uri="{BB962C8B-B14F-4D97-AF65-F5344CB8AC3E}">
-        <p14:creationId xmlns:p14="http://schemas.microsoft.com/office/powerpoint/2010/main" val="3134797356"/>
+        <p14:creationId xmlns:p14="http://schemas.microsoft.com/office/powerpoint/2010/main" val="374615332"/>
       </p:ext>
     </p:extLst>
   </p:cSld>
@@ -9836,7 +10973,7 @@
         <p:cNvPr id="1" name="">
           <a:extLst>
             <a:ext uri="{FF2B5EF4-FFF2-40B4-BE49-F238E27FC236}">
-              <a16:creationId xmlns:a16="http://schemas.microsoft.com/office/drawing/2014/main" id="{CB62641F-CF17-DE49-A174-6542C7747127}"/>
+              <a16:creationId xmlns:a16="http://schemas.microsoft.com/office/drawing/2014/main" id="{424932CB-E3D9-86E7-F9FE-43140E6220DA}"/>
             </a:ext>
           </a:extLst>
         </p:cNvPr>
@@ -9856,7 +10993,7 @@
           <p:cNvPr id="4" name="Picture 3" descr="450808d6-f018-4170-8863-633347777b52.png">
             <a:extLst>
               <a:ext uri="{FF2B5EF4-FFF2-40B4-BE49-F238E27FC236}">
-                <a16:creationId xmlns:a16="http://schemas.microsoft.com/office/drawing/2014/main" id="{999B5C07-6ED0-A934-5550-94F6BC35AF54}"/>
+                <a16:creationId xmlns:a16="http://schemas.microsoft.com/office/drawing/2014/main" id="{753A7D82-ADAA-2162-DAF4-64D7EEAAAEA6}"/>
               </a:ext>
             </a:extLst>
           </p:cNvPr>
@@ -9886,7 +11023,7 @@
           <p:cNvPr id="8" name="Picture 7">
             <a:extLst>
               <a:ext uri="{FF2B5EF4-FFF2-40B4-BE49-F238E27FC236}">
-                <a16:creationId xmlns:a16="http://schemas.microsoft.com/office/drawing/2014/main" id="{9A1AFF96-FD10-20F2-173E-CB36CE924628}"/>
+                <a16:creationId xmlns:a16="http://schemas.microsoft.com/office/drawing/2014/main" id="{7E311C13-0A92-66E4-2609-AA3152D2F931}"/>
               </a:ext>
             </a:extLst>
           </p:cNvPr>
@@ -9914,7 +11051,7 @@
     </p:spTree>
     <p:extLst>
       <p:ext uri="{BB962C8B-B14F-4D97-AF65-F5344CB8AC3E}">
-        <p14:creationId xmlns:p14="http://schemas.microsoft.com/office/powerpoint/2010/main" val="272446797"/>
+        <p14:creationId xmlns:p14="http://schemas.microsoft.com/office/powerpoint/2010/main" val="77430038"/>
       </p:ext>
     </p:extLst>
   </p:cSld>
@@ -9932,7 +11069,7 @@
         <p:cNvPr id="1" name="">
           <a:extLst>
             <a:ext uri="{FF2B5EF4-FFF2-40B4-BE49-F238E27FC236}">
-              <a16:creationId xmlns:a16="http://schemas.microsoft.com/office/drawing/2014/main" id="{D4DB40FA-D544-1086-4F3F-76EB0AD6FA0A}"/>
+              <a16:creationId xmlns:a16="http://schemas.microsoft.com/office/drawing/2014/main" id="{DDE24720-E7E5-1D99-9EC1-B8D4E82180EA}"/>
             </a:ext>
           </a:extLst>
         </p:cNvPr>
@@ -9952,7 +11089,7 @@
           <p:cNvPr id="4" name="Picture 3" descr="450808d6-f018-4170-8863-633347777b52.png">
             <a:extLst>
               <a:ext uri="{FF2B5EF4-FFF2-40B4-BE49-F238E27FC236}">
-                <a16:creationId xmlns:a16="http://schemas.microsoft.com/office/drawing/2014/main" id="{AA138325-0F28-CC1B-43B3-370B098AA841}"/>
+                <a16:creationId xmlns:a16="http://schemas.microsoft.com/office/drawing/2014/main" id="{19BC9A7F-140A-2DF2-AFAB-B16FC715BE7D}"/>
               </a:ext>
             </a:extLst>
           </p:cNvPr>
@@ -9982,7 +11119,7 @@
           <p:cNvPr id="8" name="Picture 7">
             <a:extLst>
               <a:ext uri="{FF2B5EF4-FFF2-40B4-BE49-F238E27FC236}">
-                <a16:creationId xmlns:a16="http://schemas.microsoft.com/office/drawing/2014/main" id="{2896F5A6-3916-0395-EDAC-8412D0C38686}"/>
+                <a16:creationId xmlns:a16="http://schemas.microsoft.com/office/drawing/2014/main" id="{CA0A0315-6AE4-24E4-F87D-BE701070CABF}"/>
               </a:ext>
             </a:extLst>
           </p:cNvPr>
@@ -10010,7 +11147,7 @@
     </p:spTree>
     <p:extLst>
       <p:ext uri="{BB962C8B-B14F-4D97-AF65-F5344CB8AC3E}">
-        <p14:creationId xmlns:p14="http://schemas.microsoft.com/office/powerpoint/2010/main" val="1537850561"/>
+        <p14:creationId xmlns:p14="http://schemas.microsoft.com/office/powerpoint/2010/main" val="3595665657"/>
       </p:ext>
     </p:extLst>
   </p:cSld>
@@ -10028,7 +11165,7 @@
         <p:cNvPr id="1" name="">
           <a:extLst>
             <a:ext uri="{FF2B5EF4-FFF2-40B4-BE49-F238E27FC236}">
-              <a16:creationId xmlns:a16="http://schemas.microsoft.com/office/drawing/2014/main" id="{8A721CF2-B671-EEB2-594C-3F53267515A6}"/>
+              <a16:creationId xmlns:a16="http://schemas.microsoft.com/office/drawing/2014/main" id="{DF52A1EB-7902-7B09-9FBF-7083C9F0722D}"/>
             </a:ext>
           </a:extLst>
         </p:cNvPr>
@@ -10048,7 +11185,7 @@
           <p:cNvPr id="4" name="Picture 3" descr="450808d6-f018-4170-8863-633347777b52.png">
             <a:extLst>
               <a:ext uri="{FF2B5EF4-FFF2-40B4-BE49-F238E27FC236}">
-                <a16:creationId xmlns:a16="http://schemas.microsoft.com/office/drawing/2014/main" id="{FF6363D6-3345-ABF0-BC33-D05AEFECD883}"/>
+                <a16:creationId xmlns:a16="http://schemas.microsoft.com/office/drawing/2014/main" id="{4E347CAB-2FA3-7320-C5AB-6E0676B7DEEE}"/>
               </a:ext>
             </a:extLst>
           </p:cNvPr>
@@ -10078,7 +11215,7 @@
           <p:cNvPr id="8" name="Picture 7">
             <a:extLst>
               <a:ext uri="{FF2B5EF4-FFF2-40B4-BE49-F238E27FC236}">
-                <a16:creationId xmlns:a16="http://schemas.microsoft.com/office/drawing/2014/main" id="{EA4238FC-78F2-8DD3-499B-B97E99A571CF}"/>
+                <a16:creationId xmlns:a16="http://schemas.microsoft.com/office/drawing/2014/main" id="{6DD3CEE3-A623-DA30-05D8-191669334374}"/>
               </a:ext>
             </a:extLst>
           </p:cNvPr>
@@ -10106,7 +11243,7 @@
     </p:spTree>
     <p:extLst>
       <p:ext uri="{BB962C8B-B14F-4D97-AF65-F5344CB8AC3E}">
-        <p14:creationId xmlns:p14="http://schemas.microsoft.com/office/powerpoint/2010/main" val="4164706476"/>
+        <p14:creationId xmlns:p14="http://schemas.microsoft.com/office/powerpoint/2010/main" val="1907376944"/>
       </p:ext>
     </p:extLst>
   </p:cSld>
@@ -10124,7 +11261,7 @@
         <p:cNvPr id="1" name="">
           <a:extLst>
             <a:ext uri="{FF2B5EF4-FFF2-40B4-BE49-F238E27FC236}">
-              <a16:creationId xmlns:a16="http://schemas.microsoft.com/office/drawing/2014/main" id="{3C2C90F3-240E-89EC-530B-CA1A69E10638}"/>
+              <a16:creationId xmlns:a16="http://schemas.microsoft.com/office/drawing/2014/main" id="{8888E9C0-1CB7-BA39-3F2F-16C2D4CA76EC}"/>
             </a:ext>
           </a:extLst>
         </p:cNvPr>
@@ -10144,7 +11281,7 @@
           <p:cNvPr id="4" name="Picture 3" descr="450808d6-f018-4170-8863-633347777b52.png">
             <a:extLst>
               <a:ext uri="{FF2B5EF4-FFF2-40B4-BE49-F238E27FC236}">
-                <a16:creationId xmlns:a16="http://schemas.microsoft.com/office/drawing/2014/main" id="{A0A2DCDB-7271-FFE2-2765-B4C777CBC580}"/>
+                <a16:creationId xmlns:a16="http://schemas.microsoft.com/office/drawing/2014/main" id="{746F39F0-A77A-F201-BFB7-91C268B41565}"/>
               </a:ext>
             </a:extLst>
           </p:cNvPr>
@@ -10174,7 +11311,7 @@
           <p:cNvPr id="8" name="Picture 7">
             <a:extLst>
               <a:ext uri="{FF2B5EF4-FFF2-40B4-BE49-F238E27FC236}">
-                <a16:creationId xmlns:a16="http://schemas.microsoft.com/office/drawing/2014/main" id="{34EEAA85-35F2-BDE5-EFDB-A72FD1669B55}"/>
+                <a16:creationId xmlns:a16="http://schemas.microsoft.com/office/drawing/2014/main" id="{5C0ADF22-1B75-B09D-CF1E-EFF30135B817}"/>
               </a:ext>
             </a:extLst>
           </p:cNvPr>
@@ -10202,7 +11339,7 @@
     </p:spTree>
     <p:extLst>
       <p:ext uri="{BB962C8B-B14F-4D97-AF65-F5344CB8AC3E}">
-        <p14:creationId xmlns:p14="http://schemas.microsoft.com/office/powerpoint/2010/main" val="2335035511"/>
+        <p14:creationId xmlns:p14="http://schemas.microsoft.com/office/powerpoint/2010/main" val="1044879448"/>
       </p:ext>
     </p:extLst>
   </p:cSld>
@@ -10220,7 +11357,7 @@
         <p:cNvPr id="1" name="">
           <a:extLst>
             <a:ext uri="{FF2B5EF4-FFF2-40B4-BE49-F238E27FC236}">
-              <a16:creationId xmlns:a16="http://schemas.microsoft.com/office/drawing/2014/main" id="{035CD3EF-A0EF-6856-6542-E5DDD6FBF164}"/>
+              <a16:creationId xmlns:a16="http://schemas.microsoft.com/office/drawing/2014/main" id="{46E755BF-725C-4A22-438B-F71A307CFD6D}"/>
             </a:ext>
           </a:extLst>
         </p:cNvPr>
@@ -10240,7 +11377,7 @@
           <p:cNvPr id="4" name="Picture 3" descr="450808d6-f018-4170-8863-633347777b52.png">
             <a:extLst>
               <a:ext uri="{FF2B5EF4-FFF2-40B4-BE49-F238E27FC236}">
-                <a16:creationId xmlns:a16="http://schemas.microsoft.com/office/drawing/2014/main" id="{29C35488-3327-351D-7180-7DC224F226BA}"/>
+                <a16:creationId xmlns:a16="http://schemas.microsoft.com/office/drawing/2014/main" id="{C0B6C27D-4F00-30D8-4B41-08B5C4A94702}"/>
               </a:ext>
             </a:extLst>
           </p:cNvPr>
@@ -10270,7 +11407,7 @@
           <p:cNvPr id="8" name="Picture 7">
             <a:extLst>
               <a:ext uri="{FF2B5EF4-FFF2-40B4-BE49-F238E27FC236}">
-                <a16:creationId xmlns:a16="http://schemas.microsoft.com/office/drawing/2014/main" id="{5EB8B683-5565-1650-505D-E57DF9B7F571}"/>
+                <a16:creationId xmlns:a16="http://schemas.microsoft.com/office/drawing/2014/main" id="{74AB33F7-D573-CF3B-FAC0-4C8CBCF7E8B5}"/>
               </a:ext>
             </a:extLst>
           </p:cNvPr>
@@ -10298,7 +11435,7 @@
     </p:spTree>
     <p:extLst>
       <p:ext uri="{BB962C8B-B14F-4D97-AF65-F5344CB8AC3E}">
-        <p14:creationId xmlns:p14="http://schemas.microsoft.com/office/powerpoint/2010/main" val="1523915448"/>
+        <p14:creationId xmlns:p14="http://schemas.microsoft.com/office/powerpoint/2010/main" val="365246578"/>
       </p:ext>
     </p:extLst>
   </p:cSld>
@@ -10316,7 +11453,7 @@
         <p:cNvPr id="1" name="">
           <a:extLst>
             <a:ext uri="{FF2B5EF4-FFF2-40B4-BE49-F238E27FC236}">
-              <a16:creationId xmlns:a16="http://schemas.microsoft.com/office/drawing/2014/main" id="{CEC3C1BA-02E3-9D82-A585-9D1FD71252EA}"/>
+              <a16:creationId xmlns:a16="http://schemas.microsoft.com/office/drawing/2014/main" id="{918A4BAA-1C5A-CAA9-C9FC-DD7D6D1B885F}"/>
             </a:ext>
           </a:extLst>
         </p:cNvPr>
@@ -10336,7 +11473,7 @@
           <p:cNvPr id="4" name="Picture 3" descr="450808d6-f018-4170-8863-633347777b52.png">
             <a:extLst>
               <a:ext uri="{FF2B5EF4-FFF2-40B4-BE49-F238E27FC236}">
-                <a16:creationId xmlns:a16="http://schemas.microsoft.com/office/drawing/2014/main" id="{EE589166-30CC-8277-B70A-0B8A8B9A970F}"/>
+                <a16:creationId xmlns:a16="http://schemas.microsoft.com/office/drawing/2014/main" id="{D9A4198F-9067-591F-AAA0-7048EDC76384}"/>
               </a:ext>
             </a:extLst>
           </p:cNvPr>
@@ -10366,7 +11503,7 @@
           <p:cNvPr id="8" name="Picture 7">
             <a:extLst>
               <a:ext uri="{FF2B5EF4-FFF2-40B4-BE49-F238E27FC236}">
-                <a16:creationId xmlns:a16="http://schemas.microsoft.com/office/drawing/2014/main" id="{9496D202-A956-3523-9C5C-982D14E19F33}"/>
+                <a16:creationId xmlns:a16="http://schemas.microsoft.com/office/drawing/2014/main" id="{DDCF901E-F4C3-1D57-7D18-A750A8FE62D9}"/>
               </a:ext>
             </a:extLst>
           </p:cNvPr>
@@ -10391,10 +11528,76 @@
           </a:prstGeom>
         </p:spPr>
       </p:pic>
+      <p:pic>
+        <p:nvPicPr>
+          <p:cNvPr id="3" name="Picture 2">
+            <a:extLst>
+              <a:ext uri="{FF2B5EF4-FFF2-40B4-BE49-F238E27FC236}">
+                <a16:creationId xmlns:a16="http://schemas.microsoft.com/office/drawing/2014/main" id="{BF5854C7-0689-E5F0-456E-83BEBD14360D}"/>
+              </a:ext>
+            </a:extLst>
+          </p:cNvPr>
+          <p:cNvPicPr>
+            <a:picLocks noChangeAspect="1"/>
+          </p:cNvPicPr>
+          <p:nvPr/>
+        </p:nvPicPr>
+        <p:blipFill>
+          <a:blip r:embed="rId4"/>
+          <a:stretch>
+            <a:fillRect/>
+          </a:stretch>
+        </p:blipFill>
+        <p:spPr>
+          <a:xfrm>
+            <a:off x="2186808" y="898446"/>
+            <a:ext cx="4415932" cy="5959554"/>
+          </a:xfrm>
+          <a:prstGeom prst="rect">
+            <a:avLst/>
+          </a:prstGeom>
+        </p:spPr>
+      </p:pic>
+      <p:sp>
+        <p:nvSpPr>
+          <p:cNvPr id="5" name="TextBox 4">
+            <a:extLst>
+              <a:ext uri="{FF2B5EF4-FFF2-40B4-BE49-F238E27FC236}">
+                <a16:creationId xmlns:a16="http://schemas.microsoft.com/office/drawing/2014/main" id="{63439A7D-F546-5FAA-5A69-35192F6BACB1}"/>
+              </a:ext>
+            </a:extLst>
+          </p:cNvPr>
+          <p:cNvSpPr txBox="1"/>
+          <p:nvPr/>
+        </p:nvSpPr>
+        <p:spPr>
+          <a:xfrm>
+            <a:off x="2178462" y="137652"/>
+            <a:ext cx="4432625" cy="584775"/>
+          </a:xfrm>
+          <a:prstGeom prst="rect">
+            <a:avLst/>
+          </a:prstGeom>
+          <a:noFill/>
+        </p:spPr>
+        <p:txBody>
+          <a:bodyPr wrap="none" rtlCol="0">
+            <a:spAutoFit/>
+          </a:bodyPr>
+          <a:lstStyle/>
+          <a:p>
+            <a:pPr algn="ctr"/>
+            <a:r>
+              <a:rPr lang="en-US" sz="3200" dirty="0"/>
+              <a:t>Transformer Architecture</a:t>
+            </a:r>
+          </a:p>
+        </p:txBody>
+      </p:sp>
     </p:spTree>
     <p:extLst>
       <p:ext uri="{BB962C8B-B14F-4D97-AF65-F5344CB8AC3E}">
-        <p14:creationId xmlns:p14="http://schemas.microsoft.com/office/powerpoint/2010/main" val="1996163946"/>
+        <p14:creationId xmlns:p14="http://schemas.microsoft.com/office/powerpoint/2010/main" val="1194120463"/>
       </p:ext>
     </p:extLst>
   </p:cSld>
@@ -10412,7 +11615,7 @@
         <p:cNvPr id="1" name="">
           <a:extLst>
             <a:ext uri="{FF2B5EF4-FFF2-40B4-BE49-F238E27FC236}">
-              <a16:creationId xmlns:a16="http://schemas.microsoft.com/office/drawing/2014/main" id="{DE9FD763-03DC-AA98-A7E2-3CDB9D2982A2}"/>
+              <a16:creationId xmlns:a16="http://schemas.microsoft.com/office/drawing/2014/main" id="{A46B21C2-430E-F3F7-4C93-EF0617BAB252}"/>
             </a:ext>
           </a:extLst>
         </p:cNvPr>
@@ -10432,7 +11635,7 @@
           <p:cNvPr id="4" name="Picture 3" descr="450808d6-f018-4170-8863-633347777b52.png">
             <a:extLst>
               <a:ext uri="{FF2B5EF4-FFF2-40B4-BE49-F238E27FC236}">
-                <a16:creationId xmlns:a16="http://schemas.microsoft.com/office/drawing/2014/main" id="{CD6B637A-D64E-E2DC-886D-444A9BB73C35}"/>
+                <a16:creationId xmlns:a16="http://schemas.microsoft.com/office/drawing/2014/main" id="{B8BB053A-C5CD-2147-8B1E-CC18BDCC764B}"/>
               </a:ext>
             </a:extLst>
           </p:cNvPr>
@@ -10462,7 +11665,7 @@
           <p:cNvPr id="8" name="Picture 7">
             <a:extLst>
               <a:ext uri="{FF2B5EF4-FFF2-40B4-BE49-F238E27FC236}">
-                <a16:creationId xmlns:a16="http://schemas.microsoft.com/office/drawing/2014/main" id="{7DEDA73B-2C67-BD0A-31AF-72A8F355359C}"/>
+                <a16:creationId xmlns:a16="http://schemas.microsoft.com/office/drawing/2014/main" id="{F55C91A6-7004-3FA7-6C32-8FDE6E71FAF3}"/>
               </a:ext>
             </a:extLst>
           </p:cNvPr>
@@ -10487,10 +11690,216 @@
           </a:prstGeom>
         </p:spPr>
       </p:pic>
+      <p:sp>
+        <p:nvSpPr>
+          <p:cNvPr id="5" name="TextBox 4">
+            <a:extLst>
+              <a:ext uri="{FF2B5EF4-FFF2-40B4-BE49-F238E27FC236}">
+                <a16:creationId xmlns:a16="http://schemas.microsoft.com/office/drawing/2014/main" id="{E99D19FE-7462-2102-1261-3FBE15110EF6}"/>
+              </a:ext>
+            </a:extLst>
+          </p:cNvPr>
+          <p:cNvSpPr txBox="1"/>
+          <p:nvPr/>
+        </p:nvSpPr>
+        <p:spPr>
+          <a:xfrm>
+            <a:off x="1143000" y="1101370"/>
+            <a:ext cx="6858000" cy="4770537"/>
+          </a:xfrm>
+          <a:prstGeom prst="rect">
+            <a:avLst/>
+          </a:prstGeom>
+          <a:noFill/>
+        </p:spPr>
+        <p:txBody>
+          <a:bodyPr wrap="square">
+            <a:spAutoFit/>
+          </a:bodyPr>
+          <a:lstStyle/>
+          <a:p>
+            <a:endParaRPr lang="en-US" sz="1600" dirty="0"/>
+          </a:p>
+          <a:p>
+            <a:pPr>
+              <a:defRPr sz="2000"/>
+            </a:pPr>
+            <a:r>
+              <a:rPr lang="en-US" sz="1600" dirty="0"/>
+              <a:t>🔹 Transformers process the entire sentence at once, not word-by-word.</a:t>
+            </a:r>
+          </a:p>
+          <a:p>
+            <a:pPr>
+              <a:defRPr sz="2000"/>
+            </a:pPr>
+            <a:endParaRPr lang="en-US" sz="1600" dirty="0"/>
+          </a:p>
+          <a:p>
+            <a:pPr>
+              <a:defRPr sz="2000"/>
+            </a:pPr>
+            <a:r>
+              <a:rPr lang="en-US" sz="1600" dirty="0"/>
+              <a:t>👉 **Input Embedding**</a:t>
+            </a:r>
+          </a:p>
+          <a:p>
+            <a:pPr>
+              <a:defRPr sz="2000"/>
+            </a:pPr>
+            <a:r>
+              <a:rPr lang="en-US" sz="1600" dirty="0"/>
+              <a:t>   - Converts each word into a numeric vector (learned representation).</a:t>
+            </a:r>
+          </a:p>
+          <a:p>
+            <a:pPr>
+              <a:defRPr sz="2000"/>
+            </a:pPr>
+            <a:r>
+              <a:rPr lang="en-US" sz="1600" dirty="0"/>
+              <a:t>   - Helps the model understand meaning of words.</a:t>
+            </a:r>
+          </a:p>
+          <a:p>
+            <a:pPr>
+              <a:defRPr sz="2000"/>
+            </a:pPr>
+            <a:endParaRPr lang="en-US" sz="1600" dirty="0"/>
+          </a:p>
+          <a:p>
+            <a:pPr>
+              <a:defRPr sz="2000"/>
+            </a:pPr>
+            <a:r>
+              <a:rPr lang="en-US" sz="1600" dirty="0"/>
+              <a:t>👉 **Positional Encoding**</a:t>
+            </a:r>
+          </a:p>
+          <a:p>
+            <a:pPr>
+              <a:defRPr sz="2000"/>
+            </a:pPr>
+            <a:r>
+              <a:rPr lang="en-US" sz="1600" dirty="0"/>
+              <a:t>   - Adds order information so the model knows which word comes first.</a:t>
+            </a:r>
+          </a:p>
+          <a:p>
+            <a:pPr>
+              <a:defRPr sz="2000"/>
+            </a:pPr>
+            <a:endParaRPr lang="en-US" sz="1600" dirty="0"/>
+          </a:p>
+          <a:p>
+            <a:pPr>
+              <a:defRPr sz="2000"/>
+            </a:pPr>
+            <a:r>
+              <a:rPr lang="en-US" sz="1600" dirty="0"/>
+              <a:t>👉 **Encoder (repeated N times)**</a:t>
+            </a:r>
+          </a:p>
+          <a:p>
+            <a:pPr>
+              <a:defRPr sz="2000"/>
+            </a:pPr>
+            <a:r>
+              <a:rPr lang="en-US" sz="1600" dirty="0"/>
+              <a:t>   • **Self-Attention:** Every word looks at all other words.</a:t>
+            </a:r>
+          </a:p>
+          <a:p>
+            <a:pPr>
+              <a:defRPr sz="2000"/>
+            </a:pPr>
+            <a:r>
+              <a:rPr lang="en-US" sz="1600" dirty="0"/>
+              <a:t>       Example: In “She saw the dog with a telescope”,</a:t>
+            </a:r>
+          </a:p>
+          <a:p>
+            <a:pPr>
+              <a:defRPr sz="2000"/>
+            </a:pPr>
+            <a:r>
+              <a:rPr lang="en-US" sz="1600" dirty="0"/>
+              <a:t>       the model figures out which words relate to each other.</a:t>
+            </a:r>
+          </a:p>
+          <a:p>
+            <a:pPr>
+              <a:defRPr sz="2000"/>
+            </a:pPr>
+            <a:endParaRPr lang="en-US" sz="1600" dirty="0"/>
+          </a:p>
+          <a:p>
+            <a:pPr>
+              <a:defRPr sz="2000"/>
+            </a:pPr>
+            <a:r>
+              <a:rPr lang="en-US" sz="1600" dirty="0"/>
+              <a:t>   • **Feed Forward Network:** A small neural network that improves the representation.</a:t>
+            </a:r>
+          </a:p>
+          <a:p>
+            <a:pPr>
+              <a:defRPr sz="2000"/>
+            </a:pPr>
+            <a:endParaRPr lang="en-US" sz="1600" dirty="0"/>
+          </a:p>
+          <a:p>
+            <a:pPr>
+              <a:defRPr sz="2000"/>
+            </a:pPr>
+            <a:r>
+              <a:rPr lang="en-US" sz="1600" dirty="0"/>
+              <a:t>⭐ Output of Encoder = Deep understanding of the full input sentence.</a:t>
+            </a:r>
+          </a:p>
+        </p:txBody>
+      </p:sp>
+      <p:sp>
+        <p:nvSpPr>
+          <p:cNvPr id="6" name="TextBox 5">
+            <a:extLst>
+              <a:ext uri="{FF2B5EF4-FFF2-40B4-BE49-F238E27FC236}">
+                <a16:creationId xmlns:a16="http://schemas.microsoft.com/office/drawing/2014/main" id="{D3966DC8-D7DB-2D43-14CA-534C3C24EF5D}"/>
+              </a:ext>
+            </a:extLst>
+          </p:cNvPr>
+          <p:cNvSpPr txBox="1"/>
+          <p:nvPr/>
+        </p:nvSpPr>
+        <p:spPr>
+          <a:xfrm>
+            <a:off x="2178462" y="137652"/>
+            <a:ext cx="4432625" cy="584775"/>
+          </a:xfrm>
+          <a:prstGeom prst="rect">
+            <a:avLst/>
+          </a:prstGeom>
+          <a:noFill/>
+        </p:spPr>
+        <p:txBody>
+          <a:bodyPr wrap="none" rtlCol="0">
+            <a:spAutoFit/>
+          </a:bodyPr>
+          <a:lstStyle/>
+          <a:p>
+            <a:pPr algn="ctr"/>
+            <a:r>
+              <a:rPr lang="en-US" sz="3200" dirty="0"/>
+              <a:t>Transformer Architecture</a:t>
+            </a:r>
+          </a:p>
+        </p:txBody>
+      </p:sp>
     </p:spTree>
     <p:extLst>
       <p:ext uri="{BB962C8B-B14F-4D97-AF65-F5344CB8AC3E}">
-        <p14:creationId xmlns:p14="http://schemas.microsoft.com/office/powerpoint/2010/main" val="3366890361"/>
+        <p14:creationId xmlns:p14="http://schemas.microsoft.com/office/powerpoint/2010/main" val="2941902518"/>
       </p:ext>
     </p:extLst>
   </p:cSld>
@@ -10670,7 +12079,7 @@
         <p:cNvPr id="1" name="">
           <a:extLst>
             <a:ext uri="{FF2B5EF4-FFF2-40B4-BE49-F238E27FC236}">
-              <a16:creationId xmlns:a16="http://schemas.microsoft.com/office/drawing/2014/main" id="{BB75ACEF-656F-C9A8-BD63-0DF118BC4F2E}"/>
+              <a16:creationId xmlns:a16="http://schemas.microsoft.com/office/drawing/2014/main" id="{050174EB-C701-2807-CA17-EDB532FE2364}"/>
             </a:ext>
           </a:extLst>
         </p:cNvPr>
@@ -10690,7 +12099,7 @@
           <p:cNvPr id="4" name="Picture 3" descr="450808d6-f018-4170-8863-633347777b52.png">
             <a:extLst>
               <a:ext uri="{FF2B5EF4-FFF2-40B4-BE49-F238E27FC236}">
-                <a16:creationId xmlns:a16="http://schemas.microsoft.com/office/drawing/2014/main" id="{7C3EFB4B-E4C6-A432-5A36-AA1EF7B75722}"/>
+                <a16:creationId xmlns:a16="http://schemas.microsoft.com/office/drawing/2014/main" id="{81DD0DCF-A7EB-4D00-1766-BAD18A7082B1}"/>
               </a:ext>
             </a:extLst>
           </p:cNvPr>
@@ -10720,7 +12129,7 @@
           <p:cNvPr id="8" name="Picture 7">
             <a:extLst>
               <a:ext uri="{FF2B5EF4-FFF2-40B4-BE49-F238E27FC236}">
-                <a16:creationId xmlns:a16="http://schemas.microsoft.com/office/drawing/2014/main" id="{D461BD14-0FE5-6DC5-BA6D-6EB04EDAFA22}"/>
+                <a16:creationId xmlns:a16="http://schemas.microsoft.com/office/drawing/2014/main" id="{22877BF3-B2AB-BC1D-0D44-905DEEA2F5CB}"/>
               </a:ext>
             </a:extLst>
           </p:cNvPr>
@@ -10745,10 +12154,338 @@
           </a:prstGeom>
         </p:spPr>
       </p:pic>
+      <p:pic>
+        <p:nvPicPr>
+          <p:cNvPr id="2" name="Picture 1" descr="450808d6-f018-4170-8863-633347777b52.png">
+            <a:extLst>
+              <a:ext uri="{FF2B5EF4-FFF2-40B4-BE49-F238E27FC236}">
+                <a16:creationId xmlns:a16="http://schemas.microsoft.com/office/drawing/2014/main" id="{5ACEC5FF-ADF4-E630-4A6A-6B7DC2D61791}"/>
+              </a:ext>
+            </a:extLst>
+          </p:cNvPr>
+          <p:cNvPicPr>
+            <a:picLocks noChangeAspect="1"/>
+          </p:cNvPicPr>
+          <p:nvPr/>
+        </p:nvPicPr>
+        <p:blipFill>
+          <a:blip r:embed="rId2"/>
+          <a:stretch>
+            <a:fillRect/>
+          </a:stretch>
+        </p:blipFill>
+        <p:spPr>
+          <a:xfrm>
+            <a:off x="0" y="0"/>
+            <a:ext cx="9144000" cy="6858000"/>
+          </a:xfrm>
+          <a:prstGeom prst="rect">
+            <a:avLst/>
+          </a:prstGeom>
+        </p:spPr>
+      </p:pic>
+      <p:pic>
+        <p:nvPicPr>
+          <p:cNvPr id="3" name="Picture 2">
+            <a:extLst>
+              <a:ext uri="{FF2B5EF4-FFF2-40B4-BE49-F238E27FC236}">
+                <a16:creationId xmlns:a16="http://schemas.microsoft.com/office/drawing/2014/main" id="{461603B3-98C1-7195-F843-BA59F7B697F2}"/>
+              </a:ext>
+            </a:extLst>
+          </p:cNvPr>
+          <p:cNvPicPr>
+            <a:picLocks noChangeAspect="1"/>
+          </p:cNvPicPr>
+          <p:nvPr/>
+        </p:nvPicPr>
+        <p:blipFill>
+          <a:blip r:embed="rId3"/>
+          <a:stretch>
+            <a:fillRect/>
+          </a:stretch>
+        </p:blipFill>
+        <p:spPr>
+          <a:xfrm>
+            <a:off x="7315200" y="6114831"/>
+            <a:ext cx="1708662" cy="632838"/>
+          </a:xfrm>
+          <a:prstGeom prst="rect">
+            <a:avLst/>
+          </a:prstGeom>
+        </p:spPr>
+      </p:pic>
+      <p:sp>
+        <p:nvSpPr>
+          <p:cNvPr id="5" name="TextBox 4">
+            <a:extLst>
+              <a:ext uri="{FF2B5EF4-FFF2-40B4-BE49-F238E27FC236}">
+                <a16:creationId xmlns:a16="http://schemas.microsoft.com/office/drawing/2014/main" id="{F1FEE482-FE79-534B-85A2-2291117DC5FE}"/>
+              </a:ext>
+            </a:extLst>
+          </p:cNvPr>
+          <p:cNvSpPr txBox="1"/>
+          <p:nvPr/>
+        </p:nvSpPr>
+        <p:spPr>
+          <a:xfrm>
+            <a:off x="1143000" y="673104"/>
+            <a:ext cx="6858000" cy="6494085"/>
+          </a:xfrm>
+          <a:prstGeom prst="rect">
+            <a:avLst/>
+          </a:prstGeom>
+          <a:noFill/>
+        </p:spPr>
+        <p:txBody>
+          <a:bodyPr wrap="square">
+            <a:spAutoFit/>
+          </a:bodyPr>
+          <a:lstStyle/>
+          <a:p>
+            <a:endParaRPr lang="en-US" sz="1600" dirty="0"/>
+          </a:p>
+          <a:p>
+            <a:pPr>
+              <a:defRPr sz="2000"/>
+            </a:pPr>
+            <a:r>
+              <a:rPr lang="en-US" sz="1600" dirty="0"/>
+              <a:t>🔹 The Decoder generates the output sentence one word at a time.</a:t>
+            </a:r>
+          </a:p>
+          <a:p>
+            <a:pPr>
+              <a:defRPr sz="2000"/>
+            </a:pPr>
+            <a:endParaRPr lang="en-US" sz="1600" dirty="0"/>
+          </a:p>
+          <a:p>
+            <a:pPr>
+              <a:defRPr sz="2000"/>
+            </a:pPr>
+            <a:r>
+              <a:rPr lang="en-US" sz="1600" dirty="0"/>
+              <a:t>👉 **Shifted Output Input**</a:t>
+            </a:r>
+          </a:p>
+          <a:p>
+            <a:pPr>
+              <a:defRPr sz="2000"/>
+            </a:pPr>
+            <a:r>
+              <a:rPr lang="en-US" sz="1600" dirty="0"/>
+              <a:t>   - During training, the decoder sees previous words</a:t>
+            </a:r>
+          </a:p>
+          <a:p>
+            <a:pPr>
+              <a:defRPr sz="2000"/>
+            </a:pPr>
+            <a:r>
+              <a:rPr lang="en-US" sz="1600" dirty="0"/>
+              <a:t>     (shifted right) to predict the next one.</a:t>
+            </a:r>
+          </a:p>
+          <a:p>
+            <a:pPr>
+              <a:defRPr sz="2000"/>
+            </a:pPr>
+            <a:endParaRPr lang="en-US" sz="1600" dirty="0"/>
+          </a:p>
+          <a:p>
+            <a:pPr>
+              <a:defRPr sz="2000"/>
+            </a:pPr>
+            <a:r>
+              <a:rPr lang="en-US" sz="1600" dirty="0"/>
+              <a:t>👉 **Masked Self-Attention**</a:t>
+            </a:r>
+          </a:p>
+          <a:p>
+            <a:pPr>
+              <a:defRPr sz="2000"/>
+            </a:pPr>
+            <a:r>
+              <a:rPr lang="en-US" sz="1600" dirty="0"/>
+              <a:t>   - Prevents the decoder from seeing future words.</a:t>
+            </a:r>
+          </a:p>
+          <a:p>
+            <a:pPr>
+              <a:defRPr sz="2000"/>
+            </a:pPr>
+            <a:r>
+              <a:rPr lang="en-US" sz="1600" dirty="0"/>
+              <a:t>   - Ensures prediction happens step-by-step.</a:t>
+            </a:r>
+          </a:p>
+          <a:p>
+            <a:pPr>
+              <a:defRPr sz="2000"/>
+            </a:pPr>
+            <a:endParaRPr lang="en-US" sz="1600" dirty="0"/>
+          </a:p>
+          <a:p>
+            <a:pPr>
+              <a:defRPr sz="2000"/>
+            </a:pPr>
+            <a:r>
+              <a:rPr lang="en-US" sz="1600" dirty="0"/>
+              <a:t>👉 **Encoder–Decoder Attention**</a:t>
+            </a:r>
+          </a:p>
+          <a:p>
+            <a:pPr>
+              <a:defRPr sz="2000"/>
+            </a:pPr>
+            <a:r>
+              <a:rPr lang="en-US" sz="1600" dirty="0"/>
+              <a:t>   - Decoder looks back at the encoder’s understanding.</a:t>
+            </a:r>
+          </a:p>
+          <a:p>
+            <a:pPr>
+              <a:defRPr sz="2000"/>
+            </a:pPr>
+            <a:r>
+              <a:rPr lang="en-US" sz="1600" dirty="0"/>
+              <a:t>   - Example: When generating a translation, it attends to relevant</a:t>
+            </a:r>
+          </a:p>
+          <a:p>
+            <a:pPr>
+              <a:defRPr sz="2000"/>
+            </a:pPr>
+            <a:r>
+              <a:rPr lang="en-US" sz="1600" dirty="0"/>
+              <a:t>     parts of the input sentence.</a:t>
+            </a:r>
+          </a:p>
+          <a:p>
+            <a:pPr>
+              <a:defRPr sz="2000"/>
+            </a:pPr>
+            <a:endParaRPr lang="en-US" sz="1600" dirty="0"/>
+          </a:p>
+          <a:p>
+            <a:pPr>
+              <a:defRPr sz="2000"/>
+            </a:pPr>
+            <a:r>
+              <a:rPr lang="en-US" sz="1600" dirty="0"/>
+              <a:t>👉 **Feed Forward Network**</a:t>
+            </a:r>
+          </a:p>
+          <a:p>
+            <a:pPr>
+              <a:defRPr sz="2000"/>
+            </a:pPr>
+            <a:r>
+              <a:rPr lang="en-US" sz="1600" dirty="0"/>
+              <a:t>   - Adds more processing before final prediction.</a:t>
+            </a:r>
+          </a:p>
+          <a:p>
+            <a:pPr>
+              <a:defRPr sz="2000"/>
+            </a:pPr>
+            <a:endParaRPr lang="en-US" sz="1600" dirty="0"/>
+          </a:p>
+          <a:p>
+            <a:pPr>
+              <a:defRPr sz="2000"/>
+            </a:pPr>
+            <a:r>
+              <a:rPr lang="en-US" sz="1600" dirty="0"/>
+              <a:t>👉 **Linear + </a:t>
+            </a:r>
+            <a:r>
+              <a:rPr lang="en-US" sz="1600" dirty="0" err="1"/>
+              <a:t>Softmax</a:t>
+            </a:r>
+            <a:r>
+              <a:rPr lang="en-US" sz="1600" dirty="0"/>
+              <a:t>**</a:t>
+            </a:r>
+          </a:p>
+          <a:p>
+            <a:pPr>
+              <a:defRPr sz="2000"/>
+            </a:pPr>
+            <a:r>
+              <a:rPr lang="en-US" sz="1600" dirty="0"/>
+              <a:t>   - Converts the decoder output into word probabilities.</a:t>
+            </a:r>
+          </a:p>
+          <a:p>
+            <a:pPr>
+              <a:defRPr sz="2000"/>
+            </a:pPr>
+            <a:r>
+              <a:rPr lang="en-US" sz="1600" dirty="0"/>
+              <a:t>   - Highest probability word becomes the model’s next output.</a:t>
+            </a:r>
+          </a:p>
+          <a:p>
+            <a:pPr>
+              <a:defRPr sz="2000"/>
+            </a:pPr>
+            <a:endParaRPr lang="en-US" sz="1600" dirty="0"/>
+          </a:p>
+          <a:p>
+            <a:pPr>
+              <a:defRPr sz="2000"/>
+            </a:pPr>
+            <a:r>
+              <a:rPr lang="en-US" sz="1600" dirty="0"/>
+              <a:t>⭐ Summary: Decoder = step-by-step generation based on context + encoder info.</a:t>
+            </a:r>
+          </a:p>
+          <a:p>
+            <a:endParaRPr lang="en-US" sz="1600" dirty="0"/>
+          </a:p>
+        </p:txBody>
+      </p:sp>
+      <p:sp>
+        <p:nvSpPr>
+          <p:cNvPr id="6" name="TextBox 5">
+            <a:extLst>
+              <a:ext uri="{FF2B5EF4-FFF2-40B4-BE49-F238E27FC236}">
+                <a16:creationId xmlns:a16="http://schemas.microsoft.com/office/drawing/2014/main" id="{7B4696ED-5969-029A-C1E7-F54D9E99BA70}"/>
+              </a:ext>
+            </a:extLst>
+          </p:cNvPr>
+          <p:cNvSpPr txBox="1"/>
+          <p:nvPr/>
+        </p:nvSpPr>
+        <p:spPr>
+          <a:xfrm>
+            <a:off x="2178462" y="137652"/>
+            <a:ext cx="4432625" cy="584775"/>
+          </a:xfrm>
+          <a:prstGeom prst="rect">
+            <a:avLst/>
+          </a:prstGeom>
+          <a:noFill/>
+        </p:spPr>
+        <p:txBody>
+          <a:bodyPr wrap="none" rtlCol="0">
+            <a:spAutoFit/>
+          </a:bodyPr>
+          <a:lstStyle/>
+          <a:p>
+            <a:pPr algn="ctr"/>
+            <a:r>
+              <a:rPr lang="en-US" sz="3200" dirty="0"/>
+              <a:t>Transformer Architecture</a:t>
+            </a:r>
+          </a:p>
+        </p:txBody>
+      </p:sp>
     </p:spTree>
     <p:extLst>
       <p:ext uri="{BB962C8B-B14F-4D97-AF65-F5344CB8AC3E}">
-        <p14:creationId xmlns:p14="http://schemas.microsoft.com/office/powerpoint/2010/main" val="1168027374"/>
+        <p14:creationId xmlns:p14="http://schemas.microsoft.com/office/powerpoint/2010/main" val="3758762786"/>
       </p:ext>
     </p:extLst>
   </p:cSld>
@@ -10766,7 +12503,7 @@
         <p:cNvPr id="1" name="">
           <a:extLst>
             <a:ext uri="{FF2B5EF4-FFF2-40B4-BE49-F238E27FC236}">
-              <a16:creationId xmlns:a16="http://schemas.microsoft.com/office/drawing/2014/main" id="{F0880F1E-5F93-3B45-1DFC-0599D8E97212}"/>
+              <a16:creationId xmlns:a16="http://schemas.microsoft.com/office/drawing/2014/main" id="{EA885016-6409-6E13-EECB-523A030EAA15}"/>
             </a:ext>
           </a:extLst>
         </p:cNvPr>
@@ -10786,7 +12523,7 @@
           <p:cNvPr id="4" name="Picture 3" descr="450808d6-f018-4170-8863-633347777b52.png">
             <a:extLst>
               <a:ext uri="{FF2B5EF4-FFF2-40B4-BE49-F238E27FC236}">
-                <a16:creationId xmlns:a16="http://schemas.microsoft.com/office/drawing/2014/main" id="{21109BF3-6ADF-AB01-AA3D-B9931E0093F3}"/>
+                <a16:creationId xmlns:a16="http://schemas.microsoft.com/office/drawing/2014/main" id="{09930E3B-ED7D-BEE7-DF64-ADB2C58C647C}"/>
               </a:ext>
             </a:extLst>
           </p:cNvPr>
@@ -10816,7 +12553,7 @@
           <p:cNvPr id="8" name="Picture 7">
             <a:extLst>
               <a:ext uri="{FF2B5EF4-FFF2-40B4-BE49-F238E27FC236}">
-                <a16:creationId xmlns:a16="http://schemas.microsoft.com/office/drawing/2014/main" id="{E6F95899-0FDD-4B96-54AB-D9AB7079BBD8}"/>
+                <a16:creationId xmlns:a16="http://schemas.microsoft.com/office/drawing/2014/main" id="{63B6DEDB-3FA0-DF6E-F29F-03B189BD8590}"/>
               </a:ext>
             </a:extLst>
           </p:cNvPr>
@@ -10841,10 +12578,308 @@
           </a:prstGeom>
         </p:spPr>
       </p:pic>
+      <p:pic>
+        <p:nvPicPr>
+          <p:cNvPr id="3" name="Picture 2">
+            <a:extLst>
+              <a:ext uri="{FF2B5EF4-FFF2-40B4-BE49-F238E27FC236}">
+                <a16:creationId xmlns:a16="http://schemas.microsoft.com/office/drawing/2014/main" id="{20103F2E-800E-4964-29D5-F2ECC1036289}"/>
+              </a:ext>
+            </a:extLst>
+          </p:cNvPr>
+          <p:cNvPicPr>
+            <a:picLocks noChangeAspect="1"/>
+          </p:cNvPicPr>
+          <p:nvPr/>
+        </p:nvPicPr>
+        <p:blipFill>
+          <a:blip r:embed="rId3"/>
+          <a:stretch>
+            <a:fillRect/>
+          </a:stretch>
+        </p:blipFill>
+        <p:spPr>
+          <a:xfrm>
+            <a:off x="7315200" y="6114831"/>
+            <a:ext cx="1708662" cy="632838"/>
+          </a:xfrm>
+          <a:prstGeom prst="rect">
+            <a:avLst/>
+          </a:prstGeom>
+        </p:spPr>
+      </p:pic>
+      <p:sp>
+        <p:nvSpPr>
+          <p:cNvPr id="14" name="TextBox 13">
+            <a:extLst>
+              <a:ext uri="{FF2B5EF4-FFF2-40B4-BE49-F238E27FC236}">
+                <a16:creationId xmlns:a16="http://schemas.microsoft.com/office/drawing/2014/main" id="{06D3906A-CE00-000A-FFE1-C22DC4DF3428}"/>
+              </a:ext>
+            </a:extLst>
+          </p:cNvPr>
+          <p:cNvSpPr txBox="1"/>
+          <p:nvPr/>
+        </p:nvSpPr>
+        <p:spPr>
+          <a:xfrm>
+            <a:off x="1295400" y="675029"/>
+            <a:ext cx="6858000" cy="6494085"/>
+          </a:xfrm>
+          <a:prstGeom prst="rect">
+            <a:avLst/>
+          </a:prstGeom>
+          <a:noFill/>
+        </p:spPr>
+        <p:txBody>
+          <a:bodyPr wrap="square">
+            <a:spAutoFit/>
+          </a:bodyPr>
+          <a:lstStyle/>
+          <a:p>
+            <a:endParaRPr lang="en-US" sz="1600" dirty="0"/>
+          </a:p>
+          <a:p>
+            <a:pPr>
+              <a:defRPr sz="2000"/>
+            </a:pPr>
+            <a:r>
+              <a:rPr lang="en-US" sz="1600" dirty="0"/>
+              <a:t>🔹 The Decoder generates the output sentence one word at a time.</a:t>
+            </a:r>
+          </a:p>
+          <a:p>
+            <a:pPr>
+              <a:defRPr sz="2000"/>
+            </a:pPr>
+            <a:endParaRPr lang="en-US" sz="1600" dirty="0"/>
+          </a:p>
+          <a:p>
+            <a:pPr>
+              <a:defRPr sz="2000"/>
+            </a:pPr>
+            <a:r>
+              <a:rPr lang="en-US" sz="1600" dirty="0"/>
+              <a:t>👉 **Shifted Output Input**</a:t>
+            </a:r>
+          </a:p>
+          <a:p>
+            <a:pPr>
+              <a:defRPr sz="2000"/>
+            </a:pPr>
+            <a:r>
+              <a:rPr lang="en-US" sz="1600" dirty="0"/>
+              <a:t>   - During training, the decoder sees previous words</a:t>
+            </a:r>
+          </a:p>
+          <a:p>
+            <a:pPr>
+              <a:defRPr sz="2000"/>
+            </a:pPr>
+            <a:r>
+              <a:rPr lang="en-US" sz="1600" dirty="0"/>
+              <a:t>     (shifted right) to predict the next one.</a:t>
+            </a:r>
+          </a:p>
+          <a:p>
+            <a:pPr>
+              <a:defRPr sz="2000"/>
+            </a:pPr>
+            <a:endParaRPr lang="en-US" sz="1600" dirty="0"/>
+          </a:p>
+          <a:p>
+            <a:pPr>
+              <a:defRPr sz="2000"/>
+            </a:pPr>
+            <a:r>
+              <a:rPr lang="en-US" sz="1600" dirty="0"/>
+              <a:t>👉 **Masked Self-Attention**</a:t>
+            </a:r>
+          </a:p>
+          <a:p>
+            <a:pPr>
+              <a:defRPr sz="2000"/>
+            </a:pPr>
+            <a:r>
+              <a:rPr lang="en-US" sz="1600" dirty="0"/>
+              <a:t>   - Prevents the decoder from seeing future words.</a:t>
+            </a:r>
+          </a:p>
+          <a:p>
+            <a:pPr>
+              <a:defRPr sz="2000"/>
+            </a:pPr>
+            <a:r>
+              <a:rPr lang="en-US" sz="1600" dirty="0"/>
+              <a:t>   - Ensures prediction happens step-by-step.</a:t>
+            </a:r>
+          </a:p>
+          <a:p>
+            <a:pPr>
+              <a:defRPr sz="2000"/>
+            </a:pPr>
+            <a:endParaRPr lang="en-US" sz="1600" dirty="0"/>
+          </a:p>
+          <a:p>
+            <a:pPr>
+              <a:defRPr sz="2000"/>
+            </a:pPr>
+            <a:r>
+              <a:rPr lang="en-US" sz="1600" dirty="0"/>
+              <a:t>👉 **Encoder–Decoder Attention**</a:t>
+            </a:r>
+          </a:p>
+          <a:p>
+            <a:pPr>
+              <a:defRPr sz="2000"/>
+            </a:pPr>
+            <a:r>
+              <a:rPr lang="en-US" sz="1600" dirty="0"/>
+              <a:t>   - Decoder looks back at the encoder’s understanding.</a:t>
+            </a:r>
+          </a:p>
+          <a:p>
+            <a:pPr>
+              <a:defRPr sz="2000"/>
+            </a:pPr>
+            <a:r>
+              <a:rPr lang="en-US" sz="1600" dirty="0"/>
+              <a:t>   - Example: When generating a translation, it attends to relevant</a:t>
+            </a:r>
+          </a:p>
+          <a:p>
+            <a:pPr>
+              <a:defRPr sz="2000"/>
+            </a:pPr>
+            <a:r>
+              <a:rPr lang="en-US" sz="1600" dirty="0"/>
+              <a:t>     parts of the input sentence.</a:t>
+            </a:r>
+          </a:p>
+          <a:p>
+            <a:pPr>
+              <a:defRPr sz="2000"/>
+            </a:pPr>
+            <a:endParaRPr lang="en-US" sz="1600" dirty="0"/>
+          </a:p>
+          <a:p>
+            <a:pPr>
+              <a:defRPr sz="2000"/>
+            </a:pPr>
+            <a:r>
+              <a:rPr lang="en-US" sz="1600" dirty="0"/>
+              <a:t>👉 **Feed Forward Network**</a:t>
+            </a:r>
+          </a:p>
+          <a:p>
+            <a:pPr>
+              <a:defRPr sz="2000"/>
+            </a:pPr>
+            <a:r>
+              <a:rPr lang="en-US" sz="1600" dirty="0"/>
+              <a:t>   - Adds more processing before final prediction.</a:t>
+            </a:r>
+          </a:p>
+          <a:p>
+            <a:pPr>
+              <a:defRPr sz="2000"/>
+            </a:pPr>
+            <a:endParaRPr lang="en-US" sz="1600" dirty="0"/>
+          </a:p>
+          <a:p>
+            <a:pPr>
+              <a:defRPr sz="2000"/>
+            </a:pPr>
+            <a:r>
+              <a:rPr lang="en-US" sz="1600" dirty="0"/>
+              <a:t>👉 **Linear + </a:t>
+            </a:r>
+            <a:r>
+              <a:rPr lang="en-US" sz="1600" dirty="0" err="1"/>
+              <a:t>Softmax</a:t>
+            </a:r>
+            <a:r>
+              <a:rPr lang="en-US" sz="1600" dirty="0"/>
+              <a:t>**</a:t>
+            </a:r>
+          </a:p>
+          <a:p>
+            <a:pPr>
+              <a:defRPr sz="2000"/>
+            </a:pPr>
+            <a:r>
+              <a:rPr lang="en-US" sz="1600" dirty="0"/>
+              <a:t>   - Converts the decoder output into word probabilities.</a:t>
+            </a:r>
+          </a:p>
+          <a:p>
+            <a:pPr>
+              <a:defRPr sz="2000"/>
+            </a:pPr>
+            <a:r>
+              <a:rPr lang="en-US" sz="1600" dirty="0"/>
+              <a:t>   - Highest probability word becomes the model’s next output.</a:t>
+            </a:r>
+          </a:p>
+          <a:p>
+            <a:pPr>
+              <a:defRPr sz="2000"/>
+            </a:pPr>
+            <a:endParaRPr lang="en-US" sz="1600" dirty="0"/>
+          </a:p>
+          <a:p>
+            <a:pPr>
+              <a:defRPr sz="2000"/>
+            </a:pPr>
+            <a:r>
+              <a:rPr lang="en-US" sz="1600" dirty="0"/>
+              <a:t>⭐ Summary: Decoder = step-by-step generation based on context + encoder info.</a:t>
+            </a:r>
+          </a:p>
+          <a:p>
+            <a:endParaRPr lang="en-US" sz="1600" dirty="0"/>
+          </a:p>
+        </p:txBody>
+      </p:sp>
+      <p:sp>
+        <p:nvSpPr>
+          <p:cNvPr id="15" name="TextBox 14">
+            <a:extLst>
+              <a:ext uri="{FF2B5EF4-FFF2-40B4-BE49-F238E27FC236}">
+                <a16:creationId xmlns:a16="http://schemas.microsoft.com/office/drawing/2014/main" id="{17B4C7AB-C5A4-8DDE-5A00-E86A8F1D29D3}"/>
+              </a:ext>
+            </a:extLst>
+          </p:cNvPr>
+          <p:cNvSpPr txBox="1"/>
+          <p:nvPr/>
+        </p:nvSpPr>
+        <p:spPr>
+          <a:xfrm>
+            <a:off x="2330862" y="290052"/>
+            <a:ext cx="4432625" cy="584775"/>
+          </a:xfrm>
+          <a:prstGeom prst="rect">
+            <a:avLst/>
+          </a:prstGeom>
+          <a:noFill/>
+        </p:spPr>
+        <p:txBody>
+          <a:bodyPr wrap="none" rtlCol="0">
+            <a:spAutoFit/>
+          </a:bodyPr>
+          <a:lstStyle/>
+          <a:p>
+            <a:pPr algn="ctr"/>
+            <a:r>
+              <a:rPr lang="en-US" sz="3200" dirty="0"/>
+              <a:t>Transformer Architecture</a:t>
+            </a:r>
+          </a:p>
+        </p:txBody>
+      </p:sp>
     </p:spTree>
     <p:extLst>
       <p:ext uri="{BB962C8B-B14F-4D97-AF65-F5344CB8AC3E}">
-        <p14:creationId xmlns:p14="http://schemas.microsoft.com/office/powerpoint/2010/main" val="2230744344"/>
+        <p14:creationId xmlns:p14="http://schemas.microsoft.com/office/powerpoint/2010/main" val="3495389773"/>
       </p:ext>
     </p:extLst>
   </p:cSld>
@@ -10862,7 +12897,7 @@
         <p:cNvPr id="1" name="">
           <a:extLst>
             <a:ext uri="{FF2B5EF4-FFF2-40B4-BE49-F238E27FC236}">
-              <a16:creationId xmlns:a16="http://schemas.microsoft.com/office/drawing/2014/main" id="{CE12E005-DD0D-44A9-F67E-FD7831ADB506}"/>
+              <a16:creationId xmlns:a16="http://schemas.microsoft.com/office/drawing/2014/main" id="{AFCA15F1-D29E-941C-B56D-FC3E5217A939}"/>
             </a:ext>
           </a:extLst>
         </p:cNvPr>
@@ -10882,7 +12917,7 @@
           <p:cNvPr id="4" name="Picture 3" descr="450808d6-f018-4170-8863-633347777b52.png">
             <a:extLst>
               <a:ext uri="{FF2B5EF4-FFF2-40B4-BE49-F238E27FC236}">
-                <a16:creationId xmlns:a16="http://schemas.microsoft.com/office/drawing/2014/main" id="{C7015D7B-DF3E-CCAF-0393-92025F5CC07A}"/>
+                <a16:creationId xmlns:a16="http://schemas.microsoft.com/office/drawing/2014/main" id="{58EE5AB5-ABDB-5D30-65FA-3014375CF0BA}"/>
               </a:ext>
             </a:extLst>
           </p:cNvPr>
@@ -10912,7 +12947,7 @@
           <p:cNvPr id="8" name="Picture 7">
             <a:extLst>
               <a:ext uri="{FF2B5EF4-FFF2-40B4-BE49-F238E27FC236}">
-                <a16:creationId xmlns:a16="http://schemas.microsoft.com/office/drawing/2014/main" id="{1221C1F3-622C-3C3E-7DCF-5A81727DD5EE}"/>
+                <a16:creationId xmlns:a16="http://schemas.microsoft.com/office/drawing/2014/main" id="{177639E6-4088-00E4-87A3-19259A3E7160}"/>
               </a:ext>
             </a:extLst>
           </p:cNvPr>
@@ -10940,7 +12975,679 @@
     </p:spTree>
     <p:extLst>
       <p:ext uri="{BB962C8B-B14F-4D97-AF65-F5344CB8AC3E}">
-        <p14:creationId xmlns:p14="http://schemas.microsoft.com/office/powerpoint/2010/main" val="4064948346"/>
+        <p14:creationId xmlns:p14="http://schemas.microsoft.com/office/powerpoint/2010/main" val="947805118"/>
+      </p:ext>
+    </p:extLst>
+  </p:cSld>
+  <p:clrMapOvr>
+    <a:masterClrMapping/>
+  </p:clrMapOvr>
+</p:sld>
+</file>
+
+<file path=ppt/slides/slide43.xml><?xml version="1.0" encoding="utf-8"?>
+<p:sld xmlns:a="http://schemas.openxmlformats.org/drawingml/2006/main" xmlns:r="http://schemas.openxmlformats.org/officeDocument/2006/relationships" xmlns:p="http://schemas.openxmlformats.org/presentationml/2006/main">
+  <p:cSld>
+    <p:spTree>
+      <p:nvGrpSpPr>
+        <p:cNvPr id="1" name="">
+          <a:extLst>
+            <a:ext uri="{FF2B5EF4-FFF2-40B4-BE49-F238E27FC236}">
+              <a16:creationId xmlns:a16="http://schemas.microsoft.com/office/drawing/2014/main" id="{5C021597-35A1-0257-CFC6-9C1BFF6BBE98}"/>
+            </a:ext>
+          </a:extLst>
+        </p:cNvPr>
+        <p:cNvGrpSpPr/>
+        <p:nvPr/>
+      </p:nvGrpSpPr>
+      <p:grpSpPr>
+        <a:xfrm>
+          <a:off x="0" y="0"/>
+          <a:ext cx="0" cy="0"/>
+          <a:chOff x="0" y="0"/>
+          <a:chExt cx="0" cy="0"/>
+        </a:xfrm>
+      </p:grpSpPr>
+      <p:pic>
+        <p:nvPicPr>
+          <p:cNvPr id="4" name="Picture 3" descr="450808d6-f018-4170-8863-633347777b52.png">
+            <a:extLst>
+              <a:ext uri="{FF2B5EF4-FFF2-40B4-BE49-F238E27FC236}">
+                <a16:creationId xmlns:a16="http://schemas.microsoft.com/office/drawing/2014/main" id="{D7698F4F-7C6B-F599-449B-15F0A2AE2CC6}"/>
+              </a:ext>
+            </a:extLst>
+          </p:cNvPr>
+          <p:cNvPicPr>
+            <a:picLocks noChangeAspect="1"/>
+          </p:cNvPicPr>
+          <p:nvPr/>
+        </p:nvPicPr>
+        <p:blipFill>
+          <a:blip r:embed="rId2"/>
+          <a:stretch>
+            <a:fillRect/>
+          </a:stretch>
+        </p:blipFill>
+        <p:spPr>
+          <a:xfrm>
+            <a:off x="0" y="0"/>
+            <a:ext cx="9144000" cy="6858000"/>
+          </a:xfrm>
+          <a:prstGeom prst="rect">
+            <a:avLst/>
+          </a:prstGeom>
+        </p:spPr>
+      </p:pic>
+      <p:pic>
+        <p:nvPicPr>
+          <p:cNvPr id="8" name="Picture 7">
+            <a:extLst>
+              <a:ext uri="{FF2B5EF4-FFF2-40B4-BE49-F238E27FC236}">
+                <a16:creationId xmlns:a16="http://schemas.microsoft.com/office/drawing/2014/main" id="{BABD7E1F-8D61-5DCE-603D-E1627CA3BE0D}"/>
+              </a:ext>
+            </a:extLst>
+          </p:cNvPr>
+          <p:cNvPicPr>
+            <a:picLocks noChangeAspect="1"/>
+          </p:cNvPicPr>
+          <p:nvPr/>
+        </p:nvPicPr>
+        <p:blipFill>
+          <a:blip r:embed="rId3"/>
+          <a:stretch>
+            <a:fillRect/>
+          </a:stretch>
+        </p:blipFill>
+        <p:spPr>
+          <a:xfrm>
+            <a:off x="7315200" y="6114831"/>
+            <a:ext cx="1708662" cy="632838"/>
+          </a:xfrm>
+          <a:prstGeom prst="rect">
+            <a:avLst/>
+          </a:prstGeom>
+        </p:spPr>
+      </p:pic>
+    </p:spTree>
+    <p:extLst>
+      <p:ext uri="{BB962C8B-B14F-4D97-AF65-F5344CB8AC3E}">
+        <p14:creationId xmlns:p14="http://schemas.microsoft.com/office/powerpoint/2010/main" val="397282995"/>
+      </p:ext>
+    </p:extLst>
+  </p:cSld>
+  <p:clrMapOvr>
+    <a:masterClrMapping/>
+  </p:clrMapOvr>
+</p:sld>
+</file>
+
+<file path=ppt/slides/slide44.xml><?xml version="1.0" encoding="utf-8"?>
+<p:sld xmlns:a="http://schemas.openxmlformats.org/drawingml/2006/main" xmlns:r="http://schemas.openxmlformats.org/officeDocument/2006/relationships" xmlns:p="http://schemas.openxmlformats.org/presentationml/2006/main">
+  <p:cSld>
+    <p:spTree>
+      <p:nvGrpSpPr>
+        <p:cNvPr id="1" name="">
+          <a:extLst>
+            <a:ext uri="{FF2B5EF4-FFF2-40B4-BE49-F238E27FC236}">
+              <a16:creationId xmlns:a16="http://schemas.microsoft.com/office/drawing/2014/main" id="{5E9360C9-E8B7-E1B7-45C2-4DDBE07D0DBE}"/>
+            </a:ext>
+          </a:extLst>
+        </p:cNvPr>
+        <p:cNvGrpSpPr/>
+        <p:nvPr/>
+      </p:nvGrpSpPr>
+      <p:grpSpPr>
+        <a:xfrm>
+          <a:off x="0" y="0"/>
+          <a:ext cx="0" cy="0"/>
+          <a:chOff x="0" y="0"/>
+          <a:chExt cx="0" cy="0"/>
+        </a:xfrm>
+      </p:grpSpPr>
+      <p:pic>
+        <p:nvPicPr>
+          <p:cNvPr id="4" name="Picture 3" descr="450808d6-f018-4170-8863-633347777b52.png">
+            <a:extLst>
+              <a:ext uri="{FF2B5EF4-FFF2-40B4-BE49-F238E27FC236}">
+                <a16:creationId xmlns:a16="http://schemas.microsoft.com/office/drawing/2014/main" id="{C57C3DB7-A80C-202F-ABE1-B08FCDE81B44}"/>
+              </a:ext>
+            </a:extLst>
+          </p:cNvPr>
+          <p:cNvPicPr>
+            <a:picLocks noChangeAspect="1"/>
+          </p:cNvPicPr>
+          <p:nvPr/>
+        </p:nvPicPr>
+        <p:blipFill>
+          <a:blip r:embed="rId2"/>
+          <a:stretch>
+            <a:fillRect/>
+          </a:stretch>
+        </p:blipFill>
+        <p:spPr>
+          <a:xfrm>
+            <a:off x="0" y="0"/>
+            <a:ext cx="9144000" cy="6858000"/>
+          </a:xfrm>
+          <a:prstGeom prst="rect">
+            <a:avLst/>
+          </a:prstGeom>
+        </p:spPr>
+      </p:pic>
+      <p:pic>
+        <p:nvPicPr>
+          <p:cNvPr id="8" name="Picture 7">
+            <a:extLst>
+              <a:ext uri="{FF2B5EF4-FFF2-40B4-BE49-F238E27FC236}">
+                <a16:creationId xmlns:a16="http://schemas.microsoft.com/office/drawing/2014/main" id="{8C52ABAD-A9E5-7BB2-A013-D5A2C6CEE136}"/>
+              </a:ext>
+            </a:extLst>
+          </p:cNvPr>
+          <p:cNvPicPr>
+            <a:picLocks noChangeAspect="1"/>
+          </p:cNvPicPr>
+          <p:nvPr/>
+        </p:nvPicPr>
+        <p:blipFill>
+          <a:blip r:embed="rId3"/>
+          <a:stretch>
+            <a:fillRect/>
+          </a:stretch>
+        </p:blipFill>
+        <p:spPr>
+          <a:xfrm>
+            <a:off x="7315200" y="6114831"/>
+            <a:ext cx="1708662" cy="632838"/>
+          </a:xfrm>
+          <a:prstGeom prst="rect">
+            <a:avLst/>
+          </a:prstGeom>
+        </p:spPr>
+      </p:pic>
+    </p:spTree>
+    <p:extLst>
+      <p:ext uri="{BB962C8B-B14F-4D97-AF65-F5344CB8AC3E}">
+        <p14:creationId xmlns:p14="http://schemas.microsoft.com/office/powerpoint/2010/main" val="2953360885"/>
+      </p:ext>
+    </p:extLst>
+  </p:cSld>
+  <p:clrMapOvr>
+    <a:masterClrMapping/>
+  </p:clrMapOvr>
+</p:sld>
+</file>
+
+<file path=ppt/slides/slide45.xml><?xml version="1.0" encoding="utf-8"?>
+<p:sld xmlns:a="http://schemas.openxmlformats.org/drawingml/2006/main" xmlns:r="http://schemas.openxmlformats.org/officeDocument/2006/relationships" xmlns:p="http://schemas.openxmlformats.org/presentationml/2006/main">
+  <p:cSld>
+    <p:spTree>
+      <p:nvGrpSpPr>
+        <p:cNvPr id="1" name="">
+          <a:extLst>
+            <a:ext uri="{FF2B5EF4-FFF2-40B4-BE49-F238E27FC236}">
+              <a16:creationId xmlns:a16="http://schemas.microsoft.com/office/drawing/2014/main" id="{4BF04B8A-C07E-CEB4-A1F0-D87BE9C5C5DA}"/>
+            </a:ext>
+          </a:extLst>
+        </p:cNvPr>
+        <p:cNvGrpSpPr/>
+        <p:nvPr/>
+      </p:nvGrpSpPr>
+      <p:grpSpPr>
+        <a:xfrm>
+          <a:off x="0" y="0"/>
+          <a:ext cx="0" cy="0"/>
+          <a:chOff x="0" y="0"/>
+          <a:chExt cx="0" cy="0"/>
+        </a:xfrm>
+      </p:grpSpPr>
+      <p:pic>
+        <p:nvPicPr>
+          <p:cNvPr id="4" name="Picture 3" descr="450808d6-f018-4170-8863-633347777b52.png">
+            <a:extLst>
+              <a:ext uri="{FF2B5EF4-FFF2-40B4-BE49-F238E27FC236}">
+                <a16:creationId xmlns:a16="http://schemas.microsoft.com/office/drawing/2014/main" id="{047B16AF-5CDE-D550-AC30-E09C213D9894}"/>
+              </a:ext>
+            </a:extLst>
+          </p:cNvPr>
+          <p:cNvPicPr>
+            <a:picLocks noChangeAspect="1"/>
+          </p:cNvPicPr>
+          <p:nvPr/>
+        </p:nvPicPr>
+        <p:blipFill>
+          <a:blip r:embed="rId2"/>
+          <a:stretch>
+            <a:fillRect/>
+          </a:stretch>
+        </p:blipFill>
+        <p:spPr>
+          <a:xfrm>
+            <a:off x="0" y="0"/>
+            <a:ext cx="9144000" cy="6858000"/>
+          </a:xfrm>
+          <a:prstGeom prst="rect">
+            <a:avLst/>
+          </a:prstGeom>
+        </p:spPr>
+      </p:pic>
+      <p:pic>
+        <p:nvPicPr>
+          <p:cNvPr id="8" name="Picture 7">
+            <a:extLst>
+              <a:ext uri="{FF2B5EF4-FFF2-40B4-BE49-F238E27FC236}">
+                <a16:creationId xmlns:a16="http://schemas.microsoft.com/office/drawing/2014/main" id="{F94EAA33-02CB-B9D3-DAFD-282190BC75E3}"/>
+              </a:ext>
+            </a:extLst>
+          </p:cNvPr>
+          <p:cNvPicPr>
+            <a:picLocks noChangeAspect="1"/>
+          </p:cNvPicPr>
+          <p:nvPr/>
+        </p:nvPicPr>
+        <p:blipFill>
+          <a:blip r:embed="rId3"/>
+          <a:stretch>
+            <a:fillRect/>
+          </a:stretch>
+        </p:blipFill>
+        <p:spPr>
+          <a:xfrm>
+            <a:off x="7315200" y="6114831"/>
+            <a:ext cx="1708662" cy="632838"/>
+          </a:xfrm>
+          <a:prstGeom prst="rect">
+            <a:avLst/>
+          </a:prstGeom>
+        </p:spPr>
+      </p:pic>
+    </p:spTree>
+    <p:extLst>
+      <p:ext uri="{BB962C8B-B14F-4D97-AF65-F5344CB8AC3E}">
+        <p14:creationId xmlns:p14="http://schemas.microsoft.com/office/powerpoint/2010/main" val="2774134213"/>
+      </p:ext>
+    </p:extLst>
+  </p:cSld>
+  <p:clrMapOvr>
+    <a:masterClrMapping/>
+  </p:clrMapOvr>
+</p:sld>
+</file>
+
+<file path=ppt/slides/slide46.xml><?xml version="1.0" encoding="utf-8"?>
+<p:sld xmlns:a="http://schemas.openxmlformats.org/drawingml/2006/main" xmlns:r="http://schemas.openxmlformats.org/officeDocument/2006/relationships" xmlns:p="http://schemas.openxmlformats.org/presentationml/2006/main">
+  <p:cSld>
+    <p:spTree>
+      <p:nvGrpSpPr>
+        <p:cNvPr id="1" name="">
+          <a:extLst>
+            <a:ext uri="{FF2B5EF4-FFF2-40B4-BE49-F238E27FC236}">
+              <a16:creationId xmlns:a16="http://schemas.microsoft.com/office/drawing/2014/main" id="{97B90563-95FA-E1C1-1EAB-7195321FF4BD}"/>
+            </a:ext>
+          </a:extLst>
+        </p:cNvPr>
+        <p:cNvGrpSpPr/>
+        <p:nvPr/>
+      </p:nvGrpSpPr>
+      <p:grpSpPr>
+        <a:xfrm>
+          <a:off x="0" y="0"/>
+          <a:ext cx="0" cy="0"/>
+          <a:chOff x="0" y="0"/>
+          <a:chExt cx="0" cy="0"/>
+        </a:xfrm>
+      </p:grpSpPr>
+      <p:pic>
+        <p:nvPicPr>
+          <p:cNvPr id="4" name="Picture 3" descr="450808d6-f018-4170-8863-633347777b52.png">
+            <a:extLst>
+              <a:ext uri="{FF2B5EF4-FFF2-40B4-BE49-F238E27FC236}">
+                <a16:creationId xmlns:a16="http://schemas.microsoft.com/office/drawing/2014/main" id="{969C93C3-112E-1100-7E5A-D8EBA4C2FCAE}"/>
+              </a:ext>
+            </a:extLst>
+          </p:cNvPr>
+          <p:cNvPicPr>
+            <a:picLocks noChangeAspect="1"/>
+          </p:cNvPicPr>
+          <p:nvPr/>
+        </p:nvPicPr>
+        <p:blipFill>
+          <a:blip r:embed="rId2"/>
+          <a:stretch>
+            <a:fillRect/>
+          </a:stretch>
+        </p:blipFill>
+        <p:spPr>
+          <a:xfrm>
+            <a:off x="0" y="0"/>
+            <a:ext cx="9144000" cy="6858000"/>
+          </a:xfrm>
+          <a:prstGeom prst="rect">
+            <a:avLst/>
+          </a:prstGeom>
+        </p:spPr>
+      </p:pic>
+      <p:pic>
+        <p:nvPicPr>
+          <p:cNvPr id="8" name="Picture 7">
+            <a:extLst>
+              <a:ext uri="{FF2B5EF4-FFF2-40B4-BE49-F238E27FC236}">
+                <a16:creationId xmlns:a16="http://schemas.microsoft.com/office/drawing/2014/main" id="{B18DE8EB-797A-38CC-2FC0-4DA5B1C4E5C7}"/>
+              </a:ext>
+            </a:extLst>
+          </p:cNvPr>
+          <p:cNvPicPr>
+            <a:picLocks noChangeAspect="1"/>
+          </p:cNvPicPr>
+          <p:nvPr/>
+        </p:nvPicPr>
+        <p:blipFill>
+          <a:blip r:embed="rId3"/>
+          <a:stretch>
+            <a:fillRect/>
+          </a:stretch>
+        </p:blipFill>
+        <p:spPr>
+          <a:xfrm>
+            <a:off x="7315200" y="6114831"/>
+            <a:ext cx="1708662" cy="632838"/>
+          </a:xfrm>
+          <a:prstGeom prst="rect">
+            <a:avLst/>
+          </a:prstGeom>
+        </p:spPr>
+      </p:pic>
+    </p:spTree>
+    <p:extLst>
+      <p:ext uri="{BB962C8B-B14F-4D97-AF65-F5344CB8AC3E}">
+        <p14:creationId xmlns:p14="http://schemas.microsoft.com/office/powerpoint/2010/main" val="3194000773"/>
+      </p:ext>
+    </p:extLst>
+  </p:cSld>
+  <p:clrMapOvr>
+    <a:masterClrMapping/>
+  </p:clrMapOvr>
+</p:sld>
+</file>
+
+<file path=ppt/slides/slide47.xml><?xml version="1.0" encoding="utf-8"?>
+<p:sld xmlns:a="http://schemas.openxmlformats.org/drawingml/2006/main" xmlns:r="http://schemas.openxmlformats.org/officeDocument/2006/relationships" xmlns:p="http://schemas.openxmlformats.org/presentationml/2006/main">
+  <p:cSld>
+    <p:spTree>
+      <p:nvGrpSpPr>
+        <p:cNvPr id="1" name="">
+          <a:extLst>
+            <a:ext uri="{FF2B5EF4-FFF2-40B4-BE49-F238E27FC236}">
+              <a16:creationId xmlns:a16="http://schemas.microsoft.com/office/drawing/2014/main" id="{1EC70FE5-8681-346F-FE1D-E2ABEE0988AC}"/>
+            </a:ext>
+          </a:extLst>
+        </p:cNvPr>
+        <p:cNvGrpSpPr/>
+        <p:nvPr/>
+      </p:nvGrpSpPr>
+      <p:grpSpPr>
+        <a:xfrm>
+          <a:off x="0" y="0"/>
+          <a:ext cx="0" cy="0"/>
+          <a:chOff x="0" y="0"/>
+          <a:chExt cx="0" cy="0"/>
+        </a:xfrm>
+      </p:grpSpPr>
+      <p:pic>
+        <p:nvPicPr>
+          <p:cNvPr id="4" name="Picture 3" descr="450808d6-f018-4170-8863-633347777b52.png">
+            <a:extLst>
+              <a:ext uri="{FF2B5EF4-FFF2-40B4-BE49-F238E27FC236}">
+                <a16:creationId xmlns:a16="http://schemas.microsoft.com/office/drawing/2014/main" id="{6CB5B619-C391-0A01-5E90-525AAEF3CF05}"/>
+              </a:ext>
+            </a:extLst>
+          </p:cNvPr>
+          <p:cNvPicPr>
+            <a:picLocks noChangeAspect="1"/>
+          </p:cNvPicPr>
+          <p:nvPr/>
+        </p:nvPicPr>
+        <p:blipFill>
+          <a:blip r:embed="rId2"/>
+          <a:stretch>
+            <a:fillRect/>
+          </a:stretch>
+        </p:blipFill>
+        <p:spPr>
+          <a:xfrm>
+            <a:off x="0" y="0"/>
+            <a:ext cx="9144000" cy="6858000"/>
+          </a:xfrm>
+          <a:prstGeom prst="rect">
+            <a:avLst/>
+          </a:prstGeom>
+        </p:spPr>
+      </p:pic>
+      <p:pic>
+        <p:nvPicPr>
+          <p:cNvPr id="8" name="Picture 7">
+            <a:extLst>
+              <a:ext uri="{FF2B5EF4-FFF2-40B4-BE49-F238E27FC236}">
+                <a16:creationId xmlns:a16="http://schemas.microsoft.com/office/drawing/2014/main" id="{BEC731C2-CFCE-8342-A470-946656DF8322}"/>
+              </a:ext>
+            </a:extLst>
+          </p:cNvPr>
+          <p:cNvPicPr>
+            <a:picLocks noChangeAspect="1"/>
+          </p:cNvPicPr>
+          <p:nvPr/>
+        </p:nvPicPr>
+        <p:blipFill>
+          <a:blip r:embed="rId3"/>
+          <a:stretch>
+            <a:fillRect/>
+          </a:stretch>
+        </p:blipFill>
+        <p:spPr>
+          <a:xfrm>
+            <a:off x="7315200" y="6114831"/>
+            <a:ext cx="1708662" cy="632838"/>
+          </a:xfrm>
+          <a:prstGeom prst="rect">
+            <a:avLst/>
+          </a:prstGeom>
+        </p:spPr>
+      </p:pic>
+    </p:spTree>
+    <p:extLst>
+      <p:ext uri="{BB962C8B-B14F-4D97-AF65-F5344CB8AC3E}">
+        <p14:creationId xmlns:p14="http://schemas.microsoft.com/office/powerpoint/2010/main" val="1180437438"/>
+      </p:ext>
+    </p:extLst>
+  </p:cSld>
+  <p:clrMapOvr>
+    <a:masterClrMapping/>
+  </p:clrMapOvr>
+</p:sld>
+</file>
+
+<file path=ppt/slides/slide48.xml><?xml version="1.0" encoding="utf-8"?>
+<p:sld xmlns:a="http://schemas.openxmlformats.org/drawingml/2006/main" xmlns:r="http://schemas.openxmlformats.org/officeDocument/2006/relationships" xmlns:p="http://schemas.openxmlformats.org/presentationml/2006/main">
+  <p:cSld>
+    <p:spTree>
+      <p:nvGrpSpPr>
+        <p:cNvPr id="1" name="">
+          <a:extLst>
+            <a:ext uri="{FF2B5EF4-FFF2-40B4-BE49-F238E27FC236}">
+              <a16:creationId xmlns:a16="http://schemas.microsoft.com/office/drawing/2014/main" id="{68D3D082-4C22-36AD-C81B-FF6E9CFB0E5C}"/>
+            </a:ext>
+          </a:extLst>
+        </p:cNvPr>
+        <p:cNvGrpSpPr/>
+        <p:nvPr/>
+      </p:nvGrpSpPr>
+      <p:grpSpPr>
+        <a:xfrm>
+          <a:off x="0" y="0"/>
+          <a:ext cx="0" cy="0"/>
+          <a:chOff x="0" y="0"/>
+          <a:chExt cx="0" cy="0"/>
+        </a:xfrm>
+      </p:grpSpPr>
+      <p:pic>
+        <p:nvPicPr>
+          <p:cNvPr id="4" name="Picture 3" descr="450808d6-f018-4170-8863-633347777b52.png">
+            <a:extLst>
+              <a:ext uri="{FF2B5EF4-FFF2-40B4-BE49-F238E27FC236}">
+                <a16:creationId xmlns:a16="http://schemas.microsoft.com/office/drawing/2014/main" id="{DB2BCE8C-8FDE-3C16-F1F3-A57F55BD13F5}"/>
+              </a:ext>
+            </a:extLst>
+          </p:cNvPr>
+          <p:cNvPicPr>
+            <a:picLocks noChangeAspect="1"/>
+          </p:cNvPicPr>
+          <p:nvPr/>
+        </p:nvPicPr>
+        <p:blipFill>
+          <a:blip r:embed="rId2"/>
+          <a:stretch>
+            <a:fillRect/>
+          </a:stretch>
+        </p:blipFill>
+        <p:spPr>
+          <a:xfrm>
+            <a:off x="0" y="0"/>
+            <a:ext cx="9144000" cy="6858000"/>
+          </a:xfrm>
+          <a:prstGeom prst="rect">
+            <a:avLst/>
+          </a:prstGeom>
+        </p:spPr>
+      </p:pic>
+      <p:pic>
+        <p:nvPicPr>
+          <p:cNvPr id="8" name="Picture 7">
+            <a:extLst>
+              <a:ext uri="{FF2B5EF4-FFF2-40B4-BE49-F238E27FC236}">
+                <a16:creationId xmlns:a16="http://schemas.microsoft.com/office/drawing/2014/main" id="{BB9DC80B-E652-D9E5-98C5-7A65FF68D1B4}"/>
+              </a:ext>
+            </a:extLst>
+          </p:cNvPr>
+          <p:cNvPicPr>
+            <a:picLocks noChangeAspect="1"/>
+          </p:cNvPicPr>
+          <p:nvPr/>
+        </p:nvPicPr>
+        <p:blipFill>
+          <a:blip r:embed="rId3"/>
+          <a:stretch>
+            <a:fillRect/>
+          </a:stretch>
+        </p:blipFill>
+        <p:spPr>
+          <a:xfrm>
+            <a:off x="7315200" y="6114831"/>
+            <a:ext cx="1708662" cy="632838"/>
+          </a:xfrm>
+          <a:prstGeom prst="rect">
+            <a:avLst/>
+          </a:prstGeom>
+        </p:spPr>
+      </p:pic>
+    </p:spTree>
+    <p:extLst>
+      <p:ext uri="{BB962C8B-B14F-4D97-AF65-F5344CB8AC3E}">
+        <p14:creationId xmlns:p14="http://schemas.microsoft.com/office/powerpoint/2010/main" val="993950643"/>
+      </p:ext>
+    </p:extLst>
+  </p:cSld>
+  <p:clrMapOvr>
+    <a:masterClrMapping/>
+  </p:clrMapOvr>
+</p:sld>
+</file>
+
+<file path=ppt/slides/slide49.xml><?xml version="1.0" encoding="utf-8"?>
+<p:sld xmlns:a="http://schemas.openxmlformats.org/drawingml/2006/main" xmlns:r="http://schemas.openxmlformats.org/officeDocument/2006/relationships" xmlns:p="http://schemas.openxmlformats.org/presentationml/2006/main">
+  <p:cSld>
+    <p:spTree>
+      <p:nvGrpSpPr>
+        <p:cNvPr id="1" name="">
+          <a:extLst>
+            <a:ext uri="{FF2B5EF4-FFF2-40B4-BE49-F238E27FC236}">
+              <a16:creationId xmlns:a16="http://schemas.microsoft.com/office/drawing/2014/main" id="{C5ACF2E6-5D3F-157B-0F25-DDC586A545FE}"/>
+            </a:ext>
+          </a:extLst>
+        </p:cNvPr>
+        <p:cNvGrpSpPr/>
+        <p:nvPr/>
+      </p:nvGrpSpPr>
+      <p:grpSpPr>
+        <a:xfrm>
+          <a:off x="0" y="0"/>
+          <a:ext cx="0" cy="0"/>
+          <a:chOff x="0" y="0"/>
+          <a:chExt cx="0" cy="0"/>
+        </a:xfrm>
+      </p:grpSpPr>
+      <p:pic>
+        <p:nvPicPr>
+          <p:cNvPr id="4" name="Picture 3" descr="450808d6-f018-4170-8863-633347777b52.png">
+            <a:extLst>
+              <a:ext uri="{FF2B5EF4-FFF2-40B4-BE49-F238E27FC236}">
+                <a16:creationId xmlns:a16="http://schemas.microsoft.com/office/drawing/2014/main" id="{71EF7DD6-BB2A-FEA8-E60D-C284EE5FA0AA}"/>
+              </a:ext>
+            </a:extLst>
+          </p:cNvPr>
+          <p:cNvPicPr>
+            <a:picLocks noChangeAspect="1"/>
+          </p:cNvPicPr>
+          <p:nvPr/>
+        </p:nvPicPr>
+        <p:blipFill>
+          <a:blip r:embed="rId2"/>
+          <a:stretch>
+            <a:fillRect/>
+          </a:stretch>
+        </p:blipFill>
+        <p:spPr>
+          <a:xfrm>
+            <a:off x="0" y="0"/>
+            <a:ext cx="9144000" cy="6858000"/>
+          </a:xfrm>
+          <a:prstGeom prst="rect">
+            <a:avLst/>
+          </a:prstGeom>
+        </p:spPr>
+      </p:pic>
+      <p:pic>
+        <p:nvPicPr>
+          <p:cNvPr id="8" name="Picture 7">
+            <a:extLst>
+              <a:ext uri="{FF2B5EF4-FFF2-40B4-BE49-F238E27FC236}">
+                <a16:creationId xmlns:a16="http://schemas.microsoft.com/office/drawing/2014/main" id="{BE3A7CB8-364A-A67D-B6D2-6AA6DA5B2674}"/>
+              </a:ext>
+            </a:extLst>
+          </p:cNvPr>
+          <p:cNvPicPr>
+            <a:picLocks noChangeAspect="1"/>
+          </p:cNvPicPr>
+          <p:nvPr/>
+        </p:nvPicPr>
+        <p:blipFill>
+          <a:blip r:embed="rId3"/>
+          <a:stretch>
+            <a:fillRect/>
+          </a:stretch>
+        </p:blipFill>
+        <p:spPr>
+          <a:xfrm>
+            <a:off x="7315200" y="6114831"/>
+            <a:ext cx="1708662" cy="632838"/>
+          </a:xfrm>
+          <a:prstGeom prst="rect">
+            <a:avLst/>
+          </a:prstGeom>
+        </p:spPr>
+      </p:pic>
+    </p:spTree>
+    <p:extLst>
+      <p:ext uri="{BB962C8B-B14F-4D97-AF65-F5344CB8AC3E}">
+        <p14:creationId xmlns:p14="http://schemas.microsoft.com/office/powerpoint/2010/main" val="707937953"/>
       </p:ext>
     </p:extLst>
   </p:cSld>
@@ -11229,6 +13936,966 @@
 </p:sld>
 </file>
 
+<file path=ppt/slides/slide50.xml><?xml version="1.0" encoding="utf-8"?>
+<p:sld xmlns:a="http://schemas.openxmlformats.org/drawingml/2006/main" xmlns:r="http://schemas.openxmlformats.org/officeDocument/2006/relationships" xmlns:p="http://schemas.openxmlformats.org/presentationml/2006/main">
+  <p:cSld>
+    <p:spTree>
+      <p:nvGrpSpPr>
+        <p:cNvPr id="1" name="">
+          <a:extLst>
+            <a:ext uri="{FF2B5EF4-FFF2-40B4-BE49-F238E27FC236}">
+              <a16:creationId xmlns:a16="http://schemas.microsoft.com/office/drawing/2014/main" id="{65FB0A00-203A-252F-AAE0-49F80983E14D}"/>
+            </a:ext>
+          </a:extLst>
+        </p:cNvPr>
+        <p:cNvGrpSpPr/>
+        <p:nvPr/>
+      </p:nvGrpSpPr>
+      <p:grpSpPr>
+        <a:xfrm>
+          <a:off x="0" y="0"/>
+          <a:ext cx="0" cy="0"/>
+          <a:chOff x="0" y="0"/>
+          <a:chExt cx="0" cy="0"/>
+        </a:xfrm>
+      </p:grpSpPr>
+      <p:pic>
+        <p:nvPicPr>
+          <p:cNvPr id="4" name="Picture 3" descr="450808d6-f018-4170-8863-633347777b52.png">
+            <a:extLst>
+              <a:ext uri="{FF2B5EF4-FFF2-40B4-BE49-F238E27FC236}">
+                <a16:creationId xmlns:a16="http://schemas.microsoft.com/office/drawing/2014/main" id="{73A52282-AB82-1220-4E40-34AABEF3B65A}"/>
+              </a:ext>
+            </a:extLst>
+          </p:cNvPr>
+          <p:cNvPicPr>
+            <a:picLocks noChangeAspect="1"/>
+          </p:cNvPicPr>
+          <p:nvPr/>
+        </p:nvPicPr>
+        <p:blipFill>
+          <a:blip r:embed="rId2"/>
+          <a:stretch>
+            <a:fillRect/>
+          </a:stretch>
+        </p:blipFill>
+        <p:spPr>
+          <a:xfrm>
+            <a:off x="0" y="0"/>
+            <a:ext cx="9144000" cy="6858000"/>
+          </a:xfrm>
+          <a:prstGeom prst="rect">
+            <a:avLst/>
+          </a:prstGeom>
+        </p:spPr>
+      </p:pic>
+      <p:pic>
+        <p:nvPicPr>
+          <p:cNvPr id="8" name="Picture 7">
+            <a:extLst>
+              <a:ext uri="{FF2B5EF4-FFF2-40B4-BE49-F238E27FC236}">
+                <a16:creationId xmlns:a16="http://schemas.microsoft.com/office/drawing/2014/main" id="{02270587-6E00-CD77-87A1-D3D42A45E5B4}"/>
+              </a:ext>
+            </a:extLst>
+          </p:cNvPr>
+          <p:cNvPicPr>
+            <a:picLocks noChangeAspect="1"/>
+          </p:cNvPicPr>
+          <p:nvPr/>
+        </p:nvPicPr>
+        <p:blipFill>
+          <a:blip r:embed="rId3"/>
+          <a:stretch>
+            <a:fillRect/>
+          </a:stretch>
+        </p:blipFill>
+        <p:spPr>
+          <a:xfrm>
+            <a:off x="7315200" y="6114831"/>
+            <a:ext cx="1708662" cy="632838"/>
+          </a:xfrm>
+          <a:prstGeom prst="rect">
+            <a:avLst/>
+          </a:prstGeom>
+        </p:spPr>
+      </p:pic>
+    </p:spTree>
+    <p:extLst>
+      <p:ext uri="{BB962C8B-B14F-4D97-AF65-F5344CB8AC3E}">
+        <p14:creationId xmlns:p14="http://schemas.microsoft.com/office/powerpoint/2010/main" val="4031818786"/>
+      </p:ext>
+    </p:extLst>
+  </p:cSld>
+  <p:clrMapOvr>
+    <a:masterClrMapping/>
+  </p:clrMapOvr>
+</p:sld>
+</file>
+
+<file path=ppt/slides/slide51.xml><?xml version="1.0" encoding="utf-8"?>
+<p:sld xmlns:a="http://schemas.openxmlformats.org/drawingml/2006/main" xmlns:r="http://schemas.openxmlformats.org/officeDocument/2006/relationships" xmlns:p="http://schemas.openxmlformats.org/presentationml/2006/main">
+  <p:cSld>
+    <p:spTree>
+      <p:nvGrpSpPr>
+        <p:cNvPr id="1" name="">
+          <a:extLst>
+            <a:ext uri="{FF2B5EF4-FFF2-40B4-BE49-F238E27FC236}">
+              <a16:creationId xmlns:a16="http://schemas.microsoft.com/office/drawing/2014/main" id="{604AE0A1-5587-0A33-5378-295247206EEF}"/>
+            </a:ext>
+          </a:extLst>
+        </p:cNvPr>
+        <p:cNvGrpSpPr/>
+        <p:nvPr/>
+      </p:nvGrpSpPr>
+      <p:grpSpPr>
+        <a:xfrm>
+          <a:off x="0" y="0"/>
+          <a:ext cx="0" cy="0"/>
+          <a:chOff x="0" y="0"/>
+          <a:chExt cx="0" cy="0"/>
+        </a:xfrm>
+      </p:grpSpPr>
+      <p:pic>
+        <p:nvPicPr>
+          <p:cNvPr id="4" name="Picture 3" descr="450808d6-f018-4170-8863-633347777b52.png">
+            <a:extLst>
+              <a:ext uri="{FF2B5EF4-FFF2-40B4-BE49-F238E27FC236}">
+                <a16:creationId xmlns:a16="http://schemas.microsoft.com/office/drawing/2014/main" id="{D623CB44-8E67-5885-93EA-B852CE584F79}"/>
+              </a:ext>
+            </a:extLst>
+          </p:cNvPr>
+          <p:cNvPicPr>
+            <a:picLocks noChangeAspect="1"/>
+          </p:cNvPicPr>
+          <p:nvPr/>
+        </p:nvPicPr>
+        <p:blipFill>
+          <a:blip r:embed="rId2"/>
+          <a:stretch>
+            <a:fillRect/>
+          </a:stretch>
+        </p:blipFill>
+        <p:spPr>
+          <a:xfrm>
+            <a:off x="0" y="0"/>
+            <a:ext cx="9144000" cy="6858000"/>
+          </a:xfrm>
+          <a:prstGeom prst="rect">
+            <a:avLst/>
+          </a:prstGeom>
+        </p:spPr>
+      </p:pic>
+      <p:pic>
+        <p:nvPicPr>
+          <p:cNvPr id="8" name="Picture 7">
+            <a:extLst>
+              <a:ext uri="{FF2B5EF4-FFF2-40B4-BE49-F238E27FC236}">
+                <a16:creationId xmlns:a16="http://schemas.microsoft.com/office/drawing/2014/main" id="{4BB50A19-A115-992A-7BEF-865ED1A575DA}"/>
+              </a:ext>
+            </a:extLst>
+          </p:cNvPr>
+          <p:cNvPicPr>
+            <a:picLocks noChangeAspect="1"/>
+          </p:cNvPicPr>
+          <p:nvPr/>
+        </p:nvPicPr>
+        <p:blipFill>
+          <a:blip r:embed="rId3"/>
+          <a:stretch>
+            <a:fillRect/>
+          </a:stretch>
+        </p:blipFill>
+        <p:spPr>
+          <a:xfrm>
+            <a:off x="7315200" y="6114831"/>
+            <a:ext cx="1708662" cy="632838"/>
+          </a:xfrm>
+          <a:prstGeom prst="rect">
+            <a:avLst/>
+          </a:prstGeom>
+        </p:spPr>
+      </p:pic>
+    </p:spTree>
+    <p:extLst>
+      <p:ext uri="{BB962C8B-B14F-4D97-AF65-F5344CB8AC3E}">
+        <p14:creationId xmlns:p14="http://schemas.microsoft.com/office/powerpoint/2010/main" val="3134797356"/>
+      </p:ext>
+    </p:extLst>
+  </p:cSld>
+  <p:clrMapOvr>
+    <a:masterClrMapping/>
+  </p:clrMapOvr>
+</p:sld>
+</file>
+
+<file path=ppt/slides/slide52.xml><?xml version="1.0" encoding="utf-8"?>
+<p:sld xmlns:a="http://schemas.openxmlformats.org/drawingml/2006/main" xmlns:r="http://schemas.openxmlformats.org/officeDocument/2006/relationships" xmlns:p="http://schemas.openxmlformats.org/presentationml/2006/main">
+  <p:cSld>
+    <p:spTree>
+      <p:nvGrpSpPr>
+        <p:cNvPr id="1" name="">
+          <a:extLst>
+            <a:ext uri="{FF2B5EF4-FFF2-40B4-BE49-F238E27FC236}">
+              <a16:creationId xmlns:a16="http://schemas.microsoft.com/office/drawing/2014/main" id="{CB62641F-CF17-DE49-A174-6542C7747127}"/>
+            </a:ext>
+          </a:extLst>
+        </p:cNvPr>
+        <p:cNvGrpSpPr/>
+        <p:nvPr/>
+      </p:nvGrpSpPr>
+      <p:grpSpPr>
+        <a:xfrm>
+          <a:off x="0" y="0"/>
+          <a:ext cx="0" cy="0"/>
+          <a:chOff x="0" y="0"/>
+          <a:chExt cx="0" cy="0"/>
+        </a:xfrm>
+      </p:grpSpPr>
+      <p:pic>
+        <p:nvPicPr>
+          <p:cNvPr id="4" name="Picture 3" descr="450808d6-f018-4170-8863-633347777b52.png">
+            <a:extLst>
+              <a:ext uri="{FF2B5EF4-FFF2-40B4-BE49-F238E27FC236}">
+                <a16:creationId xmlns:a16="http://schemas.microsoft.com/office/drawing/2014/main" id="{999B5C07-6ED0-A934-5550-94F6BC35AF54}"/>
+              </a:ext>
+            </a:extLst>
+          </p:cNvPr>
+          <p:cNvPicPr>
+            <a:picLocks noChangeAspect="1"/>
+          </p:cNvPicPr>
+          <p:nvPr/>
+        </p:nvPicPr>
+        <p:blipFill>
+          <a:blip r:embed="rId2"/>
+          <a:stretch>
+            <a:fillRect/>
+          </a:stretch>
+        </p:blipFill>
+        <p:spPr>
+          <a:xfrm>
+            <a:off x="0" y="0"/>
+            <a:ext cx="9144000" cy="6858000"/>
+          </a:xfrm>
+          <a:prstGeom prst="rect">
+            <a:avLst/>
+          </a:prstGeom>
+        </p:spPr>
+      </p:pic>
+      <p:pic>
+        <p:nvPicPr>
+          <p:cNvPr id="8" name="Picture 7">
+            <a:extLst>
+              <a:ext uri="{FF2B5EF4-FFF2-40B4-BE49-F238E27FC236}">
+                <a16:creationId xmlns:a16="http://schemas.microsoft.com/office/drawing/2014/main" id="{9A1AFF96-FD10-20F2-173E-CB36CE924628}"/>
+              </a:ext>
+            </a:extLst>
+          </p:cNvPr>
+          <p:cNvPicPr>
+            <a:picLocks noChangeAspect="1"/>
+          </p:cNvPicPr>
+          <p:nvPr/>
+        </p:nvPicPr>
+        <p:blipFill>
+          <a:blip r:embed="rId3"/>
+          <a:stretch>
+            <a:fillRect/>
+          </a:stretch>
+        </p:blipFill>
+        <p:spPr>
+          <a:xfrm>
+            <a:off x="7315200" y="6114831"/>
+            <a:ext cx="1708662" cy="632838"/>
+          </a:xfrm>
+          <a:prstGeom prst="rect">
+            <a:avLst/>
+          </a:prstGeom>
+        </p:spPr>
+      </p:pic>
+    </p:spTree>
+    <p:extLst>
+      <p:ext uri="{BB962C8B-B14F-4D97-AF65-F5344CB8AC3E}">
+        <p14:creationId xmlns:p14="http://schemas.microsoft.com/office/powerpoint/2010/main" val="272446797"/>
+      </p:ext>
+    </p:extLst>
+  </p:cSld>
+  <p:clrMapOvr>
+    <a:masterClrMapping/>
+  </p:clrMapOvr>
+</p:sld>
+</file>
+
+<file path=ppt/slides/slide53.xml><?xml version="1.0" encoding="utf-8"?>
+<p:sld xmlns:a="http://schemas.openxmlformats.org/drawingml/2006/main" xmlns:r="http://schemas.openxmlformats.org/officeDocument/2006/relationships" xmlns:p="http://schemas.openxmlformats.org/presentationml/2006/main">
+  <p:cSld>
+    <p:spTree>
+      <p:nvGrpSpPr>
+        <p:cNvPr id="1" name="">
+          <a:extLst>
+            <a:ext uri="{FF2B5EF4-FFF2-40B4-BE49-F238E27FC236}">
+              <a16:creationId xmlns:a16="http://schemas.microsoft.com/office/drawing/2014/main" id="{D4DB40FA-D544-1086-4F3F-76EB0AD6FA0A}"/>
+            </a:ext>
+          </a:extLst>
+        </p:cNvPr>
+        <p:cNvGrpSpPr/>
+        <p:nvPr/>
+      </p:nvGrpSpPr>
+      <p:grpSpPr>
+        <a:xfrm>
+          <a:off x="0" y="0"/>
+          <a:ext cx="0" cy="0"/>
+          <a:chOff x="0" y="0"/>
+          <a:chExt cx="0" cy="0"/>
+        </a:xfrm>
+      </p:grpSpPr>
+      <p:pic>
+        <p:nvPicPr>
+          <p:cNvPr id="4" name="Picture 3" descr="450808d6-f018-4170-8863-633347777b52.png">
+            <a:extLst>
+              <a:ext uri="{FF2B5EF4-FFF2-40B4-BE49-F238E27FC236}">
+                <a16:creationId xmlns:a16="http://schemas.microsoft.com/office/drawing/2014/main" id="{AA138325-0F28-CC1B-43B3-370B098AA841}"/>
+              </a:ext>
+            </a:extLst>
+          </p:cNvPr>
+          <p:cNvPicPr>
+            <a:picLocks noChangeAspect="1"/>
+          </p:cNvPicPr>
+          <p:nvPr/>
+        </p:nvPicPr>
+        <p:blipFill>
+          <a:blip r:embed="rId2"/>
+          <a:stretch>
+            <a:fillRect/>
+          </a:stretch>
+        </p:blipFill>
+        <p:spPr>
+          <a:xfrm>
+            <a:off x="0" y="0"/>
+            <a:ext cx="9144000" cy="6858000"/>
+          </a:xfrm>
+          <a:prstGeom prst="rect">
+            <a:avLst/>
+          </a:prstGeom>
+        </p:spPr>
+      </p:pic>
+      <p:pic>
+        <p:nvPicPr>
+          <p:cNvPr id="8" name="Picture 7">
+            <a:extLst>
+              <a:ext uri="{FF2B5EF4-FFF2-40B4-BE49-F238E27FC236}">
+                <a16:creationId xmlns:a16="http://schemas.microsoft.com/office/drawing/2014/main" id="{2896F5A6-3916-0395-EDAC-8412D0C38686}"/>
+              </a:ext>
+            </a:extLst>
+          </p:cNvPr>
+          <p:cNvPicPr>
+            <a:picLocks noChangeAspect="1"/>
+          </p:cNvPicPr>
+          <p:nvPr/>
+        </p:nvPicPr>
+        <p:blipFill>
+          <a:blip r:embed="rId3"/>
+          <a:stretch>
+            <a:fillRect/>
+          </a:stretch>
+        </p:blipFill>
+        <p:spPr>
+          <a:xfrm>
+            <a:off x="7315200" y="6114831"/>
+            <a:ext cx="1708662" cy="632838"/>
+          </a:xfrm>
+          <a:prstGeom prst="rect">
+            <a:avLst/>
+          </a:prstGeom>
+        </p:spPr>
+      </p:pic>
+    </p:spTree>
+    <p:extLst>
+      <p:ext uri="{BB962C8B-B14F-4D97-AF65-F5344CB8AC3E}">
+        <p14:creationId xmlns:p14="http://schemas.microsoft.com/office/powerpoint/2010/main" val="1537850561"/>
+      </p:ext>
+    </p:extLst>
+  </p:cSld>
+  <p:clrMapOvr>
+    <a:masterClrMapping/>
+  </p:clrMapOvr>
+</p:sld>
+</file>
+
+<file path=ppt/slides/slide54.xml><?xml version="1.0" encoding="utf-8"?>
+<p:sld xmlns:a="http://schemas.openxmlformats.org/drawingml/2006/main" xmlns:r="http://schemas.openxmlformats.org/officeDocument/2006/relationships" xmlns:p="http://schemas.openxmlformats.org/presentationml/2006/main">
+  <p:cSld>
+    <p:spTree>
+      <p:nvGrpSpPr>
+        <p:cNvPr id="1" name="">
+          <a:extLst>
+            <a:ext uri="{FF2B5EF4-FFF2-40B4-BE49-F238E27FC236}">
+              <a16:creationId xmlns:a16="http://schemas.microsoft.com/office/drawing/2014/main" id="{8A721CF2-B671-EEB2-594C-3F53267515A6}"/>
+            </a:ext>
+          </a:extLst>
+        </p:cNvPr>
+        <p:cNvGrpSpPr/>
+        <p:nvPr/>
+      </p:nvGrpSpPr>
+      <p:grpSpPr>
+        <a:xfrm>
+          <a:off x="0" y="0"/>
+          <a:ext cx="0" cy="0"/>
+          <a:chOff x="0" y="0"/>
+          <a:chExt cx="0" cy="0"/>
+        </a:xfrm>
+      </p:grpSpPr>
+      <p:pic>
+        <p:nvPicPr>
+          <p:cNvPr id="4" name="Picture 3" descr="450808d6-f018-4170-8863-633347777b52.png">
+            <a:extLst>
+              <a:ext uri="{FF2B5EF4-FFF2-40B4-BE49-F238E27FC236}">
+                <a16:creationId xmlns:a16="http://schemas.microsoft.com/office/drawing/2014/main" id="{FF6363D6-3345-ABF0-BC33-D05AEFECD883}"/>
+              </a:ext>
+            </a:extLst>
+          </p:cNvPr>
+          <p:cNvPicPr>
+            <a:picLocks noChangeAspect="1"/>
+          </p:cNvPicPr>
+          <p:nvPr/>
+        </p:nvPicPr>
+        <p:blipFill>
+          <a:blip r:embed="rId2"/>
+          <a:stretch>
+            <a:fillRect/>
+          </a:stretch>
+        </p:blipFill>
+        <p:spPr>
+          <a:xfrm>
+            <a:off x="0" y="0"/>
+            <a:ext cx="9144000" cy="6858000"/>
+          </a:xfrm>
+          <a:prstGeom prst="rect">
+            <a:avLst/>
+          </a:prstGeom>
+        </p:spPr>
+      </p:pic>
+      <p:pic>
+        <p:nvPicPr>
+          <p:cNvPr id="8" name="Picture 7">
+            <a:extLst>
+              <a:ext uri="{FF2B5EF4-FFF2-40B4-BE49-F238E27FC236}">
+                <a16:creationId xmlns:a16="http://schemas.microsoft.com/office/drawing/2014/main" id="{EA4238FC-78F2-8DD3-499B-B97E99A571CF}"/>
+              </a:ext>
+            </a:extLst>
+          </p:cNvPr>
+          <p:cNvPicPr>
+            <a:picLocks noChangeAspect="1"/>
+          </p:cNvPicPr>
+          <p:nvPr/>
+        </p:nvPicPr>
+        <p:blipFill>
+          <a:blip r:embed="rId3"/>
+          <a:stretch>
+            <a:fillRect/>
+          </a:stretch>
+        </p:blipFill>
+        <p:spPr>
+          <a:xfrm>
+            <a:off x="7315200" y="6114831"/>
+            <a:ext cx="1708662" cy="632838"/>
+          </a:xfrm>
+          <a:prstGeom prst="rect">
+            <a:avLst/>
+          </a:prstGeom>
+        </p:spPr>
+      </p:pic>
+    </p:spTree>
+    <p:extLst>
+      <p:ext uri="{BB962C8B-B14F-4D97-AF65-F5344CB8AC3E}">
+        <p14:creationId xmlns:p14="http://schemas.microsoft.com/office/powerpoint/2010/main" val="4164706476"/>
+      </p:ext>
+    </p:extLst>
+  </p:cSld>
+  <p:clrMapOvr>
+    <a:masterClrMapping/>
+  </p:clrMapOvr>
+</p:sld>
+</file>
+
+<file path=ppt/slides/slide55.xml><?xml version="1.0" encoding="utf-8"?>
+<p:sld xmlns:a="http://schemas.openxmlformats.org/drawingml/2006/main" xmlns:r="http://schemas.openxmlformats.org/officeDocument/2006/relationships" xmlns:p="http://schemas.openxmlformats.org/presentationml/2006/main">
+  <p:cSld>
+    <p:spTree>
+      <p:nvGrpSpPr>
+        <p:cNvPr id="1" name="">
+          <a:extLst>
+            <a:ext uri="{FF2B5EF4-FFF2-40B4-BE49-F238E27FC236}">
+              <a16:creationId xmlns:a16="http://schemas.microsoft.com/office/drawing/2014/main" id="{3C2C90F3-240E-89EC-530B-CA1A69E10638}"/>
+            </a:ext>
+          </a:extLst>
+        </p:cNvPr>
+        <p:cNvGrpSpPr/>
+        <p:nvPr/>
+      </p:nvGrpSpPr>
+      <p:grpSpPr>
+        <a:xfrm>
+          <a:off x="0" y="0"/>
+          <a:ext cx="0" cy="0"/>
+          <a:chOff x="0" y="0"/>
+          <a:chExt cx="0" cy="0"/>
+        </a:xfrm>
+      </p:grpSpPr>
+      <p:pic>
+        <p:nvPicPr>
+          <p:cNvPr id="4" name="Picture 3" descr="450808d6-f018-4170-8863-633347777b52.png">
+            <a:extLst>
+              <a:ext uri="{FF2B5EF4-FFF2-40B4-BE49-F238E27FC236}">
+                <a16:creationId xmlns:a16="http://schemas.microsoft.com/office/drawing/2014/main" id="{A0A2DCDB-7271-FFE2-2765-B4C777CBC580}"/>
+              </a:ext>
+            </a:extLst>
+          </p:cNvPr>
+          <p:cNvPicPr>
+            <a:picLocks noChangeAspect="1"/>
+          </p:cNvPicPr>
+          <p:nvPr/>
+        </p:nvPicPr>
+        <p:blipFill>
+          <a:blip r:embed="rId2"/>
+          <a:stretch>
+            <a:fillRect/>
+          </a:stretch>
+        </p:blipFill>
+        <p:spPr>
+          <a:xfrm>
+            <a:off x="0" y="0"/>
+            <a:ext cx="9144000" cy="6858000"/>
+          </a:xfrm>
+          <a:prstGeom prst="rect">
+            <a:avLst/>
+          </a:prstGeom>
+        </p:spPr>
+      </p:pic>
+      <p:pic>
+        <p:nvPicPr>
+          <p:cNvPr id="8" name="Picture 7">
+            <a:extLst>
+              <a:ext uri="{FF2B5EF4-FFF2-40B4-BE49-F238E27FC236}">
+                <a16:creationId xmlns:a16="http://schemas.microsoft.com/office/drawing/2014/main" id="{34EEAA85-35F2-BDE5-EFDB-A72FD1669B55}"/>
+              </a:ext>
+            </a:extLst>
+          </p:cNvPr>
+          <p:cNvPicPr>
+            <a:picLocks noChangeAspect="1"/>
+          </p:cNvPicPr>
+          <p:nvPr/>
+        </p:nvPicPr>
+        <p:blipFill>
+          <a:blip r:embed="rId3"/>
+          <a:stretch>
+            <a:fillRect/>
+          </a:stretch>
+        </p:blipFill>
+        <p:spPr>
+          <a:xfrm>
+            <a:off x="7315200" y="6114831"/>
+            <a:ext cx="1708662" cy="632838"/>
+          </a:xfrm>
+          <a:prstGeom prst="rect">
+            <a:avLst/>
+          </a:prstGeom>
+        </p:spPr>
+      </p:pic>
+    </p:spTree>
+    <p:extLst>
+      <p:ext uri="{BB962C8B-B14F-4D97-AF65-F5344CB8AC3E}">
+        <p14:creationId xmlns:p14="http://schemas.microsoft.com/office/powerpoint/2010/main" val="2335035511"/>
+      </p:ext>
+    </p:extLst>
+  </p:cSld>
+  <p:clrMapOvr>
+    <a:masterClrMapping/>
+  </p:clrMapOvr>
+</p:sld>
+</file>
+
+<file path=ppt/slides/slide56.xml><?xml version="1.0" encoding="utf-8"?>
+<p:sld xmlns:a="http://schemas.openxmlformats.org/drawingml/2006/main" xmlns:r="http://schemas.openxmlformats.org/officeDocument/2006/relationships" xmlns:p="http://schemas.openxmlformats.org/presentationml/2006/main">
+  <p:cSld>
+    <p:spTree>
+      <p:nvGrpSpPr>
+        <p:cNvPr id="1" name="">
+          <a:extLst>
+            <a:ext uri="{FF2B5EF4-FFF2-40B4-BE49-F238E27FC236}">
+              <a16:creationId xmlns:a16="http://schemas.microsoft.com/office/drawing/2014/main" id="{035CD3EF-A0EF-6856-6542-E5DDD6FBF164}"/>
+            </a:ext>
+          </a:extLst>
+        </p:cNvPr>
+        <p:cNvGrpSpPr/>
+        <p:nvPr/>
+      </p:nvGrpSpPr>
+      <p:grpSpPr>
+        <a:xfrm>
+          <a:off x="0" y="0"/>
+          <a:ext cx="0" cy="0"/>
+          <a:chOff x="0" y="0"/>
+          <a:chExt cx="0" cy="0"/>
+        </a:xfrm>
+      </p:grpSpPr>
+      <p:pic>
+        <p:nvPicPr>
+          <p:cNvPr id="4" name="Picture 3" descr="450808d6-f018-4170-8863-633347777b52.png">
+            <a:extLst>
+              <a:ext uri="{FF2B5EF4-FFF2-40B4-BE49-F238E27FC236}">
+                <a16:creationId xmlns:a16="http://schemas.microsoft.com/office/drawing/2014/main" id="{29C35488-3327-351D-7180-7DC224F226BA}"/>
+              </a:ext>
+            </a:extLst>
+          </p:cNvPr>
+          <p:cNvPicPr>
+            <a:picLocks noChangeAspect="1"/>
+          </p:cNvPicPr>
+          <p:nvPr/>
+        </p:nvPicPr>
+        <p:blipFill>
+          <a:blip r:embed="rId2"/>
+          <a:stretch>
+            <a:fillRect/>
+          </a:stretch>
+        </p:blipFill>
+        <p:spPr>
+          <a:xfrm>
+            <a:off x="0" y="0"/>
+            <a:ext cx="9144000" cy="6858000"/>
+          </a:xfrm>
+          <a:prstGeom prst="rect">
+            <a:avLst/>
+          </a:prstGeom>
+        </p:spPr>
+      </p:pic>
+      <p:pic>
+        <p:nvPicPr>
+          <p:cNvPr id="8" name="Picture 7">
+            <a:extLst>
+              <a:ext uri="{FF2B5EF4-FFF2-40B4-BE49-F238E27FC236}">
+                <a16:creationId xmlns:a16="http://schemas.microsoft.com/office/drawing/2014/main" id="{5EB8B683-5565-1650-505D-E57DF9B7F571}"/>
+              </a:ext>
+            </a:extLst>
+          </p:cNvPr>
+          <p:cNvPicPr>
+            <a:picLocks noChangeAspect="1"/>
+          </p:cNvPicPr>
+          <p:nvPr/>
+        </p:nvPicPr>
+        <p:blipFill>
+          <a:blip r:embed="rId3"/>
+          <a:stretch>
+            <a:fillRect/>
+          </a:stretch>
+        </p:blipFill>
+        <p:spPr>
+          <a:xfrm>
+            <a:off x="7315200" y="6114831"/>
+            <a:ext cx="1708662" cy="632838"/>
+          </a:xfrm>
+          <a:prstGeom prst="rect">
+            <a:avLst/>
+          </a:prstGeom>
+        </p:spPr>
+      </p:pic>
+    </p:spTree>
+    <p:extLst>
+      <p:ext uri="{BB962C8B-B14F-4D97-AF65-F5344CB8AC3E}">
+        <p14:creationId xmlns:p14="http://schemas.microsoft.com/office/powerpoint/2010/main" val="1523915448"/>
+      </p:ext>
+    </p:extLst>
+  </p:cSld>
+  <p:clrMapOvr>
+    <a:masterClrMapping/>
+  </p:clrMapOvr>
+</p:sld>
+</file>
+
+<file path=ppt/slides/slide57.xml><?xml version="1.0" encoding="utf-8"?>
+<p:sld xmlns:a="http://schemas.openxmlformats.org/drawingml/2006/main" xmlns:r="http://schemas.openxmlformats.org/officeDocument/2006/relationships" xmlns:p="http://schemas.openxmlformats.org/presentationml/2006/main">
+  <p:cSld>
+    <p:spTree>
+      <p:nvGrpSpPr>
+        <p:cNvPr id="1" name="">
+          <a:extLst>
+            <a:ext uri="{FF2B5EF4-FFF2-40B4-BE49-F238E27FC236}">
+              <a16:creationId xmlns:a16="http://schemas.microsoft.com/office/drawing/2014/main" id="{CEC3C1BA-02E3-9D82-A585-9D1FD71252EA}"/>
+            </a:ext>
+          </a:extLst>
+        </p:cNvPr>
+        <p:cNvGrpSpPr/>
+        <p:nvPr/>
+      </p:nvGrpSpPr>
+      <p:grpSpPr>
+        <a:xfrm>
+          <a:off x="0" y="0"/>
+          <a:ext cx="0" cy="0"/>
+          <a:chOff x="0" y="0"/>
+          <a:chExt cx="0" cy="0"/>
+        </a:xfrm>
+      </p:grpSpPr>
+      <p:pic>
+        <p:nvPicPr>
+          <p:cNvPr id="4" name="Picture 3" descr="450808d6-f018-4170-8863-633347777b52.png">
+            <a:extLst>
+              <a:ext uri="{FF2B5EF4-FFF2-40B4-BE49-F238E27FC236}">
+                <a16:creationId xmlns:a16="http://schemas.microsoft.com/office/drawing/2014/main" id="{EE589166-30CC-8277-B70A-0B8A8B9A970F}"/>
+              </a:ext>
+            </a:extLst>
+          </p:cNvPr>
+          <p:cNvPicPr>
+            <a:picLocks noChangeAspect="1"/>
+          </p:cNvPicPr>
+          <p:nvPr/>
+        </p:nvPicPr>
+        <p:blipFill>
+          <a:blip r:embed="rId2"/>
+          <a:stretch>
+            <a:fillRect/>
+          </a:stretch>
+        </p:blipFill>
+        <p:spPr>
+          <a:xfrm>
+            <a:off x="0" y="0"/>
+            <a:ext cx="9144000" cy="6858000"/>
+          </a:xfrm>
+          <a:prstGeom prst="rect">
+            <a:avLst/>
+          </a:prstGeom>
+        </p:spPr>
+      </p:pic>
+      <p:pic>
+        <p:nvPicPr>
+          <p:cNvPr id="8" name="Picture 7">
+            <a:extLst>
+              <a:ext uri="{FF2B5EF4-FFF2-40B4-BE49-F238E27FC236}">
+                <a16:creationId xmlns:a16="http://schemas.microsoft.com/office/drawing/2014/main" id="{9496D202-A956-3523-9C5C-982D14E19F33}"/>
+              </a:ext>
+            </a:extLst>
+          </p:cNvPr>
+          <p:cNvPicPr>
+            <a:picLocks noChangeAspect="1"/>
+          </p:cNvPicPr>
+          <p:nvPr/>
+        </p:nvPicPr>
+        <p:blipFill>
+          <a:blip r:embed="rId3"/>
+          <a:stretch>
+            <a:fillRect/>
+          </a:stretch>
+        </p:blipFill>
+        <p:spPr>
+          <a:xfrm>
+            <a:off x="7315200" y="6114831"/>
+            <a:ext cx="1708662" cy="632838"/>
+          </a:xfrm>
+          <a:prstGeom prst="rect">
+            <a:avLst/>
+          </a:prstGeom>
+        </p:spPr>
+      </p:pic>
+    </p:spTree>
+    <p:extLst>
+      <p:ext uri="{BB962C8B-B14F-4D97-AF65-F5344CB8AC3E}">
+        <p14:creationId xmlns:p14="http://schemas.microsoft.com/office/powerpoint/2010/main" val="1996163946"/>
+      </p:ext>
+    </p:extLst>
+  </p:cSld>
+  <p:clrMapOvr>
+    <a:masterClrMapping/>
+  </p:clrMapOvr>
+</p:sld>
+</file>
+
+<file path=ppt/slides/slide58.xml><?xml version="1.0" encoding="utf-8"?>
+<p:sld xmlns:a="http://schemas.openxmlformats.org/drawingml/2006/main" xmlns:r="http://schemas.openxmlformats.org/officeDocument/2006/relationships" xmlns:p="http://schemas.openxmlformats.org/presentationml/2006/main">
+  <p:cSld>
+    <p:spTree>
+      <p:nvGrpSpPr>
+        <p:cNvPr id="1" name="">
+          <a:extLst>
+            <a:ext uri="{FF2B5EF4-FFF2-40B4-BE49-F238E27FC236}">
+              <a16:creationId xmlns:a16="http://schemas.microsoft.com/office/drawing/2014/main" id="{DE9FD763-03DC-AA98-A7E2-3CDB9D2982A2}"/>
+            </a:ext>
+          </a:extLst>
+        </p:cNvPr>
+        <p:cNvGrpSpPr/>
+        <p:nvPr/>
+      </p:nvGrpSpPr>
+      <p:grpSpPr>
+        <a:xfrm>
+          <a:off x="0" y="0"/>
+          <a:ext cx="0" cy="0"/>
+          <a:chOff x="0" y="0"/>
+          <a:chExt cx="0" cy="0"/>
+        </a:xfrm>
+      </p:grpSpPr>
+      <p:pic>
+        <p:nvPicPr>
+          <p:cNvPr id="4" name="Picture 3" descr="450808d6-f018-4170-8863-633347777b52.png">
+            <a:extLst>
+              <a:ext uri="{FF2B5EF4-FFF2-40B4-BE49-F238E27FC236}">
+                <a16:creationId xmlns:a16="http://schemas.microsoft.com/office/drawing/2014/main" id="{CD6B637A-D64E-E2DC-886D-444A9BB73C35}"/>
+              </a:ext>
+            </a:extLst>
+          </p:cNvPr>
+          <p:cNvPicPr>
+            <a:picLocks noChangeAspect="1"/>
+          </p:cNvPicPr>
+          <p:nvPr/>
+        </p:nvPicPr>
+        <p:blipFill>
+          <a:blip r:embed="rId2"/>
+          <a:stretch>
+            <a:fillRect/>
+          </a:stretch>
+        </p:blipFill>
+        <p:spPr>
+          <a:xfrm>
+            <a:off x="0" y="0"/>
+            <a:ext cx="9144000" cy="6858000"/>
+          </a:xfrm>
+          <a:prstGeom prst="rect">
+            <a:avLst/>
+          </a:prstGeom>
+        </p:spPr>
+      </p:pic>
+      <p:pic>
+        <p:nvPicPr>
+          <p:cNvPr id="8" name="Picture 7">
+            <a:extLst>
+              <a:ext uri="{FF2B5EF4-FFF2-40B4-BE49-F238E27FC236}">
+                <a16:creationId xmlns:a16="http://schemas.microsoft.com/office/drawing/2014/main" id="{7DEDA73B-2C67-BD0A-31AF-72A8F355359C}"/>
+              </a:ext>
+            </a:extLst>
+          </p:cNvPr>
+          <p:cNvPicPr>
+            <a:picLocks noChangeAspect="1"/>
+          </p:cNvPicPr>
+          <p:nvPr/>
+        </p:nvPicPr>
+        <p:blipFill>
+          <a:blip r:embed="rId3"/>
+          <a:stretch>
+            <a:fillRect/>
+          </a:stretch>
+        </p:blipFill>
+        <p:spPr>
+          <a:xfrm>
+            <a:off x="7315200" y="6114831"/>
+            <a:ext cx="1708662" cy="632838"/>
+          </a:xfrm>
+          <a:prstGeom prst="rect">
+            <a:avLst/>
+          </a:prstGeom>
+        </p:spPr>
+      </p:pic>
+    </p:spTree>
+    <p:extLst>
+      <p:ext uri="{BB962C8B-B14F-4D97-AF65-F5344CB8AC3E}">
+        <p14:creationId xmlns:p14="http://schemas.microsoft.com/office/powerpoint/2010/main" val="3366890361"/>
+      </p:ext>
+    </p:extLst>
+  </p:cSld>
+  <p:clrMapOvr>
+    <a:masterClrMapping/>
+  </p:clrMapOvr>
+</p:sld>
+</file>
+
+<file path=ppt/slides/slide59.xml><?xml version="1.0" encoding="utf-8"?>
+<p:sld xmlns:a="http://schemas.openxmlformats.org/drawingml/2006/main" xmlns:r="http://schemas.openxmlformats.org/officeDocument/2006/relationships" xmlns:p="http://schemas.openxmlformats.org/presentationml/2006/main">
+  <p:cSld>
+    <p:spTree>
+      <p:nvGrpSpPr>
+        <p:cNvPr id="1" name="">
+          <a:extLst>
+            <a:ext uri="{FF2B5EF4-FFF2-40B4-BE49-F238E27FC236}">
+              <a16:creationId xmlns:a16="http://schemas.microsoft.com/office/drawing/2014/main" id="{BB75ACEF-656F-C9A8-BD63-0DF118BC4F2E}"/>
+            </a:ext>
+          </a:extLst>
+        </p:cNvPr>
+        <p:cNvGrpSpPr/>
+        <p:nvPr/>
+      </p:nvGrpSpPr>
+      <p:grpSpPr>
+        <a:xfrm>
+          <a:off x="0" y="0"/>
+          <a:ext cx="0" cy="0"/>
+          <a:chOff x="0" y="0"/>
+          <a:chExt cx="0" cy="0"/>
+        </a:xfrm>
+      </p:grpSpPr>
+      <p:pic>
+        <p:nvPicPr>
+          <p:cNvPr id="4" name="Picture 3" descr="450808d6-f018-4170-8863-633347777b52.png">
+            <a:extLst>
+              <a:ext uri="{FF2B5EF4-FFF2-40B4-BE49-F238E27FC236}">
+                <a16:creationId xmlns:a16="http://schemas.microsoft.com/office/drawing/2014/main" id="{7C3EFB4B-E4C6-A432-5A36-AA1EF7B75722}"/>
+              </a:ext>
+            </a:extLst>
+          </p:cNvPr>
+          <p:cNvPicPr>
+            <a:picLocks noChangeAspect="1"/>
+          </p:cNvPicPr>
+          <p:nvPr/>
+        </p:nvPicPr>
+        <p:blipFill>
+          <a:blip r:embed="rId2"/>
+          <a:stretch>
+            <a:fillRect/>
+          </a:stretch>
+        </p:blipFill>
+        <p:spPr>
+          <a:xfrm>
+            <a:off x="0" y="0"/>
+            <a:ext cx="9144000" cy="6858000"/>
+          </a:xfrm>
+          <a:prstGeom prst="rect">
+            <a:avLst/>
+          </a:prstGeom>
+        </p:spPr>
+      </p:pic>
+      <p:pic>
+        <p:nvPicPr>
+          <p:cNvPr id="8" name="Picture 7">
+            <a:extLst>
+              <a:ext uri="{FF2B5EF4-FFF2-40B4-BE49-F238E27FC236}">
+                <a16:creationId xmlns:a16="http://schemas.microsoft.com/office/drawing/2014/main" id="{D461BD14-0FE5-6DC5-BA6D-6EB04EDAFA22}"/>
+              </a:ext>
+            </a:extLst>
+          </p:cNvPr>
+          <p:cNvPicPr>
+            <a:picLocks noChangeAspect="1"/>
+          </p:cNvPicPr>
+          <p:nvPr/>
+        </p:nvPicPr>
+        <p:blipFill>
+          <a:blip r:embed="rId3"/>
+          <a:stretch>
+            <a:fillRect/>
+          </a:stretch>
+        </p:blipFill>
+        <p:spPr>
+          <a:xfrm>
+            <a:off x="7315200" y="6114831"/>
+            <a:ext cx="1708662" cy="632838"/>
+          </a:xfrm>
+          <a:prstGeom prst="rect">
+            <a:avLst/>
+          </a:prstGeom>
+        </p:spPr>
+      </p:pic>
+    </p:spTree>
+    <p:extLst>
+      <p:ext uri="{BB962C8B-B14F-4D97-AF65-F5344CB8AC3E}">
+        <p14:creationId xmlns:p14="http://schemas.microsoft.com/office/powerpoint/2010/main" val="1168027374"/>
+      </p:ext>
+    </p:extLst>
+  </p:cSld>
+  <p:clrMapOvr>
+    <a:masterClrMapping/>
+  </p:clrMapOvr>
+</p:sld>
+</file>
+
 <file path=ppt/slides/slide6.xml><?xml version="1.0" encoding="utf-8"?>
 <p:sld xmlns:a="http://schemas.openxmlformats.org/drawingml/2006/main" xmlns:r="http://schemas.openxmlformats.org/officeDocument/2006/relationships" xmlns:p="http://schemas.openxmlformats.org/presentationml/2006/main">
   <p:cSld>
@@ -11873,6 +15540,198 @@
     <p:extLst>
       <p:ext uri="{BB962C8B-B14F-4D97-AF65-F5344CB8AC3E}">
         <p14:creationId xmlns:p14="http://schemas.microsoft.com/office/powerpoint/2010/main" val="3754003126"/>
+      </p:ext>
+    </p:extLst>
+  </p:cSld>
+  <p:clrMapOvr>
+    <a:masterClrMapping/>
+  </p:clrMapOvr>
+</p:sld>
+</file>
+
+<file path=ppt/slides/slide60.xml><?xml version="1.0" encoding="utf-8"?>
+<p:sld xmlns:a="http://schemas.openxmlformats.org/drawingml/2006/main" xmlns:r="http://schemas.openxmlformats.org/officeDocument/2006/relationships" xmlns:p="http://schemas.openxmlformats.org/presentationml/2006/main">
+  <p:cSld>
+    <p:spTree>
+      <p:nvGrpSpPr>
+        <p:cNvPr id="1" name="">
+          <a:extLst>
+            <a:ext uri="{FF2B5EF4-FFF2-40B4-BE49-F238E27FC236}">
+              <a16:creationId xmlns:a16="http://schemas.microsoft.com/office/drawing/2014/main" id="{F0880F1E-5F93-3B45-1DFC-0599D8E97212}"/>
+            </a:ext>
+          </a:extLst>
+        </p:cNvPr>
+        <p:cNvGrpSpPr/>
+        <p:nvPr/>
+      </p:nvGrpSpPr>
+      <p:grpSpPr>
+        <a:xfrm>
+          <a:off x="0" y="0"/>
+          <a:ext cx="0" cy="0"/>
+          <a:chOff x="0" y="0"/>
+          <a:chExt cx="0" cy="0"/>
+        </a:xfrm>
+      </p:grpSpPr>
+      <p:pic>
+        <p:nvPicPr>
+          <p:cNvPr id="4" name="Picture 3" descr="450808d6-f018-4170-8863-633347777b52.png">
+            <a:extLst>
+              <a:ext uri="{FF2B5EF4-FFF2-40B4-BE49-F238E27FC236}">
+                <a16:creationId xmlns:a16="http://schemas.microsoft.com/office/drawing/2014/main" id="{21109BF3-6ADF-AB01-AA3D-B9931E0093F3}"/>
+              </a:ext>
+            </a:extLst>
+          </p:cNvPr>
+          <p:cNvPicPr>
+            <a:picLocks noChangeAspect="1"/>
+          </p:cNvPicPr>
+          <p:nvPr/>
+        </p:nvPicPr>
+        <p:blipFill>
+          <a:blip r:embed="rId2"/>
+          <a:stretch>
+            <a:fillRect/>
+          </a:stretch>
+        </p:blipFill>
+        <p:spPr>
+          <a:xfrm>
+            <a:off x="0" y="0"/>
+            <a:ext cx="9144000" cy="6858000"/>
+          </a:xfrm>
+          <a:prstGeom prst="rect">
+            <a:avLst/>
+          </a:prstGeom>
+        </p:spPr>
+      </p:pic>
+      <p:pic>
+        <p:nvPicPr>
+          <p:cNvPr id="8" name="Picture 7">
+            <a:extLst>
+              <a:ext uri="{FF2B5EF4-FFF2-40B4-BE49-F238E27FC236}">
+                <a16:creationId xmlns:a16="http://schemas.microsoft.com/office/drawing/2014/main" id="{E6F95899-0FDD-4B96-54AB-D9AB7079BBD8}"/>
+              </a:ext>
+            </a:extLst>
+          </p:cNvPr>
+          <p:cNvPicPr>
+            <a:picLocks noChangeAspect="1"/>
+          </p:cNvPicPr>
+          <p:nvPr/>
+        </p:nvPicPr>
+        <p:blipFill>
+          <a:blip r:embed="rId3"/>
+          <a:stretch>
+            <a:fillRect/>
+          </a:stretch>
+        </p:blipFill>
+        <p:spPr>
+          <a:xfrm>
+            <a:off x="7315200" y="6114831"/>
+            <a:ext cx="1708662" cy="632838"/>
+          </a:xfrm>
+          <a:prstGeom prst="rect">
+            <a:avLst/>
+          </a:prstGeom>
+        </p:spPr>
+      </p:pic>
+    </p:spTree>
+    <p:extLst>
+      <p:ext uri="{BB962C8B-B14F-4D97-AF65-F5344CB8AC3E}">
+        <p14:creationId xmlns:p14="http://schemas.microsoft.com/office/powerpoint/2010/main" val="2230744344"/>
+      </p:ext>
+    </p:extLst>
+  </p:cSld>
+  <p:clrMapOvr>
+    <a:masterClrMapping/>
+  </p:clrMapOvr>
+</p:sld>
+</file>
+
+<file path=ppt/slides/slide61.xml><?xml version="1.0" encoding="utf-8"?>
+<p:sld xmlns:a="http://schemas.openxmlformats.org/drawingml/2006/main" xmlns:r="http://schemas.openxmlformats.org/officeDocument/2006/relationships" xmlns:p="http://schemas.openxmlformats.org/presentationml/2006/main">
+  <p:cSld>
+    <p:spTree>
+      <p:nvGrpSpPr>
+        <p:cNvPr id="1" name="">
+          <a:extLst>
+            <a:ext uri="{FF2B5EF4-FFF2-40B4-BE49-F238E27FC236}">
+              <a16:creationId xmlns:a16="http://schemas.microsoft.com/office/drawing/2014/main" id="{CE12E005-DD0D-44A9-F67E-FD7831ADB506}"/>
+            </a:ext>
+          </a:extLst>
+        </p:cNvPr>
+        <p:cNvGrpSpPr/>
+        <p:nvPr/>
+      </p:nvGrpSpPr>
+      <p:grpSpPr>
+        <a:xfrm>
+          <a:off x="0" y="0"/>
+          <a:ext cx="0" cy="0"/>
+          <a:chOff x="0" y="0"/>
+          <a:chExt cx="0" cy="0"/>
+        </a:xfrm>
+      </p:grpSpPr>
+      <p:pic>
+        <p:nvPicPr>
+          <p:cNvPr id="4" name="Picture 3" descr="450808d6-f018-4170-8863-633347777b52.png">
+            <a:extLst>
+              <a:ext uri="{FF2B5EF4-FFF2-40B4-BE49-F238E27FC236}">
+                <a16:creationId xmlns:a16="http://schemas.microsoft.com/office/drawing/2014/main" id="{C7015D7B-DF3E-CCAF-0393-92025F5CC07A}"/>
+              </a:ext>
+            </a:extLst>
+          </p:cNvPr>
+          <p:cNvPicPr>
+            <a:picLocks noChangeAspect="1"/>
+          </p:cNvPicPr>
+          <p:nvPr/>
+        </p:nvPicPr>
+        <p:blipFill>
+          <a:blip r:embed="rId2"/>
+          <a:stretch>
+            <a:fillRect/>
+          </a:stretch>
+        </p:blipFill>
+        <p:spPr>
+          <a:xfrm>
+            <a:off x="0" y="0"/>
+            <a:ext cx="9144000" cy="6858000"/>
+          </a:xfrm>
+          <a:prstGeom prst="rect">
+            <a:avLst/>
+          </a:prstGeom>
+        </p:spPr>
+      </p:pic>
+      <p:pic>
+        <p:nvPicPr>
+          <p:cNvPr id="8" name="Picture 7">
+            <a:extLst>
+              <a:ext uri="{FF2B5EF4-FFF2-40B4-BE49-F238E27FC236}">
+                <a16:creationId xmlns:a16="http://schemas.microsoft.com/office/drawing/2014/main" id="{1221C1F3-622C-3C3E-7DCF-5A81727DD5EE}"/>
+              </a:ext>
+            </a:extLst>
+          </p:cNvPr>
+          <p:cNvPicPr>
+            <a:picLocks noChangeAspect="1"/>
+          </p:cNvPicPr>
+          <p:nvPr/>
+        </p:nvPicPr>
+        <p:blipFill>
+          <a:blip r:embed="rId3"/>
+          <a:stretch>
+            <a:fillRect/>
+          </a:stretch>
+        </p:blipFill>
+        <p:spPr>
+          <a:xfrm>
+            <a:off x="7315200" y="6114831"/>
+            <a:ext cx="1708662" cy="632838"/>
+          </a:xfrm>
+          <a:prstGeom prst="rect">
+            <a:avLst/>
+          </a:prstGeom>
+        </p:spPr>
+      </p:pic>
+    </p:spTree>
+    <p:extLst>
+      <p:ext uri="{BB962C8B-B14F-4D97-AF65-F5344CB8AC3E}">
+        <p14:creationId xmlns:p14="http://schemas.microsoft.com/office/powerpoint/2010/main" val="4064948346"/>
       </p:ext>
     </p:extLst>
   </p:cSld>
